--- a/deck/FirstPass_PortSwigger.pptx
+++ b/deck/FirstPass_PortSwigger.pptx
@@ -4,30 +4,27 @@
   <p:sldMasterIdLst>
     <p:sldMasterId id="2147483648" r:id="rId1"/>
   </p:sldMasterIdLst>
-  <p:notesMasterIdLst>
-    <p:notesMasterId r:id="rId20"/>
-  </p:notesMasterIdLst>
   <p:sldIdLst>
-    <p:sldId id="256" r:id="rId2"/>
-    <p:sldId id="257" r:id="rId3"/>
-    <p:sldId id="258" r:id="rId4"/>
-    <p:sldId id="259" r:id="rId5"/>
-    <p:sldId id="260" r:id="rId6"/>
-    <p:sldId id="261" r:id="rId7"/>
-    <p:sldId id="262" r:id="rId8"/>
-    <p:sldId id="263" r:id="rId9"/>
-    <p:sldId id="264" r:id="rId10"/>
-    <p:sldId id="265" r:id="rId11"/>
-    <p:sldId id="266" r:id="rId12"/>
-    <p:sldId id="267" r:id="rId13"/>
-    <p:sldId id="268" r:id="rId14"/>
-    <p:sldId id="269" r:id="rId15"/>
-    <p:sldId id="270" r:id="rId16"/>
-    <p:sldId id="271" r:id="rId17"/>
-    <p:sldId id="272" r:id="rId18"/>
-    <p:sldId id="273" r:id="rId19"/>
+    <p:sldId id="256" r:id="rId7"/>
+    <p:sldId id="257" r:id="rId8"/>
+    <p:sldId id="258" r:id="rId9"/>
+    <p:sldId id="259" r:id="rId10"/>
+    <p:sldId id="260" r:id="rId11"/>
+    <p:sldId id="261" r:id="rId12"/>
+    <p:sldId id="262" r:id="rId13"/>
+    <p:sldId id="263" r:id="rId14"/>
+    <p:sldId id="264" r:id="rId15"/>
+    <p:sldId id="265" r:id="rId16"/>
+    <p:sldId id="266" r:id="rId17"/>
+    <p:sldId id="267" r:id="rId18"/>
+    <p:sldId id="268" r:id="rId19"/>
+    <p:sldId id="269" r:id="rId20"/>
+    <p:sldId id="270" r:id="rId21"/>
+    <p:sldId id="271" r:id="rId22"/>
+    <p:sldId id="272" r:id="rId23"/>
+    <p:sldId id="273" r:id="rId24"/>
   </p:sldIdLst>
-  <p:sldSz cx="12192000" cy="6858000"/>
+  <p:sldSz cx="12191695" cy="6858000" type="screen4x3"/>
   <p:notesSz cx="6858000" cy="9144000"/>
   <p:defaultTextStyle>
     <a:defPPr>
@@ -124,454 +121,7 @@
       </a:defRPr>
     </a:lvl9pPr>
   </p:defaultTextStyle>
-  <p:extLst>
-    <p:ext uri="{EFAFB233-063F-42B5-8137-9DF3F51BA10A}">
-      <p15:sldGuideLst xmlns:p15="http://schemas.microsoft.com/office/powerpoint/2012/main">
-        <p15:guide id="1" orient="horz" pos="2160">
-          <p15:clr>
-            <a:srgbClr val="A4A3A4"/>
-          </p15:clr>
-        </p15:guide>
-        <p15:guide id="2" pos="2880">
-          <p15:clr>
-            <a:srgbClr val="A4A3A4"/>
-          </p15:clr>
-        </p15:guide>
-      </p15:sldGuideLst>
-    </p:ext>
-  </p:extLst>
 </p:presentation>
-</file>
-
-<file path=ppt/notesMasters/notesMaster1.xml><?xml version="1.0" encoding="utf-8"?>
-<p:notesMaster xmlns:a="http://schemas.openxmlformats.org/drawingml/2006/main" xmlns:r="http://schemas.openxmlformats.org/officeDocument/2006/relationships" xmlns:p="http://schemas.openxmlformats.org/presentationml/2006/main">
-  <p:cSld>
-    <p:bg>
-      <p:bgRef idx="1001">
-        <a:schemeClr val="bg1"/>
-      </p:bgRef>
-    </p:bg>
-    <p:spTree>
-      <p:nvGrpSpPr>
-        <p:cNvPr id="1" name=""/>
-        <p:cNvGrpSpPr/>
-        <p:nvPr/>
-      </p:nvGrpSpPr>
-      <p:grpSpPr>
-        <a:xfrm>
-          <a:off x="0" y="0"/>
-          <a:ext cx="0" cy="0"/>
-          <a:chOff x="0" y="0"/>
-          <a:chExt cx="0" cy="0"/>
-        </a:xfrm>
-      </p:grpSpPr>
-      <p:sp>
-        <p:nvSpPr>
-          <p:cNvPr id="2" name="Header Placeholder 1"/>
-          <p:cNvSpPr>
-            <a:spLocks noGrp="1"/>
-          </p:cNvSpPr>
-          <p:nvPr>
-            <p:ph type="hdr" sz="quarter"/>
-          </p:nvPr>
-        </p:nvSpPr>
-        <p:spPr>
-          <a:xfrm>
-            <a:off x="0" y="0"/>
-            <a:ext cx="2971800" cy="458788"/>
-          </a:xfrm>
-          <a:prstGeom prst="rect">
-            <a:avLst/>
-          </a:prstGeom>
-        </p:spPr>
-        <p:txBody>
-          <a:bodyPr vert="horz" lIns="91440" tIns="45720" rIns="91440" bIns="45720" rtlCol="0"/>
-          <a:lstStyle>
-            <a:lvl1pPr algn="l">
-              <a:defRPr sz="1200"/>
-            </a:lvl1pPr>
-          </a:lstStyle>
-          <a:p>
-            <a:endParaRPr lang="en-US"/>
-          </a:p>
-        </p:txBody>
-      </p:sp>
-      <p:sp>
-        <p:nvSpPr>
-          <p:cNvPr id="3" name="Date Placeholder 2"/>
-          <p:cNvSpPr>
-            <a:spLocks noGrp="1"/>
-          </p:cNvSpPr>
-          <p:nvPr>
-            <p:ph type="dt" idx="1"/>
-          </p:nvPr>
-        </p:nvSpPr>
-        <p:spPr>
-          <a:xfrm>
-            <a:off x="3884613" y="0"/>
-            <a:ext cx="2971800" cy="458788"/>
-          </a:xfrm>
-          <a:prstGeom prst="rect">
-            <a:avLst/>
-          </a:prstGeom>
-        </p:spPr>
-        <p:txBody>
-          <a:bodyPr vert="horz" lIns="91440" tIns="45720" rIns="91440" bIns="45720" rtlCol="0"/>
-          <a:lstStyle>
-            <a:lvl1pPr algn="r">
-              <a:defRPr sz="1200"/>
-            </a:lvl1pPr>
-          </a:lstStyle>
-          <a:p>
-            <a:fld id="{6AAFE9EB-1BF6-3F4A-8DC7-595CB37B088A}" type="datetimeFigureOut">
-              <a:t>7/8/26</a:t>
-            </a:fld>
-            <a:endParaRPr lang="en-US"/>
-          </a:p>
-        </p:txBody>
-      </p:sp>
-      <p:sp>
-        <p:nvSpPr>
-          <p:cNvPr id="4" name="Slide Image Placeholder 3"/>
-          <p:cNvSpPr>
-            <a:spLocks noGrp="1" noRot="1" noChangeAspect="1"/>
-          </p:cNvSpPr>
-          <p:nvPr>
-            <p:ph type="sldImg" idx="2"/>
-          </p:nvPr>
-        </p:nvSpPr>
-        <p:spPr>
-          <a:xfrm>
-            <a:off x="685800" y="1143000"/>
-            <a:ext cx="5486400" cy="3086100"/>
-          </a:xfrm>
-          <a:prstGeom prst="rect">
-            <a:avLst/>
-          </a:prstGeom>
-          <a:noFill/>
-          <a:ln w="12700">
-            <a:solidFill>
-              <a:prstClr val="black"/>
-            </a:solidFill>
-          </a:ln>
-        </p:spPr>
-        <p:txBody>
-          <a:bodyPr vert="horz" lIns="91440" tIns="45720" rIns="91440" bIns="45720" rtlCol="0" anchor="ctr"/>
-          <a:lstStyle/>
-          <a:p>
-            <a:endParaRPr lang="en-US"/>
-          </a:p>
-        </p:txBody>
-      </p:sp>
-      <p:sp>
-        <p:nvSpPr>
-          <p:cNvPr id="5" name="Notes Placeholder 4"/>
-          <p:cNvSpPr>
-            <a:spLocks noGrp="1"/>
-          </p:cNvSpPr>
-          <p:nvPr>
-            <p:ph type="body" sz="quarter" idx="3"/>
-          </p:nvPr>
-        </p:nvSpPr>
-        <p:spPr>
-          <a:xfrm>
-            <a:off x="685800" y="4400550"/>
-            <a:ext cx="5486400" cy="3600450"/>
-          </a:xfrm>
-          <a:prstGeom prst="rect">
-            <a:avLst/>
-          </a:prstGeom>
-        </p:spPr>
-        <p:txBody>
-          <a:bodyPr vert="horz" lIns="91440" tIns="45720" rIns="91440" bIns="45720" rtlCol="0"/>
-          <a:lstStyle/>
-          <a:p>
-            <a:pPr lvl="0"/>
-            <a:r>
-              <a:rPr lang="en-GB"/>
-              <a:t>Click to edit Master text styles</a:t>
-            </a:r>
-          </a:p>
-          <a:p>
-            <a:pPr lvl="1"/>
-            <a:r>
-              <a:rPr lang="en-GB"/>
-              <a:t>Second level</a:t>
-            </a:r>
-          </a:p>
-          <a:p>
-            <a:pPr lvl="2"/>
-            <a:r>
-              <a:rPr lang="en-GB"/>
-              <a:t>Third level</a:t>
-            </a:r>
-          </a:p>
-          <a:p>
-            <a:pPr lvl="3"/>
-            <a:r>
-              <a:rPr lang="en-GB"/>
-              <a:t>Fourth level</a:t>
-            </a:r>
-          </a:p>
-          <a:p>
-            <a:pPr lvl="4"/>
-            <a:r>
-              <a:rPr lang="en-GB"/>
-              <a:t>Fifth level</a:t>
-            </a:r>
-            <a:endParaRPr lang="en-US"/>
-          </a:p>
-        </p:txBody>
-      </p:sp>
-      <p:sp>
-        <p:nvSpPr>
-          <p:cNvPr id="6" name="Footer Placeholder 5"/>
-          <p:cNvSpPr>
-            <a:spLocks noGrp="1"/>
-          </p:cNvSpPr>
-          <p:nvPr>
-            <p:ph type="ftr" sz="quarter" idx="4"/>
-          </p:nvPr>
-        </p:nvSpPr>
-        <p:spPr>
-          <a:xfrm>
-            <a:off x="0" y="8685213"/>
-            <a:ext cx="2971800" cy="458787"/>
-          </a:xfrm>
-          <a:prstGeom prst="rect">
-            <a:avLst/>
-          </a:prstGeom>
-        </p:spPr>
-        <p:txBody>
-          <a:bodyPr vert="horz" lIns="91440" tIns="45720" rIns="91440" bIns="45720" rtlCol="0" anchor="b"/>
-          <a:lstStyle>
-            <a:lvl1pPr algn="l">
-              <a:defRPr sz="1200"/>
-            </a:lvl1pPr>
-          </a:lstStyle>
-          <a:p>
-            <a:endParaRPr lang="en-US"/>
-          </a:p>
-        </p:txBody>
-      </p:sp>
-      <p:sp>
-        <p:nvSpPr>
-          <p:cNvPr id="7" name="Slide Number Placeholder 6"/>
-          <p:cNvSpPr>
-            <a:spLocks noGrp="1"/>
-          </p:cNvSpPr>
-          <p:nvPr>
-            <p:ph type="sldNum" sz="quarter" idx="5"/>
-          </p:nvPr>
-        </p:nvSpPr>
-        <p:spPr>
-          <a:xfrm>
-            <a:off x="3884613" y="8685213"/>
-            <a:ext cx="2971800" cy="458787"/>
-          </a:xfrm>
-          <a:prstGeom prst="rect">
-            <a:avLst/>
-          </a:prstGeom>
-        </p:spPr>
-        <p:txBody>
-          <a:bodyPr vert="horz" lIns="91440" tIns="45720" rIns="91440" bIns="45720" rtlCol="0" anchor="b"/>
-          <a:lstStyle>
-            <a:lvl1pPr algn="r">
-              <a:defRPr sz="1200"/>
-            </a:lvl1pPr>
-          </a:lstStyle>
-          <a:p>
-            <a:fld id="{ACEF762E-083A-2A4D-A216-C81CCED43695}" type="slidenum">
-              <a:t>‹#›</a:t>
-            </a:fld>
-            <a:endParaRPr lang="en-US"/>
-          </a:p>
-        </p:txBody>
-      </p:sp>
-    </p:spTree>
-    <p:extLst>
-      <p:ext uri="{BB962C8B-B14F-4D97-AF65-F5344CB8AC3E}">
-        <p14:creationId xmlns:p14="http://schemas.microsoft.com/office/powerpoint/2010/main" val="372296401"/>
-      </p:ext>
-    </p:extLst>
-  </p:cSld>
-  <p:clrMap bg1="lt1" tx1="dk1" bg2="lt2" tx2="dk2" accent1="accent1" accent2="accent2" accent3="accent3" accent4="accent4" accent5="accent5" accent6="accent6" hlink="hlink" folHlink="folHlink"/>
-  <p:notesStyle>
-    <a:lvl1pPr marL="0" algn="l" defTabSz="914400" rtl="0" eaLnBrk="1" latinLnBrk="0" hangingPunct="1">
-      <a:defRPr sz="1200" kern="1200">
-        <a:solidFill>
-          <a:schemeClr val="tx1"/>
-        </a:solidFill>
-        <a:latin typeface="+mn-lt"/>
-        <a:ea typeface="+mn-ea"/>
-        <a:cs typeface="+mn-cs"/>
-      </a:defRPr>
-    </a:lvl1pPr>
-    <a:lvl2pPr marL="457200" algn="l" defTabSz="914400" rtl="0" eaLnBrk="1" latinLnBrk="0" hangingPunct="1">
-      <a:defRPr sz="1200" kern="1200">
-        <a:solidFill>
-          <a:schemeClr val="tx1"/>
-        </a:solidFill>
-        <a:latin typeface="+mn-lt"/>
-        <a:ea typeface="+mn-ea"/>
-        <a:cs typeface="+mn-cs"/>
-      </a:defRPr>
-    </a:lvl2pPr>
-    <a:lvl3pPr marL="914400" algn="l" defTabSz="914400" rtl="0" eaLnBrk="1" latinLnBrk="0" hangingPunct="1">
-      <a:defRPr sz="1200" kern="1200">
-        <a:solidFill>
-          <a:schemeClr val="tx1"/>
-        </a:solidFill>
-        <a:latin typeface="+mn-lt"/>
-        <a:ea typeface="+mn-ea"/>
-        <a:cs typeface="+mn-cs"/>
-      </a:defRPr>
-    </a:lvl3pPr>
-    <a:lvl4pPr marL="1371600" algn="l" defTabSz="914400" rtl="0" eaLnBrk="1" latinLnBrk="0" hangingPunct="1">
-      <a:defRPr sz="1200" kern="1200">
-        <a:solidFill>
-          <a:schemeClr val="tx1"/>
-        </a:solidFill>
-        <a:latin typeface="+mn-lt"/>
-        <a:ea typeface="+mn-ea"/>
-        <a:cs typeface="+mn-cs"/>
-      </a:defRPr>
-    </a:lvl4pPr>
-    <a:lvl5pPr marL="1828800" algn="l" defTabSz="914400" rtl="0" eaLnBrk="1" latinLnBrk="0" hangingPunct="1">
-      <a:defRPr sz="1200" kern="1200">
-        <a:solidFill>
-          <a:schemeClr val="tx1"/>
-        </a:solidFill>
-        <a:latin typeface="+mn-lt"/>
-        <a:ea typeface="+mn-ea"/>
-        <a:cs typeface="+mn-cs"/>
-      </a:defRPr>
-    </a:lvl5pPr>
-    <a:lvl6pPr marL="2286000" algn="l" defTabSz="914400" rtl="0" eaLnBrk="1" latinLnBrk="0" hangingPunct="1">
-      <a:defRPr sz="1200" kern="1200">
-        <a:solidFill>
-          <a:schemeClr val="tx1"/>
-        </a:solidFill>
-        <a:latin typeface="+mn-lt"/>
-        <a:ea typeface="+mn-ea"/>
-        <a:cs typeface="+mn-cs"/>
-      </a:defRPr>
-    </a:lvl6pPr>
-    <a:lvl7pPr marL="2743200" algn="l" defTabSz="914400" rtl="0" eaLnBrk="1" latinLnBrk="0" hangingPunct="1">
-      <a:defRPr sz="1200" kern="1200">
-        <a:solidFill>
-          <a:schemeClr val="tx1"/>
-        </a:solidFill>
-        <a:latin typeface="+mn-lt"/>
-        <a:ea typeface="+mn-ea"/>
-        <a:cs typeface="+mn-cs"/>
-      </a:defRPr>
-    </a:lvl7pPr>
-    <a:lvl8pPr marL="3200400" algn="l" defTabSz="914400" rtl="0" eaLnBrk="1" latinLnBrk="0" hangingPunct="1">
-      <a:defRPr sz="1200" kern="1200">
-        <a:solidFill>
-          <a:schemeClr val="tx1"/>
-        </a:solidFill>
-        <a:latin typeface="+mn-lt"/>
-        <a:ea typeface="+mn-ea"/>
-        <a:cs typeface="+mn-cs"/>
-      </a:defRPr>
-    </a:lvl8pPr>
-    <a:lvl9pPr marL="3657600" algn="l" defTabSz="914400" rtl="0" eaLnBrk="1" latinLnBrk="0" hangingPunct="1">
-      <a:defRPr sz="1200" kern="1200">
-        <a:solidFill>
-          <a:schemeClr val="tx1"/>
-        </a:solidFill>
-        <a:latin typeface="+mn-lt"/>
-        <a:ea typeface="+mn-ea"/>
-        <a:cs typeface="+mn-cs"/>
-      </a:defRPr>
-    </a:lvl9pPr>
-  </p:notesStyle>
-</p:notesMaster>
-</file>
-
-<file path=ppt/notesSlides/notesSlide1.xml><?xml version="1.0" encoding="utf-8"?>
-<p:notes xmlns:a="http://schemas.openxmlformats.org/drawingml/2006/main" xmlns:r="http://schemas.openxmlformats.org/officeDocument/2006/relationships" xmlns:p="http://schemas.openxmlformats.org/presentationml/2006/main">
-  <p:cSld>
-    <p:spTree>
-      <p:nvGrpSpPr>
-        <p:cNvPr id="1" name=""/>
-        <p:cNvGrpSpPr/>
-        <p:nvPr/>
-      </p:nvGrpSpPr>
-      <p:grpSpPr>
-        <a:xfrm>
-          <a:off x="0" y="0"/>
-          <a:ext cx="0" cy="0"/>
-          <a:chOff x="0" y="0"/>
-          <a:chExt cx="0" cy="0"/>
-        </a:xfrm>
-      </p:grpSpPr>
-      <p:sp>
-        <p:nvSpPr>
-          <p:cNvPr id="2" name="Slide Image Placeholder 1"/>
-          <p:cNvSpPr>
-            <a:spLocks noGrp="1" noRot="1" noChangeAspect="1"/>
-          </p:cNvSpPr>
-          <p:nvPr>
-            <p:ph type="sldImg"/>
-          </p:nvPr>
-        </p:nvSpPr>
-        <p:spPr/>
-      </p:sp>
-      <p:sp>
-        <p:nvSpPr>
-          <p:cNvPr id="3" name="Notes Placeholder 2"/>
-          <p:cNvSpPr>
-            <a:spLocks noGrp="1"/>
-          </p:cNvSpPr>
-          <p:nvPr>
-            <p:ph type="body" idx="1"/>
-          </p:nvPr>
-        </p:nvSpPr>
-        <p:spPr/>
-        <p:txBody>
-          <a:bodyPr/>
-          <a:lstStyle/>
-          <a:p>
-            <a:endParaRPr lang="en-US"/>
-          </a:p>
-        </p:txBody>
-      </p:sp>
-      <p:sp>
-        <p:nvSpPr>
-          <p:cNvPr id="4" name="Slide Number Placeholder 3"/>
-          <p:cNvSpPr>
-            <a:spLocks noGrp="1"/>
-          </p:cNvSpPr>
-          <p:nvPr>
-            <p:ph type="sldNum" sz="quarter" idx="5"/>
-          </p:nvPr>
-        </p:nvSpPr>
-        <p:spPr/>
-        <p:txBody>
-          <a:bodyPr/>
-          <a:lstStyle/>
-          <a:p>
-            <a:fld id="{ACEF762E-083A-2A4D-A216-C81CCED43695}" type="slidenum">
-              <a:t>2</a:t>
-            </a:fld>
-            <a:endParaRPr lang="en-US"/>
-          </a:p>
-        </p:txBody>
-      </p:sp>
-    </p:spTree>
-    <p:extLst>
-      <p:ext uri="{BB962C8B-B14F-4D97-AF65-F5344CB8AC3E}">
-        <p14:creationId xmlns:p14="http://schemas.microsoft.com/office/powerpoint/2010/main" val="958467625"/>
-      </p:ext>
-    </p:extLst>
-  </p:cSld>
-  <p:clrMapOvr>
-    <a:masterClrMapping/>
-  </p:clrMapOvr>
-</p:notes>
 </file>
 
 <file path=ppt/slideLayouts/slideLayout1.xml><?xml version="1.0" encoding="utf-8"?>
@@ -612,9 +162,10 @@
           <a:lstStyle/>
           <a:p>
             <a:r>
-              <a:rPr lang="en-US"/>
+              <a:rPr lang="en-US" smtClean="0"/>
               <a:t>Click to edit Master title style</a:t>
             </a:r>
+            <a:endParaRPr lang="en-US"/>
           </a:p>
         </p:txBody>
       </p:sp>
@@ -730,9 +281,10 @@
           </a:lstStyle>
           <a:p>
             <a:r>
-              <a:rPr lang="en-US"/>
+              <a:rPr lang="en-US" smtClean="0"/>
               <a:t>Click to edit Master subtitle style</a:t>
             </a:r>
+            <a:endParaRPr lang="en-US"/>
           </a:p>
         </p:txBody>
       </p:sp>
@@ -753,7 +305,7 @@
           <a:p>
             <a:fld id="{5BCAD085-E8A6-8845-BD4E-CB4CCA059FC4}" type="datetimeFigureOut">
               <a:rPr lang="en-US" smtClean="0"/>
-              <a:t>7/8/26</a:t>
+              <a:t>1/27/13</a:t>
             </a:fld>
             <a:endParaRPr lang="en-US"/>
           </a:p>
@@ -847,9 +399,10 @@
           <a:lstStyle/>
           <a:p>
             <a:r>
-              <a:rPr lang="en-US"/>
+              <a:rPr lang="en-US" smtClean="0"/>
               <a:t>Click to edit Master title style</a:t>
             </a:r>
+            <a:endParaRPr lang="en-US"/>
           </a:p>
         </p:txBody>
       </p:sp>
@@ -870,37 +423,38 @@
           <a:p>
             <a:pPr lvl="0"/>
             <a:r>
-              <a:rPr lang="en-US"/>
+              <a:rPr lang="en-US" smtClean="0"/>
               <a:t>Click to edit Master text styles</a:t>
             </a:r>
           </a:p>
           <a:p>
             <a:pPr lvl="1"/>
             <a:r>
-              <a:rPr lang="en-US"/>
+              <a:rPr lang="en-US" smtClean="0"/>
               <a:t>Second level</a:t>
             </a:r>
           </a:p>
           <a:p>
             <a:pPr lvl="2"/>
             <a:r>
-              <a:rPr lang="en-US"/>
+              <a:rPr lang="en-US" smtClean="0"/>
               <a:t>Third level</a:t>
             </a:r>
           </a:p>
           <a:p>
             <a:pPr lvl="3"/>
             <a:r>
-              <a:rPr lang="en-US"/>
+              <a:rPr lang="en-US" smtClean="0"/>
               <a:t>Fourth level</a:t>
             </a:r>
           </a:p>
           <a:p>
             <a:pPr lvl="4"/>
             <a:r>
-              <a:rPr lang="en-US"/>
+              <a:rPr lang="en-US" smtClean="0"/>
               <a:t>Fifth level</a:t>
             </a:r>
+            <a:endParaRPr lang="en-US"/>
           </a:p>
         </p:txBody>
       </p:sp>
@@ -921,7 +475,7 @@
           <a:p>
             <a:fld id="{5BCAD085-E8A6-8845-BD4E-CB4CCA059FC4}" type="datetimeFigureOut">
               <a:rPr lang="en-US" smtClean="0"/>
-              <a:t>7/8/26</a:t>
+              <a:t>1/27/13</a:t>
             </a:fld>
             <a:endParaRPr lang="en-US"/>
           </a:p>
@@ -1020,9 +574,10 @@
           <a:lstStyle/>
           <a:p>
             <a:r>
-              <a:rPr lang="en-US"/>
+              <a:rPr lang="en-US" smtClean="0"/>
               <a:t>Click to edit Master title style</a:t>
             </a:r>
+            <a:endParaRPr lang="en-US"/>
           </a:p>
         </p:txBody>
       </p:sp>
@@ -1048,37 +603,38 @@
           <a:p>
             <a:pPr lvl="0"/>
             <a:r>
-              <a:rPr lang="en-US"/>
+              <a:rPr lang="en-US" smtClean="0"/>
               <a:t>Click to edit Master text styles</a:t>
             </a:r>
           </a:p>
           <a:p>
             <a:pPr lvl="1"/>
             <a:r>
-              <a:rPr lang="en-US"/>
+              <a:rPr lang="en-US" smtClean="0"/>
               <a:t>Second level</a:t>
             </a:r>
           </a:p>
           <a:p>
             <a:pPr lvl="2"/>
             <a:r>
-              <a:rPr lang="en-US"/>
+              <a:rPr lang="en-US" smtClean="0"/>
               <a:t>Third level</a:t>
             </a:r>
           </a:p>
           <a:p>
             <a:pPr lvl="3"/>
             <a:r>
-              <a:rPr lang="en-US"/>
+              <a:rPr lang="en-US" smtClean="0"/>
               <a:t>Fourth level</a:t>
             </a:r>
           </a:p>
           <a:p>
             <a:pPr lvl="4"/>
             <a:r>
-              <a:rPr lang="en-US"/>
+              <a:rPr lang="en-US" smtClean="0"/>
               <a:t>Fifth level</a:t>
             </a:r>
+            <a:endParaRPr lang="en-US"/>
           </a:p>
         </p:txBody>
       </p:sp>
@@ -1099,7 +655,7 @@
           <a:p>
             <a:fld id="{5BCAD085-E8A6-8845-BD4E-CB4CCA059FC4}" type="datetimeFigureOut">
               <a:rPr lang="en-US" smtClean="0"/>
-              <a:t>7/8/26</a:t>
+              <a:t>1/27/13</a:t>
             </a:fld>
             <a:endParaRPr lang="en-US"/>
           </a:p>
@@ -1193,9 +749,10 @@
           <a:lstStyle/>
           <a:p>
             <a:r>
-              <a:rPr lang="en-US"/>
+              <a:rPr lang="en-US" smtClean="0"/>
               <a:t>Click to edit Master title style</a:t>
             </a:r>
+            <a:endParaRPr lang="en-US"/>
           </a:p>
         </p:txBody>
       </p:sp>
@@ -1216,37 +773,38 @@
           <a:p>
             <a:pPr lvl="0"/>
             <a:r>
-              <a:rPr lang="en-US"/>
+              <a:rPr lang="en-US" smtClean="0"/>
               <a:t>Click to edit Master text styles</a:t>
             </a:r>
           </a:p>
           <a:p>
             <a:pPr lvl="1"/>
             <a:r>
-              <a:rPr lang="en-US"/>
+              <a:rPr lang="en-US" smtClean="0"/>
               <a:t>Second level</a:t>
             </a:r>
           </a:p>
           <a:p>
             <a:pPr lvl="2"/>
             <a:r>
-              <a:rPr lang="en-US"/>
+              <a:rPr lang="en-US" smtClean="0"/>
               <a:t>Third level</a:t>
             </a:r>
           </a:p>
           <a:p>
             <a:pPr lvl="3"/>
             <a:r>
-              <a:rPr lang="en-US"/>
+              <a:rPr lang="en-US" smtClean="0"/>
               <a:t>Fourth level</a:t>
             </a:r>
           </a:p>
           <a:p>
             <a:pPr lvl="4"/>
             <a:r>
-              <a:rPr lang="en-US"/>
+              <a:rPr lang="en-US" smtClean="0"/>
               <a:t>Fifth level</a:t>
             </a:r>
+            <a:endParaRPr lang="en-US"/>
           </a:p>
         </p:txBody>
       </p:sp>
@@ -1267,7 +825,7 @@
           <a:p>
             <a:fld id="{5BCAD085-E8A6-8845-BD4E-CB4CCA059FC4}" type="datetimeFigureOut">
               <a:rPr lang="en-US" smtClean="0"/>
-              <a:t>7/8/26</a:t>
+              <a:t>1/27/13</a:t>
             </a:fld>
             <a:endParaRPr lang="en-US"/>
           </a:p>
@@ -1370,9 +928,10 @@
           </a:lstStyle>
           <a:p>
             <a:r>
-              <a:rPr lang="en-US"/>
+              <a:rPr lang="en-US" smtClean="0"/>
               <a:t>Click to edit Master title style</a:t>
             </a:r>
+            <a:endParaRPr lang="en-US"/>
           </a:p>
         </p:txBody>
       </p:sp>
@@ -1489,7 +1048,7 @@
           <a:p>
             <a:pPr lvl="0"/>
             <a:r>
-              <a:rPr lang="en-US"/>
+              <a:rPr lang="en-US" smtClean="0"/>
               <a:t>Click to edit Master text styles</a:t>
             </a:r>
           </a:p>
@@ -1512,7 +1071,7 @@
           <a:p>
             <a:fld id="{5BCAD085-E8A6-8845-BD4E-CB4CCA059FC4}" type="datetimeFigureOut">
               <a:rPr lang="en-US" smtClean="0"/>
-              <a:t>7/8/26</a:t>
+              <a:t>1/27/13</a:t>
             </a:fld>
             <a:endParaRPr lang="en-US"/>
           </a:p>
@@ -1606,9 +1165,10 @@
           <a:lstStyle/>
           <a:p>
             <a:r>
-              <a:rPr lang="en-US"/>
+              <a:rPr lang="en-US" smtClean="0"/>
               <a:t>Click to edit Master title style</a:t>
             </a:r>
+            <a:endParaRPr lang="en-US"/>
           </a:p>
         </p:txBody>
       </p:sp>
@@ -1662,37 +1222,38 @@
           <a:p>
             <a:pPr lvl="0"/>
             <a:r>
-              <a:rPr lang="en-US"/>
+              <a:rPr lang="en-US" smtClean="0"/>
               <a:t>Click to edit Master text styles</a:t>
             </a:r>
           </a:p>
           <a:p>
             <a:pPr lvl="1"/>
             <a:r>
-              <a:rPr lang="en-US"/>
+              <a:rPr lang="en-US" smtClean="0"/>
               <a:t>Second level</a:t>
             </a:r>
           </a:p>
           <a:p>
             <a:pPr lvl="2"/>
             <a:r>
-              <a:rPr lang="en-US"/>
+              <a:rPr lang="en-US" smtClean="0"/>
               <a:t>Third level</a:t>
             </a:r>
           </a:p>
           <a:p>
             <a:pPr lvl="3"/>
             <a:r>
-              <a:rPr lang="en-US"/>
+              <a:rPr lang="en-US" smtClean="0"/>
               <a:t>Fourth level</a:t>
             </a:r>
           </a:p>
           <a:p>
             <a:pPr lvl="4"/>
             <a:r>
-              <a:rPr lang="en-US"/>
+              <a:rPr lang="en-US" smtClean="0"/>
               <a:t>Fifth level</a:t>
             </a:r>
+            <a:endParaRPr lang="en-US"/>
           </a:p>
         </p:txBody>
       </p:sp>
@@ -1746,37 +1307,38 @@
           <a:p>
             <a:pPr lvl="0"/>
             <a:r>
-              <a:rPr lang="en-US"/>
+              <a:rPr lang="en-US" smtClean="0"/>
               <a:t>Click to edit Master text styles</a:t>
             </a:r>
           </a:p>
           <a:p>
             <a:pPr lvl="1"/>
             <a:r>
-              <a:rPr lang="en-US"/>
+              <a:rPr lang="en-US" smtClean="0"/>
               <a:t>Second level</a:t>
             </a:r>
           </a:p>
           <a:p>
             <a:pPr lvl="2"/>
             <a:r>
-              <a:rPr lang="en-US"/>
+              <a:rPr lang="en-US" smtClean="0"/>
               <a:t>Third level</a:t>
             </a:r>
           </a:p>
           <a:p>
             <a:pPr lvl="3"/>
             <a:r>
-              <a:rPr lang="en-US"/>
+              <a:rPr lang="en-US" smtClean="0"/>
               <a:t>Fourth level</a:t>
             </a:r>
           </a:p>
           <a:p>
             <a:pPr lvl="4"/>
             <a:r>
-              <a:rPr lang="en-US"/>
+              <a:rPr lang="en-US" smtClean="0"/>
               <a:t>Fifth level</a:t>
             </a:r>
+            <a:endParaRPr lang="en-US"/>
           </a:p>
         </p:txBody>
       </p:sp>
@@ -1797,7 +1359,7 @@
           <a:p>
             <a:fld id="{5BCAD085-E8A6-8845-BD4E-CB4CCA059FC4}" type="datetimeFigureOut">
               <a:rPr lang="en-US" smtClean="0"/>
-              <a:t>7/8/26</a:t>
+              <a:t>1/27/13</a:t>
             </a:fld>
             <a:endParaRPr lang="en-US"/>
           </a:p>
@@ -1895,9 +1457,10 @@
           </a:lstStyle>
           <a:p>
             <a:r>
-              <a:rPr lang="en-US"/>
+              <a:rPr lang="en-US" smtClean="0"/>
               <a:t>Click to edit Master title style</a:t>
             </a:r>
+            <a:endParaRPr lang="en-US"/>
           </a:p>
         </p:txBody>
       </p:sp>
@@ -1960,7 +1523,7 @@
           <a:p>
             <a:pPr lvl="0"/>
             <a:r>
-              <a:rPr lang="en-US"/>
+              <a:rPr lang="en-US" smtClean="0"/>
               <a:t>Click to edit Master text styles</a:t>
             </a:r>
           </a:p>
@@ -2016,37 +1579,38 @@
           <a:p>
             <a:pPr lvl="0"/>
             <a:r>
-              <a:rPr lang="en-US"/>
+              <a:rPr lang="en-US" smtClean="0"/>
               <a:t>Click to edit Master text styles</a:t>
             </a:r>
           </a:p>
           <a:p>
             <a:pPr lvl="1"/>
             <a:r>
-              <a:rPr lang="en-US"/>
+              <a:rPr lang="en-US" smtClean="0"/>
               <a:t>Second level</a:t>
             </a:r>
           </a:p>
           <a:p>
             <a:pPr lvl="2"/>
             <a:r>
-              <a:rPr lang="en-US"/>
+              <a:rPr lang="en-US" smtClean="0"/>
               <a:t>Third level</a:t>
             </a:r>
           </a:p>
           <a:p>
             <a:pPr lvl="3"/>
             <a:r>
-              <a:rPr lang="en-US"/>
+              <a:rPr lang="en-US" smtClean="0"/>
               <a:t>Fourth level</a:t>
             </a:r>
           </a:p>
           <a:p>
             <a:pPr lvl="4"/>
             <a:r>
-              <a:rPr lang="en-US"/>
+              <a:rPr lang="en-US" smtClean="0"/>
               <a:t>Fifth level</a:t>
             </a:r>
+            <a:endParaRPr lang="en-US"/>
           </a:p>
         </p:txBody>
       </p:sp>
@@ -2109,7 +1673,7 @@
           <a:p>
             <a:pPr lvl="0"/>
             <a:r>
-              <a:rPr lang="en-US"/>
+              <a:rPr lang="en-US" smtClean="0"/>
               <a:t>Click to edit Master text styles</a:t>
             </a:r>
           </a:p>
@@ -2165,37 +1729,38 @@
           <a:p>
             <a:pPr lvl="0"/>
             <a:r>
-              <a:rPr lang="en-US"/>
+              <a:rPr lang="en-US" smtClean="0"/>
               <a:t>Click to edit Master text styles</a:t>
             </a:r>
           </a:p>
           <a:p>
             <a:pPr lvl="1"/>
             <a:r>
-              <a:rPr lang="en-US"/>
+              <a:rPr lang="en-US" smtClean="0"/>
               <a:t>Second level</a:t>
             </a:r>
           </a:p>
           <a:p>
             <a:pPr lvl="2"/>
             <a:r>
-              <a:rPr lang="en-US"/>
+              <a:rPr lang="en-US" smtClean="0"/>
               <a:t>Third level</a:t>
             </a:r>
           </a:p>
           <a:p>
             <a:pPr lvl="3"/>
             <a:r>
-              <a:rPr lang="en-US"/>
+              <a:rPr lang="en-US" smtClean="0"/>
               <a:t>Fourth level</a:t>
             </a:r>
           </a:p>
           <a:p>
             <a:pPr lvl="4"/>
             <a:r>
-              <a:rPr lang="en-US"/>
+              <a:rPr lang="en-US" smtClean="0"/>
               <a:t>Fifth level</a:t>
             </a:r>
+            <a:endParaRPr lang="en-US"/>
           </a:p>
         </p:txBody>
       </p:sp>
@@ -2216,7 +1781,7 @@
           <a:p>
             <a:fld id="{5BCAD085-E8A6-8845-BD4E-CB4CCA059FC4}" type="datetimeFigureOut">
               <a:rPr lang="en-US" smtClean="0"/>
-              <a:t>7/8/26</a:t>
+              <a:t>1/27/13</a:t>
             </a:fld>
             <a:endParaRPr lang="en-US"/>
           </a:p>
@@ -2310,9 +1875,10 @@
           <a:lstStyle/>
           <a:p>
             <a:r>
-              <a:rPr lang="en-US"/>
+              <a:rPr lang="en-US" smtClean="0"/>
               <a:t>Click to edit Master title style</a:t>
             </a:r>
+            <a:endParaRPr lang="en-US"/>
           </a:p>
         </p:txBody>
       </p:sp>
@@ -2333,7 +1899,7 @@
           <a:p>
             <a:fld id="{5BCAD085-E8A6-8845-BD4E-CB4CCA059FC4}" type="datetimeFigureOut">
               <a:rPr lang="en-US" smtClean="0"/>
-              <a:t>7/8/26</a:t>
+              <a:t>1/27/13</a:t>
             </a:fld>
             <a:endParaRPr lang="en-US"/>
           </a:p>
@@ -2428,7 +1994,7 @@
           <a:p>
             <a:fld id="{5BCAD085-E8A6-8845-BD4E-CB4CCA059FC4}" type="datetimeFigureOut">
               <a:rPr lang="en-US" smtClean="0"/>
-              <a:t>7/8/26</a:t>
+              <a:t>1/27/13</a:t>
             </a:fld>
             <a:endParaRPr lang="en-US"/>
           </a:p>
@@ -2531,9 +2097,10 @@
           </a:lstStyle>
           <a:p>
             <a:r>
-              <a:rPr lang="en-US"/>
+              <a:rPr lang="en-US" smtClean="0"/>
               <a:t>Click to edit Master title style</a:t>
             </a:r>
+            <a:endParaRPr lang="en-US"/>
           </a:p>
         </p:txBody>
       </p:sp>
@@ -2587,37 +2154,38 @@
           <a:p>
             <a:pPr lvl="0"/>
             <a:r>
-              <a:rPr lang="en-US"/>
+              <a:rPr lang="en-US" smtClean="0"/>
               <a:t>Click to edit Master text styles</a:t>
             </a:r>
           </a:p>
           <a:p>
             <a:pPr lvl="1"/>
             <a:r>
-              <a:rPr lang="en-US"/>
+              <a:rPr lang="en-US" smtClean="0"/>
               <a:t>Second level</a:t>
             </a:r>
           </a:p>
           <a:p>
             <a:pPr lvl="2"/>
             <a:r>
-              <a:rPr lang="en-US"/>
+              <a:rPr lang="en-US" smtClean="0"/>
               <a:t>Third level</a:t>
             </a:r>
           </a:p>
           <a:p>
             <a:pPr lvl="3"/>
             <a:r>
-              <a:rPr lang="en-US"/>
+              <a:rPr lang="en-US" smtClean="0"/>
               <a:t>Fourth level</a:t>
             </a:r>
           </a:p>
           <a:p>
             <a:pPr lvl="4"/>
             <a:r>
-              <a:rPr lang="en-US"/>
+              <a:rPr lang="en-US" smtClean="0"/>
               <a:t>Fifth level</a:t>
             </a:r>
+            <a:endParaRPr lang="en-US"/>
           </a:p>
         </p:txBody>
       </p:sp>
@@ -2680,7 +2248,7 @@
           <a:p>
             <a:pPr lvl="0"/>
             <a:r>
-              <a:rPr lang="en-US"/>
+              <a:rPr lang="en-US" smtClean="0"/>
               <a:t>Click to edit Master text styles</a:t>
             </a:r>
           </a:p>
@@ -2703,7 +2271,7 @@
           <a:p>
             <a:fld id="{5BCAD085-E8A6-8845-BD4E-CB4CCA059FC4}" type="datetimeFigureOut">
               <a:rPr lang="en-US" smtClean="0"/>
-              <a:t>7/8/26</a:t>
+              <a:t>1/27/13</a:t>
             </a:fld>
             <a:endParaRPr lang="en-US"/>
           </a:p>
@@ -2806,9 +2374,10 @@
           </a:lstStyle>
           <a:p>
             <a:r>
-              <a:rPr lang="en-US"/>
+              <a:rPr lang="en-US" smtClean="0"/>
               <a:t>Click to edit Master title style</a:t>
             </a:r>
+            <a:endParaRPr lang="en-US"/>
           </a:p>
         </p:txBody>
       </p:sp>
@@ -2932,7 +2501,7 @@
           <a:p>
             <a:pPr lvl="0"/>
             <a:r>
-              <a:rPr lang="en-US"/>
+              <a:rPr lang="en-US" smtClean="0"/>
               <a:t>Click to edit Master text styles</a:t>
             </a:r>
           </a:p>
@@ -2955,7 +2524,7 @@
           <a:p>
             <a:fld id="{5BCAD085-E8A6-8845-BD4E-CB4CCA059FC4}" type="datetimeFigureOut">
               <a:rPr lang="en-US" smtClean="0"/>
-              <a:t>7/8/26</a:t>
+              <a:t>1/27/13</a:t>
             </a:fld>
             <a:endParaRPr lang="en-US"/>
           </a:p>
@@ -3064,9 +2633,10 @@
           <a:lstStyle/>
           <a:p>
             <a:r>
-              <a:rPr lang="en-US"/>
+              <a:rPr lang="en-US" smtClean="0"/>
               <a:t>Click to edit Master title style</a:t>
             </a:r>
+            <a:endParaRPr lang="en-US"/>
           </a:p>
         </p:txBody>
       </p:sp>
@@ -3097,37 +2667,38 @@
           <a:p>
             <a:pPr lvl="0"/>
             <a:r>
-              <a:rPr lang="en-US"/>
+              <a:rPr lang="en-US" smtClean="0"/>
               <a:t>Click to edit Master text styles</a:t>
             </a:r>
           </a:p>
           <a:p>
             <a:pPr lvl="1"/>
             <a:r>
-              <a:rPr lang="en-US"/>
+              <a:rPr lang="en-US" smtClean="0"/>
               <a:t>Second level</a:t>
             </a:r>
           </a:p>
           <a:p>
             <a:pPr lvl="2"/>
             <a:r>
-              <a:rPr lang="en-US"/>
+              <a:rPr lang="en-US" smtClean="0"/>
               <a:t>Third level</a:t>
             </a:r>
           </a:p>
           <a:p>
             <a:pPr lvl="3"/>
             <a:r>
-              <a:rPr lang="en-US"/>
+              <a:rPr lang="en-US" smtClean="0"/>
               <a:t>Fourth level</a:t>
             </a:r>
           </a:p>
           <a:p>
             <a:pPr lvl="4"/>
             <a:r>
-              <a:rPr lang="en-US"/>
+              <a:rPr lang="en-US" smtClean="0"/>
               <a:t>Fifth level</a:t>
             </a:r>
+            <a:endParaRPr lang="en-US"/>
           </a:p>
         </p:txBody>
       </p:sp>
@@ -3166,7 +2737,7 @@
           <a:p>
             <a:fld id="{5BCAD085-E8A6-8845-BD4E-CB4CCA059FC4}" type="datetimeFigureOut">
               <a:rPr lang="en-US" smtClean="0"/>
-              <a:t>7/8/26</a:t>
+              <a:t>1/27/13</a:t>
             </a:fld>
             <a:endParaRPr lang="en-US"/>
           </a:p>
@@ -3525,7 +3096,7 @@
 </file>
 
 <file path=ppt/slides/slide1.xml><?xml version="1.0" encoding="utf-8"?>
-<p:sld xmlns:a="http://schemas.openxmlformats.org/drawingml/2006/main" xmlns:r="http://schemas.openxmlformats.org/officeDocument/2006/relationships" xmlns:p="http://schemas.openxmlformats.org/presentationml/2006/main">
+<p:sld xmlns:a="http://schemas.openxmlformats.org/drawingml/2006/main" xmlns:p="http://schemas.openxmlformats.org/presentationml/2006/main" xmlns:r="http://schemas.openxmlformats.org/officeDocument/2006/relationships">
   <p:cSld>
     <p:bg>
       <p:bgPr>
@@ -3541,14 +3112,7 @@
         <p:cNvGrpSpPr/>
         <p:nvPr/>
       </p:nvGrpSpPr>
-      <p:grpSpPr>
-        <a:xfrm>
-          <a:off x="0" y="0"/>
-          <a:ext cx="0" cy="0"/>
-          <a:chOff x="0" y="0"/>
-          <a:chExt cx="0" cy="0"/>
-        </a:xfrm>
-      </p:grpSpPr>
+      <p:grpSpPr/>
       <p:sp>
         <p:nvSpPr>
           <p:cNvPr id="2" name="Oval 1"/>
@@ -3590,7 +3154,6 @@
           <a:lstStyle/>
           <a:p>
             <a:pPr algn="ctr"/>
-            <a:endParaRPr/>
           </a:p>
         </p:txBody>
       </p:sp>
@@ -3635,7 +3198,6 @@
           <a:lstStyle/>
           <a:p>
             <a:pPr algn="ctr"/>
-            <a:endParaRPr/>
           </a:p>
         </p:txBody>
       </p:sp>
@@ -3680,7 +3242,6 @@
           <a:lstStyle/>
           <a:p>
             <a:pPr algn="ctr"/>
-            <a:endParaRPr/>
           </a:p>
         </p:txBody>
       </p:sp>
@@ -3701,7 +3262,7 @@
           <a:noFill/>
         </p:spPr>
         <p:txBody>
-          <a:bodyPr wrap="square" lIns="0" tIns="0" rIns="0" bIns="0" anchor="t">
+          <a:bodyPr wrap="square" anchor="t" lIns="0" rIns="0" tIns="0" bIns="0">
             <a:spAutoFit/>
           </a:bodyPr>
           <a:lstStyle/>
@@ -3740,7 +3301,7 @@
           <a:noFill/>
         </p:spPr>
         <p:txBody>
-          <a:bodyPr wrap="square" lIns="0" tIns="0" rIns="0" bIns="0" anchor="t">
+          <a:bodyPr wrap="square" anchor="t" lIns="0" rIns="0" tIns="0" bIns="0">
             <a:spAutoFit/>
           </a:bodyPr>
           <a:lstStyle/>
@@ -3771,15 +3332,15 @@
         <p:spPr>
           <a:xfrm>
             <a:off x="777240" y="3767328"/>
-            <a:ext cx="10058400" cy="231345"/>
-          </a:xfrm>
-          <a:prstGeom prst="rect">
-            <a:avLst/>
-          </a:prstGeom>
-          <a:noFill/>
-        </p:spPr>
-        <p:txBody>
-          <a:bodyPr wrap="square" lIns="0" tIns="0" rIns="0" bIns="0" anchor="t">
+            <a:ext cx="10058400" cy="365760"/>
+          </a:xfrm>
+          <a:prstGeom prst="rect">
+            <a:avLst/>
+          </a:prstGeom>
+          <a:noFill/>
+        </p:spPr>
+        <p:txBody>
+          <a:bodyPr wrap="square" anchor="t" lIns="0" rIns="0" tIns="0" bIns="0">
             <a:spAutoFit/>
           </a:bodyPr>
           <a:lstStyle/>
@@ -3794,63 +3355,9 @@
                 <a:solidFill>
                   <a:srgbClr val="5A6472"/>
                 </a:solidFill>
-                <a:highlight>
-                  <a:srgbClr val="FFFF00"/>
-                </a:highlight>
-                <a:latin typeface="Arial"/>
-              </a:rPr>
-              <a:t>A working prototype</a:t>
-            </a:r>
-            <a:r>
-              <a:rPr sz="1550" b="0" i="0">
-                <a:solidFill>
-                  <a:srgbClr val="5A6472"/>
-                </a:solidFill>
-                <a:latin typeface="Arial"/>
-              </a:rPr>
-              <a:t>, </a:t>
-            </a:r>
-            <a:r>
-              <a:rPr sz="1550" b="0" i="0">
-                <a:solidFill>
-                  <a:srgbClr val="5A6472"/>
-                </a:solidFill>
-                <a:highlight>
-                  <a:srgbClr val="FFFF00"/>
-                </a:highlight>
-                <a:latin typeface="Arial"/>
-              </a:rPr>
-              <a:t>a live console</a:t>
-            </a:r>
-            <a:r>
-              <a:rPr sz="1550" b="0" i="0">
-                <a:solidFill>
-                  <a:srgbClr val="5A6472"/>
-                </a:solidFill>
-                <a:latin typeface="Arial"/>
-              </a:rPr>
-              <a:t>, and </a:t>
-            </a:r>
-            <a:r>
-              <a:rPr sz="1550" b="0" i="0">
-                <a:solidFill>
-                  <a:srgbClr val="5A6472"/>
-                </a:solidFill>
-                <a:highlight>
-                  <a:srgbClr val="FFFF00"/>
-                </a:highlight>
-                <a:latin typeface="Arial"/>
-              </a:rPr>
-              <a:t>measured results</a:t>
-            </a:r>
-            <a:r>
-              <a:rPr sz="1550" b="0" i="0">
-                <a:solidFill>
-                  <a:srgbClr val="5A6472"/>
-                </a:solidFill>
-                <a:latin typeface="Arial"/>
-              </a:rPr>
-              <a:t>,</a:t>
+                <a:latin typeface="Arial"/>
+              </a:rPr>
+              <a:t>A working prototype, a live console, and measured results,</a:t>
             </a:r>
           </a:p>
         </p:txBody>
@@ -3872,7 +3379,7 @@
           <a:noFill/>
         </p:spPr>
         <p:txBody>
-          <a:bodyPr wrap="square" lIns="0" tIns="0" rIns="0" bIns="0" anchor="t">
+          <a:bodyPr wrap="square" anchor="t" lIns="0" rIns="0" tIns="0" bIns="0">
             <a:spAutoFit/>
           </a:bodyPr>
           <a:lstStyle/>
@@ -3911,7 +3418,7 @@
           <a:noFill/>
         </p:spPr>
         <p:txBody>
-          <a:bodyPr wrap="square" lIns="0" tIns="0" rIns="0" bIns="0" anchor="t">
+          <a:bodyPr wrap="square" anchor="t" lIns="0" rIns="0" tIns="0" bIns="0">
             <a:spAutoFit/>
           </a:bodyPr>
           <a:lstStyle/>
@@ -3950,7 +3457,7 @@
           <a:noFill/>
         </p:spPr>
         <p:txBody>
-          <a:bodyPr wrap="square" lIns="0" tIns="0" rIns="0" bIns="0" anchor="t">
+          <a:bodyPr wrap="square" anchor="t" lIns="0" rIns="0" tIns="0" bIns="0">
             <a:spAutoFit/>
           </a:bodyPr>
           <a:lstStyle/>
@@ -3989,7 +3496,7 @@
           <a:noFill/>
         </p:spPr>
         <p:txBody>
-          <a:bodyPr wrap="square" lIns="0" tIns="0" rIns="0" bIns="0" anchor="t">
+          <a:bodyPr wrap="square" anchor="t" lIns="0" rIns="0" tIns="0" bIns="0">
             <a:spAutoFit/>
           </a:bodyPr>
           <a:lstStyle/>
@@ -4050,7 +3557,7 @@
           </a:fontRef>
         </p:style>
         <p:txBody>
-          <a:bodyPr wrap="square" lIns="0" tIns="0" rIns="0" bIns="0" rtlCol="0" anchor="ctr"/>
+          <a:bodyPr rtlCol="0" anchor="ctr" wrap="square" lIns="0" rIns="0" tIns="0" bIns="0"/>
           <a:lstStyle/>
           <a:p>
             <a:pPr algn="ctr"/>
@@ -4105,7 +3612,7 @@
           </a:fontRef>
         </p:style>
         <p:txBody>
-          <a:bodyPr wrap="square" lIns="0" tIns="0" rIns="0" bIns="0" rtlCol="0" anchor="ctr"/>
+          <a:bodyPr rtlCol="0" anchor="ctr" wrap="square" lIns="0" rIns="0" tIns="0" bIns="0"/>
           <a:lstStyle/>
           <a:p>
             <a:pPr algn="ctr"/>
@@ -4160,7 +3667,7 @@
           </a:fontRef>
         </p:style>
         <p:txBody>
-          <a:bodyPr wrap="square" lIns="0" tIns="0" rIns="0" bIns="0" rtlCol="0" anchor="ctr"/>
+          <a:bodyPr rtlCol="0" anchor="ctr" wrap="square" lIns="0" rIns="0" tIns="0" bIns="0"/>
           <a:lstStyle/>
           <a:p>
             <a:pPr algn="ctr"/>
@@ -4193,7 +3700,7 @@
           <a:noFill/>
         </p:spPr>
         <p:txBody>
-          <a:bodyPr wrap="square" lIns="0" tIns="0" rIns="0" bIns="0" anchor="t">
+          <a:bodyPr wrap="square" anchor="t" lIns="0" rIns="0" tIns="0" bIns="0">
             <a:spAutoFit/>
           </a:bodyPr>
           <a:lstStyle/>
@@ -4224,7 +3731,7 @@
 </file>
 
 <file path=ppt/slides/slide10.xml><?xml version="1.0" encoding="utf-8"?>
-<p:sld xmlns:a="http://schemas.openxmlformats.org/drawingml/2006/main" xmlns:r="http://schemas.openxmlformats.org/officeDocument/2006/relationships" xmlns:p="http://schemas.openxmlformats.org/presentationml/2006/main">
+<p:sld xmlns:a="http://schemas.openxmlformats.org/drawingml/2006/main" xmlns:p="http://schemas.openxmlformats.org/presentationml/2006/main" xmlns:r="http://schemas.openxmlformats.org/officeDocument/2006/relationships">
   <p:cSld>
     <p:bg>
       <p:bgPr>
@@ -4240,14 +3747,7 @@
         <p:cNvGrpSpPr/>
         <p:nvPr/>
       </p:nvGrpSpPr>
-      <p:grpSpPr>
-        <a:xfrm>
-          <a:off x="0" y="0"/>
-          <a:ext cx="0" cy="0"/>
-          <a:chOff x="0" y="0"/>
-          <a:chExt cx="0" cy="0"/>
-        </a:xfrm>
-      </p:grpSpPr>
+      <p:grpSpPr/>
       <p:sp>
         <p:nvSpPr>
           <p:cNvPr id="2" name="TextBox 1"/>
@@ -4265,7 +3765,7 @@
           <a:noFill/>
         </p:spPr>
         <p:txBody>
-          <a:bodyPr wrap="square" lIns="0" tIns="0" rIns="0" bIns="0" anchor="t">
+          <a:bodyPr wrap="square" anchor="t" lIns="0" rIns="0" tIns="0" bIns="0">
             <a:spAutoFit/>
           </a:bodyPr>
           <a:lstStyle/>
@@ -4304,7 +3804,7 @@
           <a:noFill/>
         </p:spPr>
         <p:txBody>
-          <a:bodyPr wrap="square" lIns="0" tIns="0" rIns="0" bIns="0" anchor="t">
+          <a:bodyPr wrap="square" anchor="t" lIns="0" rIns="0" tIns="0" bIns="0">
             <a:spAutoFit/>
           </a:bodyPr>
           <a:lstStyle/>
@@ -4343,7 +3843,7 @@
           <a:noFill/>
         </p:spPr>
         <p:txBody>
-          <a:bodyPr wrap="square" lIns="0" tIns="0" rIns="0" bIns="0" anchor="t">
+          <a:bodyPr wrap="square" anchor="t" lIns="0" rIns="0" tIns="0" bIns="0">
             <a:spAutoFit/>
           </a:bodyPr>
           <a:lstStyle/>
@@ -4374,15 +3874,15 @@
         <p:spPr>
           <a:xfrm>
             <a:off x="777240" y="841248"/>
-            <a:ext cx="10637215" cy="958789"/>
-          </a:xfrm>
-          <a:prstGeom prst="rect">
-            <a:avLst/>
-          </a:prstGeom>
-          <a:noFill/>
-        </p:spPr>
-        <p:txBody>
-          <a:bodyPr wrap="square" lIns="0" tIns="0" rIns="0" bIns="0" anchor="t">
+            <a:ext cx="10637215" cy="1097280"/>
+          </a:xfrm>
+          <a:prstGeom prst="rect">
+            <a:avLst/>
+          </a:prstGeom>
+          <a:noFill/>
+        </p:spPr>
+        <p:txBody>
+          <a:bodyPr wrap="square" anchor="t" lIns="0" rIns="0" tIns="0" bIns="0">
             <a:spAutoFit/>
           </a:bodyPr>
           <a:lstStyle/>
@@ -4399,28 +3899,7 @@
                 </a:solidFill>
                 <a:latin typeface="Arial"/>
               </a:rPr>
-              <a:t>One </a:t>
-            </a:r>
-            <a:r>
-              <a:rPr sz="3100" b="1" i="0">
-                <a:solidFill>
-                  <a:srgbClr val="15171C"/>
-                </a:solidFill>
-                <a:highlight>
-                  <a:srgbClr val="FFFF00"/>
-                </a:highlight>
-                <a:latin typeface="Arial"/>
-              </a:rPr>
-              <a:t>agentic loop</a:t>
-            </a:r>
-            <a:r>
-              <a:rPr sz="3100" b="1" i="0">
-                <a:solidFill>
-                  <a:srgbClr val="15171C"/>
-                </a:solidFill>
-                <a:latin typeface="Arial"/>
-              </a:rPr>
-              <a:t>: contract in, a routed and redlined decision out.</a:t>
+              <a:t>One agentic loop: contract in, a routed and redlined decision out.</a:t>
             </a:r>
           </a:p>
         </p:txBody>
@@ -4466,7 +3945,7 @@
           </a:fontRef>
         </p:style>
         <p:txBody>
-          <a:bodyPr wrap="square" lIns="9144" rIns="9144" rtlCol="0" anchor="ctr"/>
+          <a:bodyPr rtlCol="0" anchor="ctr" wrap="square" lIns="9144" rIns="9144"/>
           <a:lstStyle/>
           <a:p>
             <a:pPr algn="ctr"/>
@@ -4519,7 +3998,7 @@
           </a:fontRef>
         </p:style>
         <p:txBody>
-          <a:bodyPr wrap="none" lIns="0" tIns="0" rIns="0" bIns="0" rtlCol="0" anchor="ctr"/>
+          <a:bodyPr rtlCol="0" anchor="ctr" wrap="none" lIns="0" rIns="0" tIns="0" bIns="0"/>
           <a:lstStyle/>
           <a:p>
             <a:pPr algn="ctr"/>
@@ -4552,7 +4031,7 @@
           <a:noFill/>
         </p:spPr>
         <p:txBody>
-          <a:bodyPr wrap="square" lIns="0" tIns="0" rIns="0" bIns="0" anchor="t">
+          <a:bodyPr wrap="square" anchor="t" lIns="0" rIns="0" tIns="0" bIns="0">
             <a:spAutoFit/>
           </a:bodyPr>
           <a:lstStyle/>
@@ -4615,7 +4094,7 @@
           </a:fontRef>
         </p:style>
         <p:txBody>
-          <a:bodyPr wrap="square" lIns="9144" rIns="9144" rtlCol="0" anchor="ctr"/>
+          <a:bodyPr rtlCol="0" anchor="ctr" wrap="square" lIns="9144" rIns="9144"/>
           <a:lstStyle/>
           <a:p>
             <a:pPr algn="ctr"/>
@@ -4668,7 +4147,7 @@
           </a:fontRef>
         </p:style>
         <p:txBody>
-          <a:bodyPr wrap="none" lIns="0" tIns="0" rIns="0" bIns="0" rtlCol="0" anchor="ctr"/>
+          <a:bodyPr rtlCol="0" anchor="ctr" wrap="none" lIns="0" rIns="0" tIns="0" bIns="0"/>
           <a:lstStyle/>
           <a:p>
             <a:pPr algn="ctr"/>
@@ -4701,7 +4180,7 @@
           <a:noFill/>
         </p:spPr>
         <p:txBody>
-          <a:bodyPr wrap="square" lIns="0" tIns="0" rIns="0" bIns="0" anchor="t">
+          <a:bodyPr wrap="square" anchor="t" lIns="0" rIns="0" tIns="0" bIns="0">
             <a:spAutoFit/>
           </a:bodyPr>
           <a:lstStyle/>
@@ -4764,7 +4243,7 @@
           </a:fontRef>
         </p:style>
         <p:txBody>
-          <a:bodyPr wrap="square" lIns="9144" rIns="9144" rtlCol="0" anchor="ctr"/>
+          <a:bodyPr rtlCol="0" anchor="ctr" wrap="square" lIns="9144" rIns="9144"/>
           <a:lstStyle/>
           <a:p>
             <a:pPr algn="ctr"/>
@@ -4818,7 +4297,7 @@
           </a:fontRef>
         </p:style>
         <p:txBody>
-          <a:bodyPr wrap="none" lIns="0" tIns="0" rIns="0" bIns="0" rtlCol="0" anchor="ctr"/>
+          <a:bodyPr rtlCol="0" anchor="ctr" wrap="none" lIns="0" rIns="0" tIns="0" bIns="0"/>
           <a:lstStyle/>
           <a:p>
             <a:pPr algn="ctr"/>
@@ -4851,7 +4330,7 @@
           <a:noFill/>
         </p:spPr>
         <p:txBody>
-          <a:bodyPr wrap="square" lIns="0" tIns="0" rIns="0" bIns="0" anchor="t">
+          <a:bodyPr wrap="square" anchor="t" lIns="0" rIns="0" tIns="0" bIns="0">
             <a:spAutoFit/>
           </a:bodyPr>
           <a:lstStyle/>
@@ -4914,7 +4393,7 @@
           </a:fontRef>
         </p:style>
         <p:txBody>
-          <a:bodyPr wrap="square" lIns="9144" rIns="9144" rtlCol="0" anchor="ctr"/>
+          <a:bodyPr rtlCol="0" anchor="ctr" wrap="square" lIns="9144" rIns="9144"/>
           <a:lstStyle/>
           <a:p>
             <a:pPr algn="ctr"/>
@@ -4967,7 +4446,7 @@
           </a:fontRef>
         </p:style>
         <p:txBody>
-          <a:bodyPr wrap="none" lIns="0" tIns="0" rIns="0" bIns="0" rtlCol="0" anchor="ctr"/>
+          <a:bodyPr rtlCol="0" anchor="ctr" wrap="none" lIns="0" rIns="0" tIns="0" bIns="0"/>
           <a:lstStyle/>
           <a:p>
             <a:pPr algn="ctr"/>
@@ -5000,7 +4479,7 @@
           <a:noFill/>
         </p:spPr>
         <p:txBody>
-          <a:bodyPr wrap="square" lIns="0" tIns="0" rIns="0" bIns="0" anchor="t">
+          <a:bodyPr wrap="square" anchor="t" lIns="0" rIns="0" tIns="0" bIns="0">
             <a:spAutoFit/>
           </a:bodyPr>
           <a:lstStyle/>
@@ -5063,7 +4542,7 @@
           </a:fontRef>
         </p:style>
         <p:txBody>
-          <a:bodyPr wrap="square" lIns="9144" rIns="9144" rtlCol="0" anchor="ctr"/>
+          <a:bodyPr rtlCol="0" anchor="ctr" wrap="square" lIns="9144" rIns="9144"/>
           <a:lstStyle/>
           <a:p>
             <a:pPr algn="ctr"/>
@@ -5116,7 +4595,7 @@
           </a:fontRef>
         </p:style>
         <p:txBody>
-          <a:bodyPr wrap="none" lIns="0" tIns="0" rIns="0" bIns="0" rtlCol="0" anchor="ctr"/>
+          <a:bodyPr rtlCol="0" anchor="ctr" wrap="none" lIns="0" rIns="0" tIns="0" bIns="0"/>
           <a:lstStyle/>
           <a:p>
             <a:pPr algn="ctr"/>
@@ -5149,7 +4628,7 @@
           <a:noFill/>
         </p:spPr>
         <p:txBody>
-          <a:bodyPr wrap="square" lIns="0" tIns="0" rIns="0" bIns="0" anchor="t">
+          <a:bodyPr wrap="square" anchor="t" lIns="0" rIns="0" tIns="0" bIns="0">
             <a:spAutoFit/>
           </a:bodyPr>
           <a:lstStyle/>
@@ -5212,7 +4691,7 @@
           </a:fontRef>
         </p:style>
         <p:txBody>
-          <a:bodyPr wrap="square" lIns="9144" rIns="9144" rtlCol="0" anchor="ctr"/>
+          <a:bodyPr rtlCol="0" anchor="ctr" wrap="square" lIns="9144" rIns="9144"/>
           <a:lstStyle/>
           <a:p>
             <a:pPr algn="ctr"/>
@@ -5266,7 +4745,7 @@
           </a:fontRef>
         </p:style>
         <p:txBody>
-          <a:bodyPr wrap="none" lIns="0" tIns="0" rIns="0" bIns="0" rtlCol="0" anchor="ctr"/>
+          <a:bodyPr rtlCol="0" anchor="ctr" wrap="none" lIns="0" rIns="0" tIns="0" bIns="0"/>
           <a:lstStyle/>
           <a:p>
             <a:pPr algn="ctr"/>
@@ -5299,7 +4778,7 @@
           <a:noFill/>
         </p:spPr>
         <p:txBody>
-          <a:bodyPr wrap="square" lIns="0" tIns="0" rIns="0" bIns="0" anchor="t">
+          <a:bodyPr wrap="square" anchor="t" lIns="0" rIns="0" tIns="0" bIns="0">
             <a:spAutoFit/>
           </a:bodyPr>
           <a:lstStyle/>
@@ -5362,7 +4841,7 @@
           </a:fontRef>
         </p:style>
         <p:txBody>
-          <a:bodyPr wrap="square" lIns="9144" rIns="9144" rtlCol="0" anchor="ctr"/>
+          <a:bodyPr rtlCol="0" anchor="ctr" wrap="square" lIns="9144" rIns="9144"/>
           <a:lstStyle/>
           <a:p>
             <a:pPr algn="ctr"/>
@@ -5415,7 +4894,7 @@
           </a:fontRef>
         </p:style>
         <p:txBody>
-          <a:bodyPr wrap="none" lIns="0" tIns="0" rIns="0" bIns="0" rtlCol="0" anchor="ctr"/>
+          <a:bodyPr rtlCol="0" anchor="ctr" wrap="none" lIns="0" rIns="0" tIns="0" bIns="0"/>
           <a:lstStyle/>
           <a:p>
             <a:pPr algn="ctr"/>
@@ -5474,7 +4953,6 @@
           <a:lstStyle/>
           <a:p>
             <a:pPr algn="ctr"/>
-            <a:endParaRPr/>
           </a:p>
         </p:txBody>
       </p:sp>
@@ -5495,7 +4973,7 @@
           <a:noFill/>
         </p:spPr>
         <p:txBody>
-          <a:bodyPr wrap="square" lIns="0" tIns="0" rIns="0" bIns="0" anchor="t">
+          <a:bodyPr wrap="square" anchor="t" lIns="0" rIns="0" tIns="0" bIns="0">
             <a:spAutoFit/>
           </a:bodyPr>
           <a:lstStyle/>
@@ -5562,7 +5040,6 @@
           <a:lstStyle/>
           <a:p>
             <a:pPr algn="ctr"/>
-            <a:endParaRPr/>
           </a:p>
         </p:txBody>
       </p:sp>
@@ -5605,7 +5082,7 @@
           </a:fontRef>
         </p:style>
         <p:txBody>
-          <a:bodyPr wrap="square" lIns="0" tIns="0" rIns="0" bIns="0" rtlCol="0" anchor="ctr"/>
+          <a:bodyPr rtlCol="0" anchor="ctr" wrap="square" lIns="0" rIns="0" tIns="0" bIns="0"/>
           <a:lstStyle/>
           <a:p>
             <a:pPr algn="ctr"/>
@@ -5638,7 +5115,7 @@
           <a:noFill/>
         </p:spPr>
         <p:txBody>
-          <a:bodyPr wrap="square" lIns="0" tIns="0" rIns="0" bIns="0" anchor="t">
+          <a:bodyPr wrap="square" anchor="t" lIns="0" rIns="0" tIns="0" bIns="0">
             <a:spAutoFit/>
           </a:bodyPr>
           <a:lstStyle/>
@@ -5706,7 +5183,6 @@
           <a:lstStyle/>
           <a:p>
             <a:pPr algn="ctr"/>
-            <a:endParaRPr/>
           </a:p>
         </p:txBody>
       </p:sp>
@@ -5749,7 +5225,7 @@
           </a:fontRef>
         </p:style>
         <p:txBody>
-          <a:bodyPr wrap="square" lIns="0" tIns="0" rIns="0" bIns="0" rtlCol="0" anchor="ctr"/>
+          <a:bodyPr rtlCol="0" anchor="ctr" wrap="square" lIns="0" rIns="0" tIns="0" bIns="0"/>
           <a:lstStyle/>
           <a:p>
             <a:pPr algn="ctr"/>
@@ -5782,7 +5258,7 @@
           <a:noFill/>
         </p:spPr>
         <p:txBody>
-          <a:bodyPr wrap="square" lIns="0" tIns="0" rIns="0" bIns="0" anchor="t">
+          <a:bodyPr wrap="square" anchor="t" lIns="0" rIns="0" tIns="0" bIns="0">
             <a:spAutoFit/>
           </a:bodyPr>
           <a:lstStyle/>
@@ -5850,7 +5326,6 @@
           <a:lstStyle/>
           <a:p>
             <a:pPr algn="ctr"/>
-            <a:endParaRPr/>
           </a:p>
         </p:txBody>
       </p:sp>
@@ -5893,7 +5368,7 @@
           </a:fontRef>
         </p:style>
         <p:txBody>
-          <a:bodyPr wrap="square" lIns="0" tIns="0" rIns="0" bIns="0" rtlCol="0" anchor="ctr"/>
+          <a:bodyPr rtlCol="0" anchor="ctr" wrap="square" lIns="0" rIns="0" tIns="0" bIns="0"/>
           <a:lstStyle/>
           <a:p>
             <a:pPr algn="ctr"/>
@@ -5926,7 +5401,7 @@
           <a:noFill/>
         </p:spPr>
         <p:txBody>
-          <a:bodyPr wrap="square" lIns="0" tIns="0" rIns="0" bIns="0" anchor="t">
+          <a:bodyPr wrap="square" anchor="t" lIns="0" rIns="0" tIns="0" bIns="0">
             <a:spAutoFit/>
           </a:bodyPr>
           <a:lstStyle/>
@@ -5958,7 +5433,7 @@
 </file>
 
 <file path=ppt/slides/slide11.xml><?xml version="1.0" encoding="utf-8"?>
-<p:sld xmlns:a="http://schemas.openxmlformats.org/drawingml/2006/main" xmlns:r="http://schemas.openxmlformats.org/officeDocument/2006/relationships" xmlns:p="http://schemas.openxmlformats.org/presentationml/2006/main">
+<p:sld xmlns:a="http://schemas.openxmlformats.org/drawingml/2006/main" xmlns:p="http://schemas.openxmlformats.org/presentationml/2006/main" xmlns:r="http://schemas.openxmlformats.org/officeDocument/2006/relationships">
   <p:cSld>
     <p:bg>
       <p:bgPr>
@@ -5974,14 +5449,7 @@
         <p:cNvGrpSpPr/>
         <p:nvPr/>
       </p:nvGrpSpPr>
-      <p:grpSpPr>
-        <a:xfrm>
-          <a:off x="0" y="0"/>
-          <a:ext cx="0" cy="0"/>
-          <a:chOff x="0" y="0"/>
-          <a:chExt cx="0" cy="0"/>
-        </a:xfrm>
-      </p:grpSpPr>
+      <p:grpSpPr/>
       <p:sp>
         <p:nvSpPr>
           <p:cNvPr id="2" name="TextBox 1"/>
@@ -5999,7 +5467,7 @@
           <a:noFill/>
         </p:spPr>
         <p:txBody>
-          <a:bodyPr wrap="square" lIns="0" tIns="0" rIns="0" bIns="0" anchor="t">
+          <a:bodyPr wrap="square" anchor="t" lIns="0" rIns="0" tIns="0" bIns="0">
             <a:spAutoFit/>
           </a:bodyPr>
           <a:lstStyle/>
@@ -6038,7 +5506,7 @@
           <a:noFill/>
         </p:spPr>
         <p:txBody>
-          <a:bodyPr wrap="square" lIns="0" tIns="0" rIns="0" bIns="0" anchor="t">
+          <a:bodyPr wrap="square" anchor="t" lIns="0" rIns="0" tIns="0" bIns="0">
             <a:spAutoFit/>
           </a:bodyPr>
           <a:lstStyle/>
@@ -6077,7 +5545,7 @@
           <a:noFill/>
         </p:spPr>
         <p:txBody>
-          <a:bodyPr wrap="square" lIns="0" tIns="0" rIns="0" bIns="0" anchor="t">
+          <a:bodyPr wrap="square" anchor="t" lIns="0" rIns="0" tIns="0" bIns="0">
             <a:spAutoFit/>
           </a:bodyPr>
           <a:lstStyle/>
@@ -6116,7 +5584,7 @@
           <a:noFill/>
         </p:spPr>
         <p:txBody>
-          <a:bodyPr wrap="square" lIns="0" tIns="0" rIns="0" bIns="0" anchor="t">
+          <a:bodyPr wrap="square" anchor="t" lIns="0" rIns="0" tIns="0" bIns="0">
             <a:spAutoFit/>
           </a:bodyPr>
           <a:lstStyle/>
@@ -6155,7 +5623,7 @@
           <a:noFill/>
         </p:spPr>
         <p:txBody>
-          <a:bodyPr wrap="square" lIns="0" tIns="0" rIns="0" bIns="0" anchor="t">
+          <a:bodyPr wrap="square" anchor="t" lIns="0" rIns="0" tIns="0" bIns="0">
             <a:spAutoFit/>
           </a:bodyPr>
           <a:lstStyle/>
@@ -6222,7 +5690,6 @@
           <a:lstStyle/>
           <a:p>
             <a:pPr algn="ctr"/>
-            <a:endParaRPr/>
           </a:p>
         </p:txBody>
       </p:sp>
@@ -6243,7 +5710,7 @@
           <a:noFill/>
         </p:spPr>
         <p:txBody>
-          <a:bodyPr wrap="square" lIns="0" tIns="0" rIns="0" bIns="0" anchor="t">
+          <a:bodyPr wrap="square" anchor="t" lIns="0" rIns="0" tIns="0" bIns="0">
             <a:spAutoFit/>
           </a:bodyPr>
           <a:lstStyle/>
@@ -6282,7 +5749,7 @@
           <a:noFill/>
         </p:spPr>
         <p:txBody>
-          <a:bodyPr wrap="square" lIns="0" tIns="0" rIns="0" bIns="0" anchor="t">
+          <a:bodyPr wrap="square" anchor="t" lIns="0" rIns="0" tIns="0" bIns="0">
             <a:spAutoFit/>
           </a:bodyPr>
           <a:lstStyle/>
@@ -6321,7 +5788,7 @@
           <a:noFill/>
         </p:spPr>
         <p:txBody>
-          <a:bodyPr wrap="square" lIns="0" tIns="0" rIns="0" bIns="0" anchor="t">
+          <a:bodyPr wrap="square" anchor="t" lIns="0" rIns="0" tIns="0" bIns="0">
             <a:spAutoFit/>
           </a:bodyPr>
           <a:lstStyle/>
@@ -6360,7 +5827,7 @@
           <a:noFill/>
         </p:spPr>
         <p:txBody>
-          <a:bodyPr wrap="square" lIns="0" tIns="0" rIns="0" bIns="0" anchor="t">
+          <a:bodyPr wrap="square" anchor="t" lIns="0" rIns="0" tIns="0" bIns="0">
             <a:spAutoFit/>
           </a:bodyPr>
           <a:lstStyle/>
@@ -6399,7 +5866,7 @@
           <a:noFill/>
         </p:spPr>
         <p:txBody>
-          <a:bodyPr wrap="square" lIns="0" tIns="0" rIns="0" bIns="0" anchor="ctr">
+          <a:bodyPr wrap="square" anchor="ctr" lIns="0" rIns="0" tIns="0" bIns="0">
             <a:spAutoFit/>
           </a:bodyPr>
           <a:lstStyle/>
@@ -6438,7 +5905,7 @@
           <a:noFill/>
         </p:spPr>
         <p:txBody>
-          <a:bodyPr wrap="square" lIns="0" tIns="0" rIns="0" bIns="0" anchor="ctr">
+          <a:bodyPr wrap="square" anchor="ctr" lIns="0" rIns="0" tIns="0" bIns="0">
             <a:spAutoFit/>
           </a:bodyPr>
           <a:lstStyle/>
@@ -6477,7 +5944,7 @@
           <a:noFill/>
         </p:spPr>
         <p:txBody>
-          <a:bodyPr wrap="square" lIns="0" tIns="0" rIns="0" bIns="0" anchor="ctr">
+          <a:bodyPr wrap="square" anchor="ctr" lIns="0" rIns="0" tIns="0" bIns="0">
             <a:spAutoFit/>
           </a:bodyPr>
           <a:lstStyle/>
@@ -6516,7 +5983,7 @@
           <a:noFill/>
         </p:spPr>
         <p:txBody>
-          <a:bodyPr wrap="square" lIns="0" tIns="0" rIns="0" bIns="0" anchor="ctr">
+          <a:bodyPr wrap="square" anchor="ctr" lIns="0" rIns="0" tIns="0" bIns="0">
             <a:spAutoFit/>
           </a:bodyPr>
           <a:lstStyle/>
@@ -6555,7 +6022,7 @@
           <a:noFill/>
         </p:spPr>
         <p:txBody>
-          <a:bodyPr wrap="square" lIns="0" tIns="0" rIns="0" bIns="0" anchor="ctr">
+          <a:bodyPr wrap="square" anchor="ctr" lIns="0" rIns="0" tIns="0" bIns="0">
             <a:spAutoFit/>
           </a:bodyPr>
           <a:lstStyle/>
@@ -6594,7 +6061,7 @@
           <a:noFill/>
         </p:spPr>
         <p:txBody>
-          <a:bodyPr wrap="square" lIns="0" tIns="0" rIns="0" bIns="0" anchor="ctr">
+          <a:bodyPr wrap="square" anchor="ctr" lIns="0" rIns="0" tIns="0" bIns="0">
             <a:spAutoFit/>
           </a:bodyPr>
           <a:lstStyle/>
@@ -6633,7 +6100,7 @@
           <a:noFill/>
         </p:spPr>
         <p:txBody>
-          <a:bodyPr wrap="square" lIns="0" tIns="0" rIns="0" bIns="0" anchor="ctr">
+          <a:bodyPr wrap="square" anchor="ctr" lIns="0" rIns="0" tIns="0" bIns="0">
             <a:spAutoFit/>
           </a:bodyPr>
           <a:lstStyle/>
@@ -6672,7 +6139,7 @@
           <a:noFill/>
         </p:spPr>
         <p:txBody>
-          <a:bodyPr wrap="square" lIns="0" tIns="0" rIns="0" bIns="0" anchor="ctr">
+          <a:bodyPr wrap="square" anchor="ctr" lIns="0" rIns="0" tIns="0" bIns="0">
             <a:spAutoFit/>
           </a:bodyPr>
           <a:lstStyle/>
@@ -6711,7 +6178,7 @@
           <a:noFill/>
         </p:spPr>
         <p:txBody>
-          <a:bodyPr wrap="square" lIns="0" tIns="0" rIns="0" bIns="0" anchor="ctr">
+          <a:bodyPr wrap="square" anchor="ctr" lIns="0" rIns="0" tIns="0" bIns="0">
             <a:spAutoFit/>
           </a:bodyPr>
           <a:lstStyle/>
@@ -6750,7 +6217,7 @@
           <a:noFill/>
         </p:spPr>
         <p:txBody>
-          <a:bodyPr wrap="square" lIns="0" tIns="0" rIns="0" bIns="0" anchor="ctr">
+          <a:bodyPr wrap="square" anchor="ctr" lIns="0" rIns="0" tIns="0" bIns="0">
             <a:spAutoFit/>
           </a:bodyPr>
           <a:lstStyle/>
@@ -6789,7 +6256,7 @@
           <a:noFill/>
         </p:spPr>
         <p:txBody>
-          <a:bodyPr wrap="square" lIns="0" tIns="0" rIns="0" bIns="0" anchor="ctr">
+          <a:bodyPr wrap="square" anchor="ctr" lIns="0" rIns="0" tIns="0" bIns="0">
             <a:spAutoFit/>
           </a:bodyPr>
           <a:lstStyle/>
@@ -6828,7 +6295,7 @@
           <a:noFill/>
         </p:spPr>
         <p:txBody>
-          <a:bodyPr wrap="square" lIns="0" tIns="0" rIns="0" bIns="0" anchor="ctr">
+          <a:bodyPr wrap="square" anchor="ctr" lIns="0" rIns="0" tIns="0" bIns="0">
             <a:spAutoFit/>
           </a:bodyPr>
           <a:lstStyle/>
@@ -6867,7 +6334,7 @@
           <a:noFill/>
         </p:spPr>
         <p:txBody>
-          <a:bodyPr wrap="square" lIns="0" tIns="0" rIns="0" bIns="0" anchor="ctr">
+          <a:bodyPr wrap="square" anchor="ctr" lIns="0" rIns="0" tIns="0" bIns="0">
             <a:spAutoFit/>
           </a:bodyPr>
           <a:lstStyle/>
@@ -6906,7 +6373,7 @@
           <a:noFill/>
         </p:spPr>
         <p:txBody>
-          <a:bodyPr wrap="square" lIns="0" tIns="0" rIns="0" bIns="0" anchor="ctr">
+          <a:bodyPr wrap="square" anchor="ctr" lIns="0" rIns="0" tIns="0" bIns="0">
             <a:spAutoFit/>
           </a:bodyPr>
           <a:lstStyle/>
@@ -6945,7 +6412,7 @@
           <a:noFill/>
         </p:spPr>
         <p:txBody>
-          <a:bodyPr wrap="square" lIns="0" tIns="0" rIns="0" bIns="0" anchor="ctr">
+          <a:bodyPr wrap="square" anchor="ctr" lIns="0" rIns="0" tIns="0" bIns="0">
             <a:spAutoFit/>
           </a:bodyPr>
           <a:lstStyle/>
@@ -6984,7 +6451,7 @@
           <a:noFill/>
         </p:spPr>
         <p:txBody>
-          <a:bodyPr wrap="square" lIns="0" tIns="0" rIns="0" bIns="0" anchor="ctr">
+          <a:bodyPr wrap="square" anchor="ctr" lIns="0" rIns="0" tIns="0" bIns="0">
             <a:spAutoFit/>
           </a:bodyPr>
           <a:lstStyle/>
@@ -7023,7 +6490,7 @@
           <a:noFill/>
         </p:spPr>
         <p:txBody>
-          <a:bodyPr wrap="square" lIns="0" tIns="0" rIns="0" bIns="0" anchor="ctr">
+          <a:bodyPr wrap="square" anchor="ctr" lIns="0" rIns="0" tIns="0" bIns="0">
             <a:spAutoFit/>
           </a:bodyPr>
           <a:lstStyle/>
@@ -7062,7 +6529,7 @@
           <a:noFill/>
         </p:spPr>
         <p:txBody>
-          <a:bodyPr wrap="square" lIns="0" tIns="0" rIns="0" bIns="0" anchor="ctr">
+          <a:bodyPr wrap="square" anchor="ctr" lIns="0" rIns="0" tIns="0" bIns="0">
             <a:spAutoFit/>
           </a:bodyPr>
           <a:lstStyle/>
@@ -7101,7 +6568,7 @@
           <a:noFill/>
         </p:spPr>
         <p:txBody>
-          <a:bodyPr wrap="square" lIns="0" tIns="0" rIns="0" bIns="0" anchor="ctr">
+          <a:bodyPr wrap="square" anchor="ctr" lIns="0" rIns="0" tIns="0" bIns="0">
             <a:spAutoFit/>
           </a:bodyPr>
           <a:lstStyle/>
@@ -7140,7 +6607,7 @@
           <a:noFill/>
         </p:spPr>
         <p:txBody>
-          <a:bodyPr wrap="square" lIns="0" tIns="0" rIns="0" bIns="0" anchor="ctr">
+          <a:bodyPr wrap="square" anchor="ctr" lIns="0" rIns="0" tIns="0" bIns="0">
             <a:spAutoFit/>
           </a:bodyPr>
           <a:lstStyle/>
@@ -7179,7 +6646,7 @@
           <a:noFill/>
         </p:spPr>
         <p:txBody>
-          <a:bodyPr wrap="square" lIns="0" tIns="0" rIns="0" bIns="0" anchor="ctr">
+          <a:bodyPr wrap="square" anchor="ctr" lIns="0" rIns="0" tIns="0" bIns="0">
             <a:spAutoFit/>
           </a:bodyPr>
           <a:lstStyle/>
@@ -7218,7 +6685,7 @@
           <a:noFill/>
         </p:spPr>
         <p:txBody>
-          <a:bodyPr wrap="square" lIns="0" tIns="0" rIns="0" bIns="0" anchor="ctr">
+          <a:bodyPr wrap="square" anchor="ctr" lIns="0" rIns="0" tIns="0" bIns="0">
             <a:spAutoFit/>
           </a:bodyPr>
           <a:lstStyle/>
@@ -7257,7 +6724,7 @@
           <a:noFill/>
         </p:spPr>
         <p:txBody>
-          <a:bodyPr wrap="square" lIns="0" tIns="0" rIns="0" bIns="0" anchor="ctr">
+          <a:bodyPr wrap="square" anchor="ctr" lIns="0" rIns="0" tIns="0" bIns="0">
             <a:spAutoFit/>
           </a:bodyPr>
           <a:lstStyle/>
@@ -7296,7 +6763,7 @@
           <a:noFill/>
         </p:spPr>
         <p:txBody>
-          <a:bodyPr wrap="square" lIns="0" tIns="0" rIns="0" bIns="0" anchor="ctr">
+          <a:bodyPr wrap="square" anchor="ctr" lIns="0" rIns="0" tIns="0" bIns="0">
             <a:spAutoFit/>
           </a:bodyPr>
           <a:lstStyle/>
@@ -7361,7 +6828,6 @@
           <a:lstStyle/>
           <a:p>
             <a:pPr algn="ctr"/>
-            <a:endParaRPr/>
           </a:p>
         </p:txBody>
       </p:sp>
@@ -7382,7 +6848,7 @@
           <a:noFill/>
         </p:spPr>
         <p:txBody>
-          <a:bodyPr wrap="square" lIns="0" tIns="0" rIns="0" bIns="0" anchor="t">
+          <a:bodyPr wrap="square" anchor="t" lIns="0" rIns="0" tIns="0" bIns="0">
             <a:spAutoFit/>
           </a:bodyPr>
           <a:lstStyle/>
@@ -7413,7 +6879,7 @@
 </file>
 
 <file path=ppt/slides/slide12.xml><?xml version="1.0" encoding="utf-8"?>
-<p:sld xmlns:a="http://schemas.openxmlformats.org/drawingml/2006/main" xmlns:r="http://schemas.openxmlformats.org/officeDocument/2006/relationships" xmlns:p="http://schemas.openxmlformats.org/presentationml/2006/main">
+<p:sld xmlns:a="http://schemas.openxmlformats.org/drawingml/2006/main" xmlns:p="http://schemas.openxmlformats.org/presentationml/2006/main" xmlns:r="http://schemas.openxmlformats.org/officeDocument/2006/relationships">
   <p:cSld>
     <p:bg>
       <p:bgPr>
@@ -7429,14 +6895,7 @@
         <p:cNvGrpSpPr/>
         <p:nvPr/>
       </p:nvGrpSpPr>
-      <p:grpSpPr>
-        <a:xfrm>
-          <a:off x="0" y="0"/>
-          <a:ext cx="0" cy="0"/>
-          <a:chOff x="0" y="0"/>
-          <a:chExt cx="0" cy="0"/>
-        </a:xfrm>
-      </p:grpSpPr>
+      <p:grpSpPr/>
       <p:sp>
         <p:nvSpPr>
           <p:cNvPr id="2" name="TextBox 1"/>
@@ -7454,7 +6913,7 @@
           <a:noFill/>
         </p:spPr>
         <p:txBody>
-          <a:bodyPr wrap="square" lIns="0" tIns="0" rIns="0" bIns="0" anchor="t">
+          <a:bodyPr wrap="square" anchor="t" lIns="0" rIns="0" tIns="0" bIns="0">
             <a:spAutoFit/>
           </a:bodyPr>
           <a:lstStyle/>
@@ -7493,7 +6952,7 @@
           <a:noFill/>
         </p:spPr>
         <p:txBody>
-          <a:bodyPr wrap="square" lIns="0" tIns="0" rIns="0" bIns="0" anchor="t">
+          <a:bodyPr wrap="square" anchor="t" lIns="0" rIns="0" tIns="0" bIns="0">
             <a:spAutoFit/>
           </a:bodyPr>
           <a:lstStyle/>
@@ -7532,7 +6991,7 @@
           <a:noFill/>
         </p:spPr>
         <p:txBody>
-          <a:bodyPr wrap="square" lIns="0" tIns="0" rIns="0" bIns="0" anchor="t">
+          <a:bodyPr wrap="square" anchor="t" lIns="0" rIns="0" tIns="0" bIns="0">
             <a:spAutoFit/>
           </a:bodyPr>
           <a:lstStyle/>
@@ -7571,7 +7030,7 @@
           <a:noFill/>
         </p:spPr>
         <p:txBody>
-          <a:bodyPr wrap="square" lIns="0" tIns="0" rIns="0" bIns="0" anchor="t">
+          <a:bodyPr wrap="square" anchor="t" lIns="0" rIns="0" tIns="0" bIns="0">
             <a:spAutoFit/>
           </a:bodyPr>
           <a:lstStyle/>
@@ -7640,7 +7099,7 @@
           <a:noFill/>
         </p:spPr>
         <p:txBody>
-          <a:bodyPr wrap="square" lIns="0" tIns="0" rIns="0" bIns="0">
+          <a:bodyPr wrap="square" lIns="0" rIns="0" tIns="0" bIns="0">
             <a:spAutoFit/>
           </a:bodyPr>
           <a:lstStyle/>
@@ -7727,7 +7186,6 @@
           <a:lstStyle/>
           <a:p>
             <a:pPr algn="ctr"/>
-            <a:endParaRPr/>
           </a:p>
         </p:txBody>
       </p:sp>
@@ -7748,7 +7206,7 @@
           <a:noFill/>
         </p:spPr>
         <p:txBody>
-          <a:bodyPr wrap="square" lIns="0" tIns="0" rIns="0" bIns="0" anchor="t">
+          <a:bodyPr wrap="square" anchor="t" lIns="0" rIns="0" tIns="0" bIns="0">
             <a:spAutoFit/>
           </a:bodyPr>
           <a:lstStyle/>
@@ -7787,7 +7245,7 @@
           <a:noFill/>
         </p:spPr>
         <p:txBody>
-          <a:bodyPr wrap="square" lIns="0" tIns="0" rIns="0" bIns="0" anchor="t">
+          <a:bodyPr wrap="square" anchor="t" lIns="0" rIns="0" tIns="0" bIns="0">
             <a:spAutoFit/>
           </a:bodyPr>
           <a:lstStyle/>
@@ -7818,7 +7276,7 @@
 </file>
 
 <file path=ppt/slides/slide13.xml><?xml version="1.0" encoding="utf-8"?>
-<p:sld xmlns:a="http://schemas.openxmlformats.org/drawingml/2006/main" xmlns:r="http://schemas.openxmlformats.org/officeDocument/2006/relationships" xmlns:p="http://schemas.openxmlformats.org/presentationml/2006/main">
+<p:sld xmlns:a="http://schemas.openxmlformats.org/drawingml/2006/main" xmlns:p="http://schemas.openxmlformats.org/presentationml/2006/main" xmlns:r="http://schemas.openxmlformats.org/officeDocument/2006/relationships">
   <p:cSld>
     <p:bg>
       <p:bgPr>
@@ -7834,14 +7292,7 @@
         <p:cNvGrpSpPr/>
         <p:nvPr/>
       </p:nvGrpSpPr>
-      <p:grpSpPr>
-        <a:xfrm>
-          <a:off x="0" y="0"/>
-          <a:ext cx="0" cy="0"/>
-          <a:chOff x="0" y="0"/>
-          <a:chExt cx="0" cy="0"/>
-        </a:xfrm>
-      </p:grpSpPr>
+      <p:grpSpPr/>
       <p:sp>
         <p:nvSpPr>
           <p:cNvPr id="2" name="TextBox 1"/>
@@ -7859,7 +7310,7 @@
           <a:noFill/>
         </p:spPr>
         <p:txBody>
-          <a:bodyPr wrap="square" lIns="0" tIns="0" rIns="0" bIns="0" anchor="t">
+          <a:bodyPr wrap="square" anchor="t" lIns="0" rIns="0" tIns="0" bIns="0">
             <a:spAutoFit/>
           </a:bodyPr>
           <a:lstStyle/>
@@ -7898,7 +7349,7 @@
           <a:noFill/>
         </p:spPr>
         <p:txBody>
-          <a:bodyPr wrap="square" lIns="0" tIns="0" rIns="0" bIns="0" anchor="t">
+          <a:bodyPr wrap="square" anchor="t" lIns="0" rIns="0" tIns="0" bIns="0">
             <a:spAutoFit/>
           </a:bodyPr>
           <a:lstStyle/>
@@ -7937,7 +7388,7 @@
           <a:noFill/>
         </p:spPr>
         <p:txBody>
-          <a:bodyPr wrap="square" lIns="0" tIns="0" rIns="0" bIns="0" anchor="t">
+          <a:bodyPr wrap="square" anchor="t" lIns="0" rIns="0" tIns="0" bIns="0">
             <a:spAutoFit/>
           </a:bodyPr>
           <a:lstStyle/>
@@ -7976,7 +7427,7 @@
           <a:noFill/>
         </p:spPr>
         <p:txBody>
-          <a:bodyPr wrap="square" lIns="0" tIns="0" rIns="0" bIns="0" anchor="t">
+          <a:bodyPr wrap="square" anchor="t" lIns="0" rIns="0" tIns="0" bIns="0">
             <a:spAutoFit/>
           </a:bodyPr>
           <a:lstStyle/>
@@ -8045,7 +7496,7 @@
           <a:noFill/>
         </p:spPr>
         <p:txBody>
-          <a:bodyPr wrap="square" lIns="0" tIns="0" rIns="0" bIns="0">
+          <a:bodyPr wrap="square" lIns="0" rIns="0" tIns="0" bIns="0">
             <a:spAutoFit/>
           </a:bodyPr>
           <a:lstStyle/>
@@ -8125,7 +7576,7 @@
           <a:noFill/>
         </p:spPr>
         <p:txBody>
-          <a:bodyPr wrap="square" lIns="0" tIns="0" rIns="0" bIns="0" anchor="t">
+          <a:bodyPr wrap="square" anchor="t" lIns="0" rIns="0" tIns="0" bIns="0">
             <a:spAutoFit/>
           </a:bodyPr>
           <a:lstStyle/>
@@ -8156,7 +7607,7 @@
 </file>
 
 <file path=ppt/slides/slide14.xml><?xml version="1.0" encoding="utf-8"?>
-<p:sld xmlns:a="http://schemas.openxmlformats.org/drawingml/2006/main" xmlns:r="http://schemas.openxmlformats.org/officeDocument/2006/relationships" xmlns:p="http://schemas.openxmlformats.org/presentationml/2006/main">
+<p:sld xmlns:a="http://schemas.openxmlformats.org/drawingml/2006/main" xmlns:p="http://schemas.openxmlformats.org/presentationml/2006/main" xmlns:r="http://schemas.openxmlformats.org/officeDocument/2006/relationships">
   <p:cSld>
     <p:bg>
       <p:bgPr>
@@ -8172,14 +7623,7 @@
         <p:cNvGrpSpPr/>
         <p:nvPr/>
       </p:nvGrpSpPr>
-      <p:grpSpPr>
-        <a:xfrm>
-          <a:off x="0" y="0"/>
-          <a:ext cx="0" cy="0"/>
-          <a:chOff x="0" y="0"/>
-          <a:chExt cx="0" cy="0"/>
-        </a:xfrm>
-      </p:grpSpPr>
+      <p:grpSpPr/>
       <p:sp>
         <p:nvSpPr>
           <p:cNvPr id="2" name="TextBox 1"/>
@@ -8197,7 +7641,7 @@
           <a:noFill/>
         </p:spPr>
         <p:txBody>
-          <a:bodyPr wrap="square" lIns="0" tIns="0" rIns="0" bIns="0" anchor="t">
+          <a:bodyPr wrap="square" anchor="t" lIns="0" rIns="0" tIns="0" bIns="0">
             <a:spAutoFit/>
           </a:bodyPr>
           <a:lstStyle/>
@@ -8236,7 +7680,7 @@
           <a:noFill/>
         </p:spPr>
         <p:txBody>
-          <a:bodyPr wrap="square" lIns="0" tIns="0" rIns="0" bIns="0" anchor="t">
+          <a:bodyPr wrap="square" anchor="t" lIns="0" rIns="0" tIns="0" bIns="0">
             <a:spAutoFit/>
           </a:bodyPr>
           <a:lstStyle/>
@@ -8275,7 +7719,7 @@
           <a:noFill/>
         </p:spPr>
         <p:txBody>
-          <a:bodyPr wrap="square" lIns="0" tIns="0" rIns="0" bIns="0" anchor="t">
+          <a:bodyPr wrap="square" anchor="t" lIns="0" rIns="0" tIns="0" bIns="0">
             <a:spAutoFit/>
           </a:bodyPr>
           <a:lstStyle/>
@@ -8314,7 +7758,7 @@
           <a:noFill/>
         </p:spPr>
         <p:txBody>
-          <a:bodyPr wrap="square" lIns="0" tIns="0" rIns="0" bIns="0" anchor="t">
+          <a:bodyPr wrap="square" anchor="t" lIns="0" rIns="0" tIns="0" bIns="0">
             <a:spAutoFit/>
           </a:bodyPr>
           <a:lstStyle/>
@@ -8381,7 +7825,6 @@
           <a:lstStyle/>
           <a:p>
             <a:pPr algn="ctr"/>
-            <a:endParaRPr/>
           </a:p>
         </p:txBody>
       </p:sp>
@@ -8402,7 +7845,7 @@
           <a:noFill/>
         </p:spPr>
         <p:txBody>
-          <a:bodyPr wrap="square" lIns="0" tIns="0" rIns="0" bIns="0" anchor="t">
+          <a:bodyPr wrap="square" anchor="t" lIns="0" rIns="0" tIns="0" bIns="0">
             <a:spAutoFit/>
           </a:bodyPr>
           <a:lstStyle/>
@@ -8441,7 +7884,7 @@
           <a:noFill/>
         </p:spPr>
         <p:txBody>
-          <a:bodyPr wrap="square" lIns="0" tIns="0" rIns="0" bIns="0" anchor="t">
+          <a:bodyPr wrap="square" anchor="t" lIns="0" rIns="0" tIns="0" bIns="0">
             <a:spAutoFit/>
           </a:bodyPr>
           <a:lstStyle/>
@@ -8508,7 +7951,6 @@
           <a:lstStyle/>
           <a:p>
             <a:pPr algn="ctr"/>
-            <a:endParaRPr/>
           </a:p>
         </p:txBody>
       </p:sp>
@@ -8529,7 +7971,7 @@
           <a:noFill/>
         </p:spPr>
         <p:txBody>
-          <a:bodyPr wrap="square" lIns="0" tIns="0" rIns="0" bIns="0" anchor="t">
+          <a:bodyPr wrap="square" anchor="t" lIns="0" rIns="0" tIns="0" bIns="0">
             <a:spAutoFit/>
           </a:bodyPr>
           <a:lstStyle/>
@@ -8568,7 +8010,7 @@
           <a:noFill/>
         </p:spPr>
         <p:txBody>
-          <a:bodyPr wrap="square" lIns="0" tIns="0" rIns="0" bIns="0" anchor="t">
+          <a:bodyPr wrap="square" anchor="t" lIns="0" rIns="0" tIns="0" bIns="0">
             <a:spAutoFit/>
           </a:bodyPr>
           <a:lstStyle/>
@@ -8635,7 +8077,6 @@
           <a:lstStyle/>
           <a:p>
             <a:pPr algn="ctr"/>
-            <a:endParaRPr/>
           </a:p>
         </p:txBody>
       </p:sp>
@@ -8656,7 +8097,7 @@
           <a:noFill/>
         </p:spPr>
         <p:txBody>
-          <a:bodyPr wrap="square" lIns="0" tIns="0" rIns="0" bIns="0" anchor="t">
+          <a:bodyPr wrap="square" anchor="t" lIns="0" rIns="0" tIns="0" bIns="0">
             <a:spAutoFit/>
           </a:bodyPr>
           <a:lstStyle/>
@@ -8695,7 +8136,7 @@
           <a:noFill/>
         </p:spPr>
         <p:txBody>
-          <a:bodyPr wrap="square" lIns="0" tIns="0" rIns="0" bIns="0" anchor="t">
+          <a:bodyPr wrap="square" anchor="t" lIns="0" rIns="0" tIns="0" bIns="0">
             <a:spAutoFit/>
           </a:bodyPr>
           <a:lstStyle/>
@@ -8762,7 +8203,6 @@
           <a:lstStyle/>
           <a:p>
             <a:pPr algn="ctr"/>
-            <a:endParaRPr/>
           </a:p>
         </p:txBody>
       </p:sp>
@@ -8783,7 +8223,7 @@
           <a:noFill/>
         </p:spPr>
         <p:txBody>
-          <a:bodyPr wrap="square" lIns="0" tIns="0" rIns="0" bIns="0" anchor="t">
+          <a:bodyPr wrap="square" anchor="t" lIns="0" rIns="0" tIns="0" bIns="0">
             <a:spAutoFit/>
           </a:bodyPr>
           <a:lstStyle/>
@@ -8822,7 +8262,7 @@
           <a:noFill/>
         </p:spPr>
         <p:txBody>
-          <a:bodyPr wrap="square" lIns="0" tIns="0" rIns="0" bIns="0" anchor="t">
+          <a:bodyPr wrap="square" anchor="t" lIns="0" rIns="0" tIns="0" bIns="0">
             <a:spAutoFit/>
           </a:bodyPr>
           <a:lstStyle/>
@@ -8887,7 +8327,6 @@
           <a:lstStyle/>
           <a:p>
             <a:pPr algn="ctr"/>
-            <a:endParaRPr/>
           </a:p>
         </p:txBody>
       </p:sp>
@@ -8908,7 +8347,7 @@
           <a:noFill/>
         </p:spPr>
         <p:txBody>
-          <a:bodyPr wrap="square" lIns="0" tIns="0" rIns="0" bIns="0" anchor="t">
+          <a:bodyPr wrap="square" anchor="t" lIns="0" rIns="0" tIns="0" bIns="0">
             <a:spAutoFit/>
           </a:bodyPr>
           <a:lstStyle/>
@@ -8947,7 +8386,7 @@
           <a:noFill/>
         </p:spPr>
         <p:txBody>
-          <a:bodyPr wrap="square" lIns="0" tIns="0" rIns="0" bIns="0" anchor="t">
+          <a:bodyPr wrap="square" anchor="t" lIns="0" rIns="0" tIns="0" bIns="0">
             <a:spAutoFit/>
           </a:bodyPr>
           <a:lstStyle/>
@@ -8986,7 +8425,7 @@
           <a:noFill/>
         </p:spPr>
         <p:txBody>
-          <a:bodyPr wrap="square" lIns="0" tIns="0" rIns="0" bIns="0" anchor="t">
+          <a:bodyPr wrap="square" anchor="t" lIns="0" rIns="0" tIns="0" bIns="0">
             <a:spAutoFit/>
           </a:bodyPr>
           <a:lstStyle/>
@@ -9053,7 +8492,6 @@
           <a:lstStyle/>
           <a:p>
             <a:pPr algn="ctr"/>
-            <a:endParaRPr/>
           </a:p>
         </p:txBody>
       </p:sp>
@@ -9074,7 +8512,7 @@
           <a:noFill/>
         </p:spPr>
         <p:txBody>
-          <a:bodyPr wrap="square" lIns="0" tIns="0" rIns="0" bIns="0" anchor="t">
+          <a:bodyPr wrap="square" anchor="t" lIns="0" rIns="0" tIns="0" bIns="0">
             <a:spAutoFit/>
           </a:bodyPr>
           <a:lstStyle/>
@@ -9113,7 +8551,7 @@
           <a:noFill/>
         </p:spPr>
         <p:txBody>
-          <a:bodyPr wrap="square" lIns="0" tIns="0" rIns="0" bIns="0">
+          <a:bodyPr wrap="square" lIns="0" rIns="0" tIns="0" bIns="0">
             <a:spAutoFit/>
           </a:bodyPr>
           <a:lstStyle/>
@@ -9185,7 +8623,7 @@
 </file>
 
 <file path=ppt/slides/slide15.xml><?xml version="1.0" encoding="utf-8"?>
-<p:sld xmlns:a="http://schemas.openxmlformats.org/drawingml/2006/main" xmlns:r="http://schemas.openxmlformats.org/officeDocument/2006/relationships" xmlns:p="http://schemas.openxmlformats.org/presentationml/2006/main">
+<p:sld xmlns:a="http://schemas.openxmlformats.org/drawingml/2006/main" xmlns:p="http://schemas.openxmlformats.org/presentationml/2006/main" xmlns:r="http://schemas.openxmlformats.org/officeDocument/2006/relationships">
   <p:cSld>
     <p:bg>
       <p:bgPr>
@@ -9201,14 +8639,7 @@
         <p:cNvGrpSpPr/>
         <p:nvPr/>
       </p:nvGrpSpPr>
-      <p:grpSpPr>
-        <a:xfrm>
-          <a:off x="0" y="0"/>
-          <a:ext cx="0" cy="0"/>
-          <a:chOff x="0" y="0"/>
-          <a:chExt cx="0" cy="0"/>
-        </a:xfrm>
-      </p:grpSpPr>
+      <p:grpSpPr/>
       <p:sp>
         <p:nvSpPr>
           <p:cNvPr id="2" name="TextBox 1"/>
@@ -9226,7 +8657,7 @@
           <a:noFill/>
         </p:spPr>
         <p:txBody>
-          <a:bodyPr wrap="square" lIns="0" tIns="0" rIns="0" bIns="0" anchor="t">
+          <a:bodyPr wrap="square" anchor="t" lIns="0" rIns="0" tIns="0" bIns="0">
             <a:spAutoFit/>
           </a:bodyPr>
           <a:lstStyle/>
@@ -9265,7 +8696,7 @@
           <a:noFill/>
         </p:spPr>
         <p:txBody>
-          <a:bodyPr wrap="square" lIns="0" tIns="0" rIns="0" bIns="0" anchor="t">
+          <a:bodyPr wrap="square" anchor="t" lIns="0" rIns="0" tIns="0" bIns="0">
             <a:spAutoFit/>
           </a:bodyPr>
           <a:lstStyle/>
@@ -9296,15 +8727,15 @@
         <p:spPr>
           <a:xfrm>
             <a:off x="777240" y="475488"/>
-            <a:ext cx="10607040" cy="298480"/>
-          </a:xfrm>
-          <a:prstGeom prst="rect">
-            <a:avLst/>
-          </a:prstGeom>
-          <a:noFill/>
-        </p:spPr>
-        <p:txBody>
-          <a:bodyPr wrap="square" lIns="0" tIns="0" rIns="0" bIns="0" anchor="t">
+            <a:ext cx="10607040" cy="320040"/>
+          </a:xfrm>
+          <a:prstGeom prst="rect">
+            <a:avLst/>
+          </a:prstGeom>
+          <a:noFill/>
+        </p:spPr>
+        <p:txBody>
+          <a:bodyPr wrap="square" anchor="t" lIns="0" rIns="0" tIns="0" bIns="0">
             <a:spAutoFit/>
           </a:bodyPr>
           <a:lstStyle/>
@@ -9315,38 +8746,14 @@
               </a:lnSpc>
             </a:pPr>
             <a:r>
-              <a:rPr sz="2000" b="1" i="0">
+              <a:rPr sz="1250" b="1" i="0">
                 <a:solidFill>
                   <a:srgbClr val="E14E12"/>
                 </a:solidFill>
-                <a:highlight>
-                  <a:srgbClr val="FFFF00"/>
-                </a:highlight>
                 <a:latin typeface="Arial"/>
               </a:rPr>
               <a:t>IT GETS SMARTER</a:t>
             </a:r>
-            <a:r>
-              <a:rPr lang="en-US" sz="2000" b="1" i="0">
-                <a:solidFill>
-                  <a:srgbClr val="E14E12"/>
-                </a:solidFill>
-                <a:highlight>
-                  <a:srgbClr val="FFFF00"/>
-                </a:highlight>
-                <a:latin typeface="Arial"/>
-              </a:rPr>
-              <a:t>!</a:t>
-            </a:r>
-            <a:endParaRPr sz="2000" b="1" i="0">
-              <a:solidFill>
-                <a:srgbClr val="E14E12"/>
-              </a:solidFill>
-              <a:highlight>
-                <a:srgbClr val="FFFF00"/>
-              </a:highlight>
-              <a:latin typeface="Arial"/>
-            </a:endParaRPr>
           </a:p>
         </p:txBody>
       </p:sp>
@@ -9367,7 +8774,7 @@
           <a:noFill/>
         </p:spPr>
         <p:txBody>
-          <a:bodyPr wrap="square" lIns="0" tIns="0" rIns="0" bIns="0" anchor="t">
+          <a:bodyPr wrap="square" anchor="t" lIns="0" rIns="0" tIns="0" bIns="0">
             <a:spAutoFit/>
           </a:bodyPr>
           <a:lstStyle/>
@@ -9428,7 +8835,7 @@
           </a:fontRef>
         </p:style>
         <p:txBody>
-          <a:bodyPr wrap="square" lIns="9144" rIns="9144" rtlCol="0" anchor="ctr"/>
+          <a:bodyPr rtlCol="0" anchor="ctr" wrap="square" lIns="9144" rIns="9144"/>
           <a:lstStyle/>
           <a:p>
             <a:pPr algn="ctr"/>
@@ -9462,7 +8869,7 @@
           <a:noFill/>
         </p:spPr>
         <p:txBody>
-          <a:bodyPr wrap="square" lIns="0" tIns="0" rIns="0" bIns="0" anchor="t">
+          <a:bodyPr wrap="square" anchor="t" lIns="0" rIns="0" tIns="0" bIns="0">
             <a:spAutoFit/>
           </a:bodyPr>
           <a:lstStyle/>
@@ -9523,7 +8930,7 @@
           </a:fontRef>
         </p:style>
         <p:txBody>
-          <a:bodyPr wrap="square" lIns="9144" rIns="9144" rtlCol="0" anchor="ctr"/>
+          <a:bodyPr rtlCol="0" anchor="ctr" wrap="square" lIns="9144" rIns="9144"/>
           <a:lstStyle/>
           <a:p>
             <a:pPr algn="ctr"/>
@@ -9557,7 +8964,7 @@
           <a:noFill/>
         </p:spPr>
         <p:txBody>
-          <a:bodyPr wrap="square" lIns="0" tIns="0" rIns="0" bIns="0" anchor="t">
+          <a:bodyPr wrap="square" anchor="t" lIns="0" rIns="0" tIns="0" bIns="0">
             <a:spAutoFit/>
           </a:bodyPr>
           <a:lstStyle/>
@@ -9618,7 +9025,7 @@
           </a:fontRef>
         </p:style>
         <p:txBody>
-          <a:bodyPr wrap="square" lIns="9144" rIns="9144" rtlCol="0" anchor="ctr"/>
+          <a:bodyPr rtlCol="0" anchor="ctr" wrap="square" lIns="9144" rIns="9144"/>
           <a:lstStyle/>
           <a:p>
             <a:pPr algn="ctr"/>
@@ -9652,7 +9059,7 @@
           <a:noFill/>
         </p:spPr>
         <p:txBody>
-          <a:bodyPr wrap="square" lIns="0" tIns="0" rIns="0" bIns="0" anchor="t">
+          <a:bodyPr wrap="square" anchor="t" lIns="0" rIns="0" tIns="0" bIns="0">
             <a:spAutoFit/>
           </a:bodyPr>
           <a:lstStyle/>
@@ -9713,7 +9120,7 @@
           </a:fontRef>
         </p:style>
         <p:txBody>
-          <a:bodyPr wrap="square" lIns="9144" rIns="9144" rtlCol="0" anchor="ctr"/>
+          <a:bodyPr rtlCol="0" anchor="ctr" wrap="square" lIns="9144" rIns="9144"/>
           <a:lstStyle/>
           <a:p>
             <a:pPr algn="ctr"/>
@@ -9775,7 +9182,6 @@
           <a:lstStyle/>
           <a:p>
             <a:pPr algn="ctr"/>
-            <a:endParaRPr/>
           </a:p>
         </p:txBody>
       </p:sp>
@@ -9796,7 +9202,7 @@
           <a:noFill/>
         </p:spPr>
         <p:txBody>
-          <a:bodyPr wrap="square" lIns="0" tIns="0" rIns="0" bIns="0" anchor="t">
+          <a:bodyPr wrap="square" anchor="t" lIns="0" rIns="0" tIns="0" bIns="0">
             <a:spAutoFit/>
           </a:bodyPr>
           <a:lstStyle/>
@@ -9835,7 +9241,7 @@
           <a:noFill/>
         </p:spPr>
         <p:txBody>
-          <a:bodyPr wrap="square" lIns="0" tIns="0" rIns="0" bIns="0" anchor="t">
+          <a:bodyPr wrap="square" anchor="t" lIns="0" rIns="0" tIns="0" bIns="0">
             <a:spAutoFit/>
           </a:bodyPr>
           <a:lstStyle/>
@@ -9902,7 +9308,6 @@
           <a:lstStyle/>
           <a:p>
             <a:pPr algn="ctr"/>
-            <a:endParaRPr/>
           </a:p>
         </p:txBody>
       </p:sp>
@@ -9923,7 +9328,7 @@
           <a:noFill/>
         </p:spPr>
         <p:txBody>
-          <a:bodyPr wrap="square" lIns="0" tIns="0" rIns="0" bIns="0" anchor="t">
+          <a:bodyPr wrap="square" anchor="t" lIns="0" rIns="0" tIns="0" bIns="0">
             <a:spAutoFit/>
           </a:bodyPr>
           <a:lstStyle/>
@@ -9962,7 +9367,7 @@
           <a:noFill/>
         </p:spPr>
         <p:txBody>
-          <a:bodyPr wrap="square" lIns="0" tIns="0" rIns="0" bIns="0" anchor="t">
+          <a:bodyPr wrap="square" anchor="t" lIns="0" rIns="0" tIns="0" bIns="0">
             <a:spAutoFit/>
           </a:bodyPr>
           <a:lstStyle/>
@@ -10001,7 +9406,7 @@
           <a:noFill/>
         </p:spPr>
         <p:txBody>
-          <a:bodyPr wrap="square" lIns="0" tIns="0" rIns="0" bIns="0" anchor="t">
+          <a:bodyPr wrap="square" anchor="t" lIns="0" rIns="0" tIns="0" bIns="0">
             <a:spAutoFit/>
           </a:bodyPr>
           <a:lstStyle/>
@@ -10032,7 +9437,7 @@
 </file>
 
 <file path=ppt/slides/slide16.xml><?xml version="1.0" encoding="utf-8"?>
-<p:sld xmlns:a="http://schemas.openxmlformats.org/drawingml/2006/main" xmlns:r="http://schemas.openxmlformats.org/officeDocument/2006/relationships" xmlns:p="http://schemas.openxmlformats.org/presentationml/2006/main">
+<p:sld xmlns:a="http://schemas.openxmlformats.org/drawingml/2006/main" xmlns:p="http://schemas.openxmlformats.org/presentationml/2006/main" xmlns:r="http://schemas.openxmlformats.org/officeDocument/2006/relationships">
   <p:cSld>
     <p:bg>
       <p:bgPr>
@@ -10048,14 +9453,7 @@
         <p:cNvGrpSpPr/>
         <p:nvPr/>
       </p:nvGrpSpPr>
-      <p:grpSpPr>
-        <a:xfrm>
-          <a:off x="0" y="0"/>
-          <a:ext cx="0" cy="0"/>
-          <a:chOff x="0" y="0"/>
-          <a:chExt cx="0" cy="0"/>
-        </a:xfrm>
-      </p:grpSpPr>
+      <p:grpSpPr/>
       <p:sp>
         <p:nvSpPr>
           <p:cNvPr id="2" name="TextBox 1"/>
@@ -10073,7 +9471,7 @@
           <a:noFill/>
         </p:spPr>
         <p:txBody>
-          <a:bodyPr wrap="square" lIns="0" tIns="0" rIns="0" bIns="0" anchor="t">
+          <a:bodyPr wrap="square" anchor="t" lIns="0" rIns="0" tIns="0" bIns="0">
             <a:spAutoFit/>
           </a:bodyPr>
           <a:lstStyle/>
@@ -10112,7 +9510,7 @@
           <a:noFill/>
         </p:spPr>
         <p:txBody>
-          <a:bodyPr wrap="square" lIns="0" tIns="0" rIns="0" bIns="0" anchor="t">
+          <a:bodyPr wrap="square" anchor="t" lIns="0" rIns="0" tIns="0" bIns="0">
             <a:spAutoFit/>
           </a:bodyPr>
           <a:lstStyle/>
@@ -10143,15 +9541,15 @@
         <p:spPr>
           <a:xfrm>
             <a:off x="777240" y="475488"/>
-            <a:ext cx="10607040" cy="298480"/>
-          </a:xfrm>
-          <a:prstGeom prst="rect">
-            <a:avLst/>
-          </a:prstGeom>
-          <a:noFill/>
-        </p:spPr>
-        <p:txBody>
-          <a:bodyPr wrap="square" lIns="0" tIns="0" rIns="0" bIns="0" anchor="t">
+            <a:ext cx="10607040" cy="320040"/>
+          </a:xfrm>
+          <a:prstGeom prst="rect">
+            <a:avLst/>
+          </a:prstGeom>
+          <a:noFill/>
+        </p:spPr>
+        <p:txBody>
+          <a:bodyPr wrap="square" anchor="t" lIns="0" rIns="0" tIns="0" bIns="0">
             <a:spAutoFit/>
           </a:bodyPr>
           <a:lstStyle/>
@@ -10162,13 +9560,10 @@
               </a:lnSpc>
             </a:pPr>
             <a:r>
-              <a:rPr sz="2000" b="1" i="0">
+              <a:rPr sz="1250" b="1" i="0">
                 <a:solidFill>
                   <a:srgbClr val="E14E12"/>
                 </a:solidFill>
-                <a:highlight>
-                  <a:srgbClr val="FFFF00"/>
-                </a:highlight>
                 <a:latin typeface="Arial"/>
               </a:rPr>
               <a:t>PRIVATE BY DESIGN</a:t>
@@ -10193,7 +9588,7 @@
           <a:noFill/>
         </p:spPr>
         <p:txBody>
-          <a:bodyPr wrap="square" lIns="0" tIns="0" rIns="0" bIns="0" anchor="t">
+          <a:bodyPr wrap="square" anchor="t" lIns="0" rIns="0" tIns="0" bIns="0">
             <a:spAutoFit/>
           </a:bodyPr>
           <a:lstStyle/>
@@ -10260,7 +9655,6 @@
           <a:lstStyle/>
           <a:p>
             <a:pPr algn="ctr"/>
-            <a:endParaRPr/>
           </a:p>
         </p:txBody>
       </p:sp>
@@ -10281,7 +9675,7 @@
           <a:noFill/>
         </p:spPr>
         <p:txBody>
-          <a:bodyPr wrap="square" lIns="0" tIns="0" rIns="0" bIns="0" anchor="t">
+          <a:bodyPr wrap="square" anchor="t" lIns="0" rIns="0" tIns="0" bIns="0">
             <a:spAutoFit/>
           </a:bodyPr>
           <a:lstStyle/>
@@ -10320,7 +9714,7 @@
           <a:noFill/>
         </p:spPr>
         <p:txBody>
-          <a:bodyPr wrap="square" lIns="0" tIns="0" rIns="0" bIns="0" anchor="t">
+          <a:bodyPr wrap="square" anchor="t" lIns="0" rIns="0" tIns="0" bIns="0">
             <a:spAutoFit/>
           </a:bodyPr>
           <a:lstStyle/>
@@ -10387,7 +9781,6 @@
           <a:lstStyle/>
           <a:p>
             <a:pPr algn="ctr"/>
-            <a:endParaRPr/>
           </a:p>
         </p:txBody>
       </p:sp>
@@ -10408,7 +9801,7 @@
           <a:noFill/>
         </p:spPr>
         <p:txBody>
-          <a:bodyPr wrap="square" lIns="0" tIns="0" rIns="0" bIns="0" anchor="t">
+          <a:bodyPr wrap="square" anchor="t" lIns="0" rIns="0" tIns="0" bIns="0">
             <a:spAutoFit/>
           </a:bodyPr>
           <a:lstStyle/>
@@ -10439,15 +9832,15 @@
         <p:spPr>
           <a:xfrm>
             <a:off x="6464807" y="2304288"/>
-            <a:ext cx="4693615" cy="953081"/>
-          </a:xfrm>
-          <a:prstGeom prst="rect">
-            <a:avLst/>
-          </a:prstGeom>
-          <a:noFill/>
-        </p:spPr>
-        <p:txBody>
-          <a:bodyPr wrap="square" lIns="0" tIns="0" rIns="0" bIns="0" anchor="t">
+            <a:ext cx="4693615" cy="1554480"/>
+          </a:xfrm>
+          <a:prstGeom prst="rect">
+            <a:avLst/>
+          </a:prstGeom>
+          <a:noFill/>
+        </p:spPr>
+        <p:txBody>
+          <a:bodyPr wrap="square" anchor="t" lIns="0" rIns="0" tIns="0" bIns="0">
             <a:spAutoFit/>
           </a:bodyPr>
           <a:lstStyle/>
@@ -10464,19 +9857,7 @@
                 </a:solidFill>
                 <a:latin typeface="Arial"/>
               </a:rPr>
-              <a:t>The deterministic engine needs no model at all: that is the floor. </a:t>
-            </a:r>
-            <a:r>
-              <a:rPr sz="1300" b="0" i="0">
-                <a:solidFill>
-                  <a:srgbClr val="394150"/>
-                </a:solidFill>
-                <a:highlight>
-                  <a:srgbClr val="FFFF00"/>
-                </a:highlight>
-                <a:latin typeface="Arial"/>
-              </a:rPr>
-              <a:t>The reasoning layer is an open-weight model (Hermes, Llama 3.3, Qwen, Mistral) served locally with Ollama or vLLM. It ships as a skill on day one, then moves fully in-house.</a:t>
+              <a:t>The deterministic engine needs no model at all: that is the floor. The reasoning layer is an open-weight model (Hermes 3, Llama 3.3, Qwen, Mistral) served locally with Ollama or vLLM. It ships as a skill on day one, then moves fully in-house.</a:t>
             </a:r>
           </a:p>
         </p:txBody>
@@ -10498,7 +9879,7 @@
           <a:noFill/>
         </p:spPr>
         <p:txBody>
-          <a:bodyPr wrap="square" lIns="0" tIns="0" rIns="0" bIns="0" anchor="t">
+          <a:bodyPr wrap="square" anchor="t" lIns="0" rIns="0" tIns="0" bIns="0">
             <a:spAutoFit/>
           </a:bodyPr>
           <a:lstStyle/>
@@ -10565,7 +9946,6 @@
           <a:lstStyle/>
           <a:p>
             <a:pPr algn="ctr"/>
-            <a:endParaRPr/>
           </a:p>
         </p:txBody>
       </p:sp>
@@ -10586,7 +9966,7 @@
           <a:noFill/>
         </p:spPr>
         <p:txBody>
-          <a:bodyPr wrap="square" lIns="0" tIns="0" rIns="0" bIns="0" anchor="t">
+          <a:bodyPr wrap="square" anchor="t" lIns="0" rIns="0" tIns="0" bIns="0">
             <a:spAutoFit/>
           </a:bodyPr>
           <a:lstStyle/>
@@ -10625,7 +10005,7 @@
           <a:noFill/>
         </p:spPr>
         <p:txBody>
-          <a:bodyPr wrap="square" lIns="0" tIns="0" rIns="0" bIns="0" anchor="t">
+          <a:bodyPr wrap="square" anchor="t" lIns="0" rIns="0" tIns="0" bIns="0">
             <a:spAutoFit/>
           </a:bodyPr>
           <a:lstStyle/>
@@ -10692,7 +10072,6 @@
           <a:lstStyle/>
           <a:p>
             <a:pPr algn="ctr"/>
-            <a:endParaRPr/>
           </a:p>
         </p:txBody>
       </p:sp>
@@ -10713,7 +10092,7 @@
           <a:noFill/>
         </p:spPr>
         <p:txBody>
-          <a:bodyPr wrap="square" lIns="0" tIns="0" rIns="0" bIns="0" anchor="t">
+          <a:bodyPr wrap="square" anchor="t" lIns="0" rIns="0" tIns="0" bIns="0">
             <a:spAutoFit/>
           </a:bodyPr>
           <a:lstStyle/>
@@ -10752,7 +10131,7 @@
           <a:noFill/>
         </p:spPr>
         <p:txBody>
-          <a:bodyPr wrap="square" lIns="0" tIns="0" rIns="0" bIns="0" anchor="t">
+          <a:bodyPr wrap="square" anchor="t" lIns="0" rIns="0" tIns="0" bIns="0">
             <a:spAutoFit/>
           </a:bodyPr>
           <a:lstStyle/>
@@ -10819,7 +10198,6 @@
           <a:lstStyle/>
           <a:p>
             <a:pPr algn="ctr"/>
-            <a:endParaRPr/>
           </a:p>
         </p:txBody>
       </p:sp>
@@ -10840,7 +10218,7 @@
           <a:noFill/>
         </p:spPr>
         <p:txBody>
-          <a:bodyPr wrap="square" lIns="0" tIns="0" rIns="0" bIns="0" anchor="t">
+          <a:bodyPr wrap="square" anchor="t" lIns="0" rIns="0" tIns="0" bIns="0">
             <a:spAutoFit/>
           </a:bodyPr>
           <a:lstStyle/>
@@ -10879,7 +10257,7 @@
           <a:noFill/>
         </p:spPr>
         <p:txBody>
-          <a:bodyPr wrap="square" lIns="0" tIns="0" rIns="0" bIns="0" anchor="t">
+          <a:bodyPr wrap="square" anchor="t" lIns="0" rIns="0" tIns="0" bIns="0">
             <a:spAutoFit/>
           </a:bodyPr>
           <a:lstStyle/>
@@ -10946,7 +10324,6 @@
           <a:lstStyle/>
           <a:p>
             <a:pPr algn="ctr"/>
-            <a:endParaRPr/>
           </a:p>
         </p:txBody>
       </p:sp>
@@ -10967,7 +10344,7 @@
           <a:noFill/>
         </p:spPr>
         <p:txBody>
-          <a:bodyPr wrap="square" lIns="0" tIns="0" rIns="0" bIns="0" anchor="t">
+          <a:bodyPr wrap="square" anchor="t" lIns="0" rIns="0" tIns="0" bIns="0">
             <a:spAutoFit/>
           </a:bodyPr>
           <a:lstStyle/>
@@ -11006,7 +10383,7 @@
           <a:noFill/>
         </p:spPr>
         <p:txBody>
-          <a:bodyPr wrap="square" lIns="0" tIns="0" rIns="0" bIns="0" anchor="t">
+          <a:bodyPr wrap="square" anchor="t" lIns="0" rIns="0" tIns="0" bIns="0">
             <a:spAutoFit/>
           </a:bodyPr>
           <a:lstStyle/>
@@ -11037,7 +10414,7 @@
 </file>
 
 <file path=ppt/slides/slide17.xml><?xml version="1.0" encoding="utf-8"?>
-<p:sld xmlns:a="http://schemas.openxmlformats.org/drawingml/2006/main" xmlns:r="http://schemas.openxmlformats.org/officeDocument/2006/relationships" xmlns:p="http://schemas.openxmlformats.org/presentationml/2006/main">
+<p:sld xmlns:a="http://schemas.openxmlformats.org/drawingml/2006/main" xmlns:p="http://schemas.openxmlformats.org/presentationml/2006/main" xmlns:r="http://schemas.openxmlformats.org/officeDocument/2006/relationships">
   <p:cSld>
     <p:bg>
       <p:bgPr>
@@ -11053,14 +10430,7 @@
         <p:cNvGrpSpPr/>
         <p:nvPr/>
       </p:nvGrpSpPr>
-      <p:grpSpPr>
-        <a:xfrm>
-          <a:off x="0" y="0"/>
-          <a:ext cx="0" cy="0"/>
-          <a:chOff x="0" y="0"/>
-          <a:chExt cx="0" cy="0"/>
-        </a:xfrm>
-      </p:grpSpPr>
+      <p:grpSpPr/>
       <p:sp>
         <p:nvSpPr>
           <p:cNvPr id="2" name="TextBox 1"/>
@@ -11078,7 +10448,7 @@
           <a:noFill/>
         </p:spPr>
         <p:txBody>
-          <a:bodyPr wrap="square" lIns="0" tIns="0" rIns="0" bIns="0" anchor="t">
+          <a:bodyPr wrap="square" anchor="t" lIns="0" rIns="0" tIns="0" bIns="0">
             <a:spAutoFit/>
           </a:bodyPr>
           <a:lstStyle/>
@@ -11117,7 +10487,7 @@
           <a:noFill/>
         </p:spPr>
         <p:txBody>
-          <a:bodyPr wrap="square" lIns="0" tIns="0" rIns="0" bIns="0" anchor="t">
+          <a:bodyPr wrap="square" anchor="t" lIns="0" rIns="0" tIns="0" bIns="0">
             <a:spAutoFit/>
           </a:bodyPr>
           <a:lstStyle/>
@@ -11156,7 +10526,7 @@
           <a:noFill/>
         </p:spPr>
         <p:txBody>
-          <a:bodyPr wrap="square" lIns="0" tIns="0" rIns="0" bIns="0" anchor="t">
+          <a:bodyPr wrap="square" anchor="t" lIns="0" rIns="0" tIns="0" bIns="0">
             <a:spAutoFit/>
           </a:bodyPr>
           <a:lstStyle/>
@@ -11187,15 +10557,15 @@
         <p:spPr>
           <a:xfrm>
             <a:off x="777240" y="841248"/>
-            <a:ext cx="10637215" cy="462627"/>
-          </a:xfrm>
-          <a:prstGeom prst="rect">
-            <a:avLst/>
-          </a:prstGeom>
-          <a:noFill/>
-        </p:spPr>
-        <p:txBody>
-          <a:bodyPr wrap="square" lIns="0" tIns="0" rIns="0" bIns="0" anchor="t">
+            <a:ext cx="10637215" cy="1097280"/>
+          </a:xfrm>
+          <a:prstGeom prst="rect">
+            <a:avLst/>
+          </a:prstGeom>
+          <a:noFill/>
+        </p:spPr>
+        <p:txBody>
+          <a:bodyPr wrap="square" anchor="t" lIns="0" rIns="0" tIns="0" bIns="0">
             <a:spAutoFit/>
           </a:bodyPr>
           <a:lstStyle/>
@@ -11212,28 +10582,7 @@
                 </a:solidFill>
                 <a:latin typeface="Arial"/>
               </a:rPr>
-              <a:t>Why I applied, and how I would add </a:t>
-            </a:r>
-            <a:r>
-              <a:rPr sz="3100" b="1" i="0">
-                <a:solidFill>
-                  <a:srgbClr val="15171C"/>
-                </a:solidFill>
-                <a:highlight>
-                  <a:srgbClr val="FFFF00"/>
-                </a:highlight>
-                <a:latin typeface="Arial"/>
-              </a:rPr>
-              <a:t>value</a:t>
-            </a:r>
-            <a:r>
-              <a:rPr sz="3100" b="1" i="0">
-                <a:solidFill>
-                  <a:srgbClr val="15171C"/>
-                </a:solidFill>
-                <a:latin typeface="Arial"/>
-              </a:rPr>
-              <a:t> here.</a:t>
+              <a:t>Why I applied, and how I would add value here.</a:t>
             </a:r>
           </a:p>
         </p:txBody>
@@ -11255,7 +10604,7 @@
           <a:noFill/>
         </p:spPr>
         <p:txBody>
-          <a:bodyPr wrap="square" lIns="0" tIns="0" rIns="0" bIns="0" anchor="t">
+          <a:bodyPr wrap="square" anchor="t" lIns="0" rIns="0" tIns="0" bIns="0">
             <a:spAutoFit/>
           </a:bodyPr>
           <a:lstStyle/>
@@ -11294,7 +10643,7 @@
           <a:noFill/>
         </p:spPr>
         <p:txBody>
-          <a:bodyPr wrap="square" lIns="0" tIns="0" rIns="0" bIns="0">
+          <a:bodyPr wrap="square" lIns="0" rIns="0" tIns="0" bIns="0">
             <a:spAutoFit/>
           </a:bodyPr>
           <a:lstStyle/>
@@ -11374,7 +10723,7 @@
           <a:noFill/>
         </p:spPr>
         <p:txBody>
-          <a:bodyPr wrap="square" lIns="0" tIns="0" rIns="0" bIns="0" anchor="t">
+          <a:bodyPr wrap="square" anchor="t" lIns="0" rIns="0" tIns="0" bIns="0">
             <a:spAutoFit/>
           </a:bodyPr>
           <a:lstStyle/>
@@ -11433,11 +10782,19 @@
           </a:fontRef>
         </p:style>
         <p:txBody>
-          <a:bodyPr wrap="none" lIns="0" tIns="0" rIns="0" bIns="0" rtlCol="0" anchor="ctr"/>
+          <a:bodyPr rtlCol="0" anchor="ctr" wrap="none" lIns="0" rIns="0" tIns="0" bIns="0"/>
           <a:lstStyle/>
           <a:p>
             <a:pPr algn="ctr"/>
-            <a:endParaRPr/>
+            <a:r>
+              <a:rPr sz="1500" b="1">
+                <a:solidFill>
+                  <a:srgbClr val="FFFFFF"/>
+                </a:solidFill>
+                <a:latin typeface="Arial"/>
+              </a:rPr>
+              <a:t/>
+            </a:r>
           </a:p>
         </p:txBody>
       </p:sp>
@@ -11458,7 +10815,7 @@
           <a:noFill/>
         </p:spPr>
         <p:txBody>
-          <a:bodyPr wrap="square" lIns="0" tIns="0" rIns="0" bIns="0" anchor="t">
+          <a:bodyPr wrap="square" anchor="t" lIns="0" rIns="0" tIns="0" bIns="0">
             <a:spAutoFit/>
           </a:bodyPr>
           <a:lstStyle/>
@@ -11497,7 +10854,7 @@
           <a:noFill/>
         </p:spPr>
         <p:txBody>
-          <a:bodyPr wrap="square" lIns="0" tIns="0" rIns="0" bIns="0" anchor="t">
+          <a:bodyPr wrap="square" anchor="t" lIns="0" rIns="0" tIns="0" bIns="0">
             <a:spAutoFit/>
           </a:bodyPr>
           <a:lstStyle/>
@@ -11556,11 +10913,19 @@
           </a:fontRef>
         </p:style>
         <p:txBody>
-          <a:bodyPr wrap="none" lIns="0" tIns="0" rIns="0" bIns="0" rtlCol="0" anchor="ctr"/>
+          <a:bodyPr rtlCol="0" anchor="ctr" wrap="none" lIns="0" rIns="0" tIns="0" bIns="0"/>
           <a:lstStyle/>
           <a:p>
             <a:pPr algn="ctr"/>
-            <a:endParaRPr/>
+            <a:r>
+              <a:rPr sz="1500" b="1">
+                <a:solidFill>
+                  <a:srgbClr val="FFFFFF"/>
+                </a:solidFill>
+                <a:latin typeface="Arial"/>
+              </a:rPr>
+              <a:t/>
+            </a:r>
           </a:p>
         </p:txBody>
       </p:sp>
@@ -11581,7 +10946,7 @@
           <a:noFill/>
         </p:spPr>
         <p:txBody>
-          <a:bodyPr wrap="square" lIns="0" tIns="0" rIns="0" bIns="0" anchor="t">
+          <a:bodyPr wrap="square" anchor="t" lIns="0" rIns="0" tIns="0" bIns="0">
             <a:spAutoFit/>
           </a:bodyPr>
           <a:lstStyle/>
@@ -11620,7 +10985,7 @@
           <a:noFill/>
         </p:spPr>
         <p:txBody>
-          <a:bodyPr wrap="square" lIns="0" tIns="0" rIns="0" bIns="0" anchor="t">
+          <a:bodyPr wrap="square" anchor="t" lIns="0" rIns="0" tIns="0" bIns="0">
             <a:spAutoFit/>
           </a:bodyPr>
           <a:lstStyle/>
@@ -11679,11 +11044,19 @@
           </a:fontRef>
         </p:style>
         <p:txBody>
-          <a:bodyPr wrap="none" lIns="0" tIns="0" rIns="0" bIns="0" rtlCol="0" anchor="ctr"/>
+          <a:bodyPr rtlCol="0" anchor="ctr" wrap="none" lIns="0" rIns="0" tIns="0" bIns="0"/>
           <a:lstStyle/>
           <a:p>
             <a:pPr algn="ctr"/>
-            <a:endParaRPr/>
+            <a:r>
+              <a:rPr sz="1500" b="1">
+                <a:solidFill>
+                  <a:srgbClr val="FFFFFF"/>
+                </a:solidFill>
+                <a:latin typeface="Arial"/>
+              </a:rPr>
+              <a:t/>
+            </a:r>
           </a:p>
         </p:txBody>
       </p:sp>
@@ -11704,7 +11077,7 @@
           <a:noFill/>
         </p:spPr>
         <p:txBody>
-          <a:bodyPr wrap="square" lIns="0" tIns="0" rIns="0" bIns="0" anchor="t">
+          <a:bodyPr wrap="square" anchor="t" lIns="0" rIns="0" tIns="0" bIns="0">
             <a:spAutoFit/>
           </a:bodyPr>
           <a:lstStyle/>
@@ -11743,7 +11116,7 @@
           <a:noFill/>
         </p:spPr>
         <p:txBody>
-          <a:bodyPr wrap="square" lIns="0" tIns="0" rIns="0" bIns="0" anchor="t">
+          <a:bodyPr wrap="square" anchor="t" lIns="0" rIns="0" tIns="0" bIns="0">
             <a:spAutoFit/>
           </a:bodyPr>
           <a:lstStyle/>
@@ -11802,11 +11175,19 @@
           </a:fontRef>
         </p:style>
         <p:txBody>
-          <a:bodyPr wrap="none" lIns="0" tIns="0" rIns="0" bIns="0" rtlCol="0" anchor="ctr"/>
+          <a:bodyPr rtlCol="0" anchor="ctr" wrap="none" lIns="0" rIns="0" tIns="0" bIns="0"/>
           <a:lstStyle/>
           <a:p>
             <a:pPr algn="ctr"/>
-            <a:endParaRPr/>
+            <a:r>
+              <a:rPr sz="1500" b="1">
+                <a:solidFill>
+                  <a:srgbClr val="FFFFFF"/>
+                </a:solidFill>
+                <a:latin typeface="Arial"/>
+              </a:rPr>
+              <a:t/>
+            </a:r>
           </a:p>
         </p:txBody>
       </p:sp>
@@ -11827,7 +11208,7 @@
           <a:noFill/>
         </p:spPr>
         <p:txBody>
-          <a:bodyPr wrap="square" lIns="0" tIns="0" rIns="0" bIns="0" anchor="t">
+          <a:bodyPr wrap="square" anchor="t" lIns="0" rIns="0" tIns="0" bIns="0">
             <a:spAutoFit/>
           </a:bodyPr>
           <a:lstStyle/>
@@ -11866,7 +11247,7 @@
           <a:noFill/>
         </p:spPr>
         <p:txBody>
-          <a:bodyPr wrap="square" lIns="0" tIns="0" rIns="0" bIns="0" anchor="t">
+          <a:bodyPr wrap="square" anchor="t" lIns="0" rIns="0" tIns="0" bIns="0">
             <a:spAutoFit/>
           </a:bodyPr>
           <a:lstStyle/>
@@ -11897,7 +11278,7 @@
 </file>
 
 <file path=ppt/slides/slide18.xml><?xml version="1.0" encoding="utf-8"?>
-<p:sld xmlns:a="http://schemas.openxmlformats.org/drawingml/2006/main" xmlns:r="http://schemas.openxmlformats.org/officeDocument/2006/relationships" xmlns:p="http://schemas.openxmlformats.org/presentationml/2006/main">
+<p:sld xmlns:a="http://schemas.openxmlformats.org/drawingml/2006/main" xmlns:p="http://schemas.openxmlformats.org/presentationml/2006/main" xmlns:r="http://schemas.openxmlformats.org/officeDocument/2006/relationships">
   <p:cSld>
     <p:bg>
       <p:bgPr>
@@ -11913,14 +11294,7 @@
         <p:cNvGrpSpPr/>
         <p:nvPr/>
       </p:nvGrpSpPr>
-      <p:grpSpPr>
-        <a:xfrm>
-          <a:off x="0" y="0"/>
-          <a:ext cx="0" cy="0"/>
-          <a:chOff x="0" y="0"/>
-          <a:chExt cx="0" cy="0"/>
-        </a:xfrm>
-      </p:grpSpPr>
+      <p:grpSpPr/>
       <p:sp>
         <p:nvSpPr>
           <p:cNvPr id="2" name="Oval 1"/>
@@ -11962,7 +11336,6 @@
           <a:lstStyle/>
           <a:p>
             <a:pPr algn="ctr"/>
-            <a:endParaRPr/>
           </a:p>
         </p:txBody>
       </p:sp>
@@ -12007,7 +11380,6 @@
           <a:lstStyle/>
           <a:p>
             <a:pPr algn="ctr"/>
-            <a:endParaRPr/>
           </a:p>
         </p:txBody>
       </p:sp>
@@ -12052,7 +11424,6 @@
           <a:lstStyle/>
           <a:p>
             <a:pPr algn="ctr"/>
-            <a:endParaRPr/>
           </a:p>
         </p:txBody>
       </p:sp>
@@ -12073,7 +11444,7 @@
           <a:noFill/>
         </p:spPr>
         <p:txBody>
-          <a:bodyPr wrap="square" lIns="0" tIns="0" rIns="0" bIns="0" anchor="t">
+          <a:bodyPr wrap="square" anchor="t" lIns="0" rIns="0" tIns="0" bIns="0">
             <a:spAutoFit/>
           </a:bodyPr>
           <a:lstStyle/>
@@ -12112,7 +11483,7 @@
           <a:noFill/>
         </p:spPr>
         <p:txBody>
-          <a:bodyPr wrap="square" lIns="0" tIns="0" rIns="0" bIns="0" anchor="t">
+          <a:bodyPr wrap="square" anchor="t" lIns="0" rIns="0" tIns="0" bIns="0">
             <a:spAutoFit/>
           </a:bodyPr>
           <a:lstStyle/>
@@ -12151,7 +11522,7 @@
           <a:noFill/>
         </p:spPr>
         <p:txBody>
-          <a:bodyPr wrap="square" lIns="0" tIns="0" rIns="0" bIns="0">
+          <a:bodyPr wrap="square" lIns="0" rIns="0" tIns="0" bIns="0">
             <a:spAutoFit/>
           </a:bodyPr>
           <a:lstStyle/>
@@ -12212,7 +11583,7 @@
           <a:noFill/>
         </p:spPr>
         <p:txBody>
-          <a:bodyPr wrap="square" lIns="0" tIns="0" rIns="0" bIns="0" anchor="t">
+          <a:bodyPr wrap="square" anchor="t" lIns="0" rIns="0" tIns="0" bIns="0">
             <a:spAutoFit/>
           </a:bodyPr>
           <a:lstStyle/>
@@ -12251,7 +11622,7 @@
           <a:noFill/>
         </p:spPr>
         <p:txBody>
-          <a:bodyPr wrap="square" lIns="0" tIns="0" rIns="0" bIns="0" anchor="t">
+          <a:bodyPr wrap="square" anchor="t" lIns="0" rIns="0" tIns="0" bIns="0">
             <a:spAutoFit/>
           </a:bodyPr>
           <a:lstStyle/>
@@ -12290,7 +11661,7 @@
           <a:noFill/>
         </p:spPr>
         <p:txBody>
-          <a:bodyPr wrap="square" lIns="0" tIns="0" rIns="0" bIns="0" anchor="t">
+          <a:bodyPr wrap="square" anchor="t" lIns="0" rIns="0" tIns="0" bIns="0">
             <a:spAutoFit/>
           </a:bodyPr>
           <a:lstStyle/>
@@ -12321,7 +11692,7 @@
 </file>
 
 <file path=ppt/slides/slide2.xml><?xml version="1.0" encoding="utf-8"?>
-<p:sld xmlns:a="http://schemas.openxmlformats.org/drawingml/2006/main" xmlns:r="http://schemas.openxmlformats.org/officeDocument/2006/relationships" xmlns:p="http://schemas.openxmlformats.org/presentationml/2006/main">
+<p:sld xmlns:a="http://schemas.openxmlformats.org/drawingml/2006/main" xmlns:p="http://schemas.openxmlformats.org/presentationml/2006/main" xmlns:r="http://schemas.openxmlformats.org/officeDocument/2006/relationships">
   <p:cSld>
     <p:bg>
       <p:bgPr>
@@ -12337,14 +11708,7 @@
         <p:cNvGrpSpPr/>
         <p:nvPr/>
       </p:nvGrpSpPr>
-      <p:grpSpPr>
-        <a:xfrm>
-          <a:off x="0" y="0"/>
-          <a:ext cx="0" cy="0"/>
-          <a:chOff x="0" y="0"/>
-          <a:chExt cx="0" cy="0"/>
-        </a:xfrm>
-      </p:grpSpPr>
+      <p:grpSpPr/>
       <p:sp>
         <p:nvSpPr>
           <p:cNvPr id="2" name="TextBox 1"/>
@@ -12362,7 +11726,7 @@
           <a:noFill/>
         </p:spPr>
         <p:txBody>
-          <a:bodyPr wrap="square" lIns="0" tIns="0" rIns="0" bIns="0" anchor="t">
+          <a:bodyPr wrap="square" anchor="t" lIns="0" rIns="0" tIns="0" bIns="0">
             <a:spAutoFit/>
           </a:bodyPr>
           <a:lstStyle/>
@@ -12401,7 +11765,7 @@
           <a:noFill/>
         </p:spPr>
         <p:txBody>
-          <a:bodyPr wrap="square" lIns="0" tIns="0" rIns="0" bIns="0" anchor="t">
+          <a:bodyPr wrap="square" anchor="t" lIns="0" rIns="0" tIns="0" bIns="0">
             <a:spAutoFit/>
           </a:bodyPr>
           <a:lstStyle/>
@@ -12440,7 +11804,7 @@
           <a:noFill/>
         </p:spPr>
         <p:txBody>
-          <a:bodyPr wrap="square" lIns="0" tIns="0" rIns="0" bIns="0" anchor="t">
+          <a:bodyPr wrap="square" anchor="t" lIns="0" rIns="0" tIns="0" bIns="0">
             <a:spAutoFit/>
           </a:bodyPr>
           <a:lstStyle/>
@@ -12471,15 +11835,15 @@
         <p:spPr>
           <a:xfrm>
             <a:off x="777240" y="841248"/>
-            <a:ext cx="10637215" cy="462627"/>
-          </a:xfrm>
-          <a:prstGeom prst="rect">
-            <a:avLst/>
-          </a:prstGeom>
-          <a:noFill/>
-        </p:spPr>
-        <p:txBody>
-          <a:bodyPr wrap="square" lIns="0" tIns="0" rIns="0" bIns="0" anchor="t">
+            <a:ext cx="10637215" cy="1097280"/>
+          </a:xfrm>
+          <a:prstGeom prst="rect">
+            <a:avLst/>
+          </a:prstGeom>
+          <a:noFill/>
+        </p:spPr>
+        <p:txBody>
+          <a:bodyPr wrap="square" anchor="t" lIns="0" rIns="0" tIns="0" bIns="0">
             <a:spAutoFit/>
           </a:bodyPr>
           <a:lstStyle/>
@@ -12494,9 +11858,6 @@
                 <a:solidFill>
                   <a:srgbClr val="15171C"/>
                 </a:solidFill>
-                <a:highlight>
-                  <a:srgbClr val="FFFF00"/>
-                </a:highlight>
                 <a:latin typeface="Arial"/>
               </a:rPr>
               <a:t>Five short steps, the way I'd tackle any new problem.</a:t>
@@ -12541,7 +11902,7 @@
           </a:fontRef>
         </p:style>
         <p:txBody>
-          <a:bodyPr wrap="none" lIns="0" tIns="0" rIns="0" bIns="0" rtlCol="0" anchor="ctr"/>
+          <a:bodyPr rtlCol="0" anchor="ctr" wrap="none" lIns="0" rIns="0" tIns="0" bIns="0"/>
           <a:lstStyle/>
           <a:p>
             <a:pPr algn="ctr"/>
@@ -12574,7 +11935,7 @@
           <a:noFill/>
         </p:spPr>
         <p:txBody>
-          <a:bodyPr wrap="square" lIns="0" tIns="0" rIns="0" bIns="0" anchor="t">
+          <a:bodyPr wrap="square" anchor="t" lIns="0" rIns="0" tIns="0" bIns="0">
             <a:spAutoFit/>
           </a:bodyPr>
           <a:lstStyle/>
@@ -12605,42 +11966,24 @@
         <p:spPr>
           <a:xfrm>
             <a:off x="1508760" y="2340864"/>
-            <a:ext cx="9692640" cy="186461"/>
-          </a:xfrm>
-          <a:prstGeom prst="rect">
-            <a:avLst/>
-          </a:prstGeom>
-          <a:noFill/>
-        </p:spPr>
-        <p:txBody>
-          <a:bodyPr wrap="square" lIns="0" tIns="0" rIns="0" bIns="0" anchor="t">
-            <a:spAutoFit/>
-          </a:bodyPr>
-          <a:lstStyle/>
-          <a:p>
-            <a:pPr>
+            <a:ext cx="9692640" cy="320040"/>
+          </a:xfrm>
+          <a:prstGeom prst="rect">
+            <a:avLst/>
+          </a:prstGeom>
+          <a:noFill/>
+        </p:spPr>
+        <p:txBody>
+          <a:bodyPr wrap="square" anchor="t" lIns="0" rIns="0" tIns="0" bIns="0">
+            <a:spAutoFit/>
+          </a:bodyPr>
+          <a:lstStyle/>
+          <a:p>
+            <a:pPr algn="l">
               <a:lnSpc>
                 <a:spcPct val="104000"/>
               </a:lnSpc>
             </a:pPr>
-            <a:r>
-              <a:rPr lang="en-GB" sz="1200">
-                <a:solidFill>
-                  <a:srgbClr val="5A6472"/>
-                </a:solidFill>
-                <a:latin typeface="Arial"/>
-              </a:rPr>
-              <a:t>Mental Models </a:t>
-            </a:r>
-            <a:r>
-              <a:rPr lang="en-US" sz="1250" b="0" i="0">
-                <a:solidFill>
-                  <a:srgbClr val="5A6472"/>
-                </a:solidFill>
-                <a:latin typeface="Arial"/>
-              </a:rPr>
-              <a:t>: </a:t>
-            </a:r>
             <a:r>
               <a:rPr sz="1250" b="0" i="0">
                 <a:solidFill>
@@ -12690,7 +12033,7 @@
           </a:fontRef>
         </p:style>
         <p:txBody>
-          <a:bodyPr wrap="none" lIns="0" tIns="0" rIns="0" bIns="0" rtlCol="0" anchor="ctr"/>
+          <a:bodyPr rtlCol="0" anchor="ctr" wrap="none" lIns="0" rIns="0" tIns="0" bIns="0"/>
           <a:lstStyle/>
           <a:p>
             <a:pPr algn="ctr"/>
@@ -12723,7 +12066,7 @@
           <a:noFill/>
         </p:spPr>
         <p:txBody>
-          <a:bodyPr wrap="square" lIns="0" tIns="0" rIns="0" bIns="0" anchor="t">
+          <a:bodyPr wrap="square" anchor="t" lIns="0" rIns="0" tIns="0" bIns="0">
             <a:spAutoFit/>
           </a:bodyPr>
           <a:lstStyle/>
@@ -12762,7 +12105,7 @@
           <a:noFill/>
         </p:spPr>
         <p:txBody>
-          <a:bodyPr wrap="square" lIns="0" tIns="0" rIns="0" bIns="0" anchor="t">
+          <a:bodyPr wrap="square" anchor="t" lIns="0" rIns="0" tIns="0" bIns="0">
             <a:spAutoFit/>
           </a:bodyPr>
           <a:lstStyle/>
@@ -12821,7 +12164,7 @@
           </a:fontRef>
         </p:style>
         <p:txBody>
-          <a:bodyPr wrap="none" lIns="0" tIns="0" rIns="0" bIns="0" rtlCol="0" anchor="ctr"/>
+          <a:bodyPr rtlCol="0" anchor="ctr" wrap="none" lIns="0" rIns="0" tIns="0" bIns="0"/>
           <a:lstStyle/>
           <a:p>
             <a:pPr algn="ctr"/>
@@ -12854,7 +12197,7 @@
           <a:noFill/>
         </p:spPr>
         <p:txBody>
-          <a:bodyPr wrap="square" lIns="0" tIns="0" rIns="0" bIns="0" anchor="t">
+          <a:bodyPr wrap="square" anchor="t" lIns="0" rIns="0" tIns="0" bIns="0">
             <a:spAutoFit/>
           </a:bodyPr>
           <a:lstStyle/>
@@ -12893,7 +12236,7 @@
           <a:noFill/>
         </p:spPr>
         <p:txBody>
-          <a:bodyPr wrap="square" lIns="0" tIns="0" rIns="0" bIns="0" anchor="t">
+          <a:bodyPr wrap="square" anchor="t" lIns="0" rIns="0" tIns="0" bIns="0">
             <a:spAutoFit/>
           </a:bodyPr>
           <a:lstStyle/>
@@ -12952,7 +12295,7 @@
           </a:fontRef>
         </p:style>
         <p:txBody>
-          <a:bodyPr wrap="none" lIns="0" tIns="0" rIns="0" bIns="0" rtlCol="0" anchor="ctr"/>
+          <a:bodyPr rtlCol="0" anchor="ctr" wrap="none" lIns="0" rIns="0" tIns="0" bIns="0"/>
           <a:lstStyle/>
           <a:p>
             <a:pPr algn="ctr"/>
@@ -12985,7 +12328,7 @@
           <a:noFill/>
         </p:spPr>
         <p:txBody>
-          <a:bodyPr wrap="square" lIns="0" tIns="0" rIns="0" bIns="0" anchor="t">
+          <a:bodyPr wrap="square" anchor="t" lIns="0" rIns="0" tIns="0" bIns="0">
             <a:spAutoFit/>
           </a:bodyPr>
           <a:lstStyle/>
@@ -13024,7 +12367,7 @@
           <a:noFill/>
         </p:spPr>
         <p:txBody>
-          <a:bodyPr wrap="square" lIns="0" tIns="0" rIns="0" bIns="0" anchor="t">
+          <a:bodyPr wrap="square" anchor="t" lIns="0" rIns="0" tIns="0" bIns="0">
             <a:spAutoFit/>
           </a:bodyPr>
           <a:lstStyle/>
@@ -13083,7 +12426,7 @@
           </a:fontRef>
         </p:style>
         <p:txBody>
-          <a:bodyPr wrap="none" lIns="0" tIns="0" rIns="0" bIns="0" rtlCol="0" anchor="ctr"/>
+          <a:bodyPr rtlCol="0" anchor="ctr" wrap="none" lIns="0" rIns="0" tIns="0" bIns="0"/>
           <a:lstStyle/>
           <a:p>
             <a:pPr algn="ctr"/>
@@ -13116,7 +12459,7 @@
           <a:noFill/>
         </p:spPr>
         <p:txBody>
-          <a:bodyPr wrap="square" lIns="0" tIns="0" rIns="0" bIns="0" anchor="t">
+          <a:bodyPr wrap="square" anchor="t" lIns="0" rIns="0" tIns="0" bIns="0">
             <a:spAutoFit/>
           </a:bodyPr>
           <a:lstStyle/>
@@ -13155,7 +12498,7 @@
           <a:noFill/>
         </p:spPr>
         <p:txBody>
-          <a:bodyPr wrap="square" lIns="0" tIns="0" rIns="0" bIns="0" anchor="t">
+          <a:bodyPr wrap="square" anchor="t" lIns="0" rIns="0" tIns="0" bIns="0">
             <a:spAutoFit/>
           </a:bodyPr>
           <a:lstStyle/>
@@ -13186,7 +12529,7 @@
 </file>
 
 <file path=ppt/slides/slide3.xml><?xml version="1.0" encoding="utf-8"?>
-<p:sld xmlns:a="http://schemas.openxmlformats.org/drawingml/2006/main" xmlns:r="http://schemas.openxmlformats.org/officeDocument/2006/relationships" xmlns:p="http://schemas.openxmlformats.org/presentationml/2006/main">
+<p:sld xmlns:a="http://schemas.openxmlformats.org/drawingml/2006/main" xmlns:p="http://schemas.openxmlformats.org/presentationml/2006/main" xmlns:r="http://schemas.openxmlformats.org/officeDocument/2006/relationships">
   <p:cSld>
     <p:bg>
       <p:bgPr>
@@ -13202,14 +12545,7 @@
         <p:cNvGrpSpPr/>
         <p:nvPr/>
       </p:nvGrpSpPr>
-      <p:grpSpPr>
-        <a:xfrm>
-          <a:off x="0" y="0"/>
-          <a:ext cx="0" cy="0"/>
-          <a:chOff x="0" y="0"/>
-          <a:chExt cx="0" cy="0"/>
-        </a:xfrm>
-      </p:grpSpPr>
+      <p:grpSpPr/>
       <p:sp>
         <p:nvSpPr>
           <p:cNvPr id="2" name="TextBox 1"/>
@@ -13227,7 +12563,7 @@
           <a:noFill/>
         </p:spPr>
         <p:txBody>
-          <a:bodyPr wrap="square" lIns="0" tIns="0" rIns="0" bIns="0" anchor="t">
+          <a:bodyPr wrap="square" anchor="t" lIns="0" rIns="0" tIns="0" bIns="0">
             <a:spAutoFit/>
           </a:bodyPr>
           <a:lstStyle/>
@@ -13266,7 +12602,7 @@
           <a:noFill/>
         </p:spPr>
         <p:txBody>
-          <a:bodyPr wrap="square" lIns="0" tIns="0" rIns="0" bIns="0" anchor="t">
+          <a:bodyPr wrap="square" anchor="t" lIns="0" rIns="0" tIns="0" bIns="0">
             <a:spAutoFit/>
           </a:bodyPr>
           <a:lstStyle/>
@@ -13305,7 +12641,7 @@
           <a:noFill/>
         </p:spPr>
         <p:txBody>
-          <a:bodyPr wrap="square" lIns="0" tIns="0" rIns="0" bIns="0" anchor="t">
+          <a:bodyPr wrap="square" anchor="t" lIns="0" rIns="0" tIns="0" bIns="0">
             <a:spAutoFit/>
           </a:bodyPr>
           <a:lstStyle/>
@@ -13336,15 +12672,15 @@
         <p:spPr>
           <a:xfrm>
             <a:off x="777240" y="841248"/>
-            <a:ext cx="10637215" cy="958789"/>
-          </a:xfrm>
-          <a:prstGeom prst="rect">
-            <a:avLst/>
-          </a:prstGeom>
-          <a:noFill/>
-        </p:spPr>
-        <p:txBody>
-          <a:bodyPr wrap="square" lIns="0" tIns="0" rIns="0" bIns="0" anchor="t">
+            <a:ext cx="10637215" cy="1097280"/>
+          </a:xfrm>
+          <a:prstGeom prst="rect">
+            <a:avLst/>
+          </a:prstGeom>
+          <a:noFill/>
+        </p:spPr>
+        <p:txBody>
+          <a:bodyPr wrap="square" anchor="t" lIns="0" rIns="0" tIns="0" bIns="0">
             <a:spAutoFit/>
           </a:bodyPr>
           <a:lstStyle/>
@@ -13359,21 +12695,9 @@
                 <a:solidFill>
                   <a:srgbClr val="15171C"/>
                 </a:solidFill>
-                <a:highlight>
-                  <a:srgbClr val="FFFF00"/>
-                </a:highlight>
-                <a:latin typeface="Arial"/>
-              </a:rPr>
-              <a:t>Value</a:t>
-            </a:r>
-            <a:r>
-              <a:rPr sz="3100" b="1" i="0">
-                <a:solidFill>
-                  <a:srgbClr val="15171C"/>
-                </a:solidFill>
-                <a:latin typeface="Arial"/>
-              </a:rPr>
-              <a:t> from day one: a skill that grows into an agentic loop.</a:t>
+                <a:latin typeface="Arial"/>
+              </a:rPr>
+              <a:t>Value from day one: a skill that grows into an agentic loop.</a:t>
             </a:r>
           </a:p>
         </p:txBody>
@@ -13417,12 +12741,12 @@
           </a:fontRef>
         </p:style>
         <p:txBody>
-          <a:bodyPr wrap="square" lIns="0" tIns="0" rIns="0" bIns="0" rtlCol="0" anchor="ctr"/>
+          <a:bodyPr rtlCol="0" anchor="ctr" wrap="square" lIns="0" rIns="0" tIns="0" bIns="0"/>
           <a:lstStyle/>
           <a:p>
             <a:pPr algn="ctr"/>
             <a:r>
-              <a:rPr sz="2000" b="1">
+              <a:rPr sz="1100" b="1">
                 <a:solidFill>
                   <a:srgbClr val="E14E12"/>
                 </a:solidFill>
@@ -13478,7 +12802,6 @@
           <a:lstStyle/>
           <a:p>
             <a:pPr algn="ctr"/>
-            <a:endParaRPr/>
           </a:p>
         </p:txBody>
       </p:sp>
@@ -13519,7 +12842,7 @@
           </a:fontRef>
         </p:style>
         <p:txBody>
-          <a:bodyPr wrap="none" lIns="0" tIns="0" rIns="0" bIns="0" rtlCol="0" anchor="ctr"/>
+          <a:bodyPr rtlCol="0" anchor="ctr" wrap="none" lIns="0" rIns="0" tIns="0" bIns="0"/>
           <a:lstStyle/>
           <a:p>
             <a:pPr algn="ctr"/>
@@ -13552,7 +12875,7 @@
           <a:noFill/>
         </p:spPr>
         <p:txBody>
-          <a:bodyPr wrap="square" lIns="0" tIns="0" rIns="0" bIns="0" anchor="t">
+          <a:bodyPr wrap="square" anchor="t" lIns="0" rIns="0" tIns="0" bIns="0">
             <a:spAutoFit/>
           </a:bodyPr>
           <a:lstStyle/>
@@ -13591,7 +12914,7 @@
           <a:noFill/>
         </p:spPr>
         <p:txBody>
-          <a:bodyPr wrap="square" lIns="0" tIns="0" rIns="0" bIns="0" anchor="t">
+          <a:bodyPr wrap="square" anchor="t" lIns="0" rIns="0" tIns="0" bIns="0">
             <a:spAutoFit/>
           </a:bodyPr>
           <a:lstStyle/>
@@ -13630,7 +12953,7 @@
           <a:noFill/>
         </p:spPr>
         <p:txBody>
-          <a:bodyPr wrap="square" lIns="0" tIns="0" rIns="0" bIns="0" anchor="t">
+          <a:bodyPr wrap="square" anchor="t" lIns="0" rIns="0" tIns="0" bIns="0">
             <a:spAutoFit/>
           </a:bodyPr>
           <a:lstStyle/>
@@ -13691,12 +13014,12 @@
           </a:fontRef>
         </p:style>
         <p:txBody>
-          <a:bodyPr wrap="square" lIns="0" tIns="0" rIns="0" bIns="0" rtlCol="0" anchor="ctr"/>
+          <a:bodyPr rtlCol="0" anchor="ctr" wrap="square" lIns="0" rIns="0" tIns="0" bIns="0"/>
           <a:lstStyle/>
           <a:p>
             <a:pPr algn="ctr"/>
             <a:r>
-              <a:rPr sz="2000" b="1">
+              <a:rPr sz="1100" b="1">
                 <a:solidFill>
                   <a:srgbClr val="E14E12"/>
                 </a:solidFill>
@@ -13752,7 +13075,6 @@
           <a:lstStyle/>
           <a:p>
             <a:pPr algn="ctr"/>
-            <a:endParaRPr/>
           </a:p>
         </p:txBody>
       </p:sp>
@@ -13793,7 +13115,7 @@
           </a:fontRef>
         </p:style>
         <p:txBody>
-          <a:bodyPr wrap="none" lIns="0" tIns="0" rIns="0" bIns="0" rtlCol="0" anchor="ctr"/>
+          <a:bodyPr rtlCol="0" anchor="ctr" wrap="none" lIns="0" rIns="0" tIns="0" bIns="0"/>
           <a:lstStyle/>
           <a:p>
             <a:pPr algn="ctr"/>
@@ -13818,15 +13140,15 @@
         <p:spPr>
           <a:xfrm>
             <a:off x="4261104" y="2734056"/>
-            <a:ext cx="1435608" cy="223844"/>
-          </a:xfrm>
-          <a:prstGeom prst="rect">
-            <a:avLst/>
-          </a:prstGeom>
-          <a:noFill/>
-        </p:spPr>
-        <p:txBody>
-          <a:bodyPr wrap="square" lIns="0" tIns="0" rIns="0" bIns="0" anchor="t">
+            <a:ext cx="1435608" cy="365760"/>
+          </a:xfrm>
+          <a:prstGeom prst="rect">
+            <a:avLst/>
+          </a:prstGeom>
+          <a:noFill/>
+        </p:spPr>
+        <p:txBody>
+          <a:bodyPr wrap="square" anchor="t" lIns="0" rIns="0" tIns="0" bIns="0">
             <a:spAutoFit/>
           </a:bodyPr>
           <a:lstStyle/>
@@ -13865,7 +13187,7 @@
           <a:noFill/>
         </p:spPr>
         <p:txBody>
-          <a:bodyPr wrap="square" lIns="0" tIns="0" rIns="0" bIns="0" anchor="t">
+          <a:bodyPr wrap="square" anchor="t" lIns="0" rIns="0" tIns="0" bIns="0">
             <a:spAutoFit/>
           </a:bodyPr>
           <a:lstStyle/>
@@ -13904,7 +13226,7 @@
           <a:noFill/>
         </p:spPr>
         <p:txBody>
-          <a:bodyPr wrap="square" lIns="0" tIns="0" rIns="0" bIns="0" anchor="t">
+          <a:bodyPr wrap="square" anchor="t" lIns="0" rIns="0" tIns="0" bIns="0">
             <a:spAutoFit/>
           </a:bodyPr>
           <a:lstStyle/>
@@ -13965,12 +13287,12 @@
           </a:fontRef>
         </p:style>
         <p:txBody>
-          <a:bodyPr wrap="square" lIns="0" tIns="0" rIns="0" bIns="0" rtlCol="0" anchor="ctr"/>
+          <a:bodyPr rtlCol="0" anchor="ctr" wrap="square" lIns="0" rIns="0" tIns="0" bIns="0"/>
           <a:lstStyle/>
           <a:p>
             <a:pPr algn="ctr"/>
             <a:r>
-              <a:rPr sz="2000" b="1">
+              <a:rPr sz="1100" b="1">
                 <a:solidFill>
                   <a:srgbClr val="E14E12"/>
                 </a:solidFill>
@@ -14026,7 +13348,6 @@
           <a:lstStyle/>
           <a:p>
             <a:pPr algn="ctr"/>
-            <a:endParaRPr/>
           </a:p>
         </p:txBody>
       </p:sp>
@@ -14067,7 +13388,7 @@
           </a:fontRef>
         </p:style>
         <p:txBody>
-          <a:bodyPr wrap="none" lIns="0" tIns="0" rIns="0" bIns="0" rtlCol="0" anchor="ctr"/>
+          <a:bodyPr rtlCol="0" anchor="ctr" wrap="none" lIns="0" rIns="0" tIns="0" bIns="0"/>
           <a:lstStyle/>
           <a:p>
             <a:pPr algn="ctr"/>
@@ -14100,7 +13421,7 @@
           <a:noFill/>
         </p:spPr>
         <p:txBody>
-          <a:bodyPr wrap="square" lIns="0" tIns="0" rIns="0" bIns="0" anchor="t">
+          <a:bodyPr wrap="square" anchor="t" lIns="0" rIns="0" tIns="0" bIns="0">
             <a:spAutoFit/>
           </a:bodyPr>
           <a:lstStyle/>
@@ -14139,7 +13460,7 @@
           <a:noFill/>
         </p:spPr>
         <p:txBody>
-          <a:bodyPr wrap="square" lIns="0" tIns="0" rIns="0" bIns="0" anchor="t">
+          <a:bodyPr wrap="square" anchor="t" lIns="0" rIns="0" tIns="0" bIns="0">
             <a:spAutoFit/>
           </a:bodyPr>
           <a:lstStyle/>
@@ -14178,7 +13499,7 @@
           <a:noFill/>
         </p:spPr>
         <p:txBody>
-          <a:bodyPr wrap="square" lIns="0" tIns="0" rIns="0" bIns="0" anchor="t">
+          <a:bodyPr wrap="square" anchor="t" lIns="0" rIns="0" tIns="0" bIns="0">
             <a:spAutoFit/>
           </a:bodyPr>
           <a:lstStyle/>
@@ -14239,12 +13560,12 @@
           </a:fontRef>
         </p:style>
         <p:txBody>
-          <a:bodyPr wrap="square" lIns="0" tIns="0" rIns="0" bIns="0" rtlCol="0" anchor="ctr"/>
+          <a:bodyPr rtlCol="0" anchor="ctr" wrap="square" lIns="0" rIns="0" tIns="0" bIns="0"/>
           <a:lstStyle/>
           <a:p>
             <a:pPr algn="ctr"/>
             <a:r>
-              <a:rPr sz="2000" b="1">
+              <a:rPr sz="1100" b="1">
                 <a:solidFill>
                   <a:srgbClr val="E14E12"/>
                 </a:solidFill>
@@ -14300,7 +13621,6 @@
           <a:lstStyle/>
           <a:p>
             <a:pPr algn="ctr"/>
-            <a:endParaRPr/>
           </a:p>
         </p:txBody>
       </p:sp>
@@ -14341,7 +13661,7 @@
           </a:fontRef>
         </p:style>
         <p:txBody>
-          <a:bodyPr wrap="none" lIns="0" tIns="0" rIns="0" bIns="0" rtlCol="0" anchor="ctr"/>
+          <a:bodyPr rtlCol="0" anchor="ctr" wrap="none" lIns="0" rIns="0" tIns="0" bIns="0"/>
           <a:lstStyle/>
           <a:p>
             <a:pPr algn="ctr"/>
@@ -14374,7 +13694,7 @@
           <a:noFill/>
         </p:spPr>
         <p:txBody>
-          <a:bodyPr wrap="square" lIns="0" tIns="0" rIns="0" bIns="0" anchor="t">
+          <a:bodyPr wrap="square" anchor="t" lIns="0" rIns="0" tIns="0" bIns="0">
             <a:spAutoFit/>
           </a:bodyPr>
           <a:lstStyle/>
@@ -14413,7 +13733,7 @@
           <a:noFill/>
         </p:spPr>
         <p:txBody>
-          <a:bodyPr wrap="square" lIns="0" tIns="0" rIns="0" bIns="0" anchor="t">
+          <a:bodyPr wrap="square" anchor="t" lIns="0" rIns="0" tIns="0" bIns="0">
             <a:spAutoFit/>
           </a:bodyPr>
           <a:lstStyle/>
@@ -14478,7 +13798,6 @@
           <a:lstStyle/>
           <a:p>
             <a:pPr algn="ctr"/>
-            <a:endParaRPr/>
           </a:p>
         </p:txBody>
       </p:sp>
@@ -14499,7 +13818,7 @@
           <a:noFill/>
         </p:spPr>
         <p:txBody>
-          <a:bodyPr wrap="square" lIns="0" tIns="0" rIns="0" bIns="0" anchor="t">
+          <a:bodyPr wrap="square" anchor="t" lIns="0" rIns="0" tIns="0" bIns="0">
             <a:spAutoFit/>
           </a:bodyPr>
           <a:lstStyle/>
@@ -14566,7 +13885,6 @@
           <a:lstStyle/>
           <a:p>
             <a:pPr algn="ctr"/>
-            <a:endParaRPr/>
           </a:p>
         </p:txBody>
       </p:sp>
@@ -14587,7 +13905,7 @@
           <a:noFill/>
         </p:spPr>
         <p:txBody>
-          <a:bodyPr wrap="square" lIns="0" tIns="0" rIns="0" bIns="0" anchor="t">
+          <a:bodyPr wrap="square" anchor="t" lIns="0" rIns="0" tIns="0" bIns="0">
             <a:spAutoFit/>
           </a:bodyPr>
           <a:lstStyle/>
@@ -14648,7 +13966,7 @@
           </a:fontRef>
         </p:style>
         <p:txBody>
-          <a:bodyPr wrap="square" lIns="0" tIns="0" rIns="0" bIns="0" rtlCol="0" anchor="ctr"/>
+          <a:bodyPr rtlCol="0" anchor="ctr" wrap="square" lIns="0" rIns="0" tIns="0" bIns="0"/>
           <a:lstStyle/>
           <a:p>
             <a:pPr algn="ctr"/>
@@ -14681,7 +13999,7 @@
           <a:noFill/>
         </p:spPr>
         <p:txBody>
-          <a:bodyPr wrap="square" lIns="0" tIns="0" rIns="0" bIns="0" anchor="t">
+          <a:bodyPr wrap="square" anchor="t" lIns="0" rIns="0" tIns="0" bIns="0">
             <a:spAutoFit/>
           </a:bodyPr>
           <a:lstStyle/>
@@ -14742,7 +14060,7 @@
           </a:fontRef>
         </p:style>
         <p:txBody>
-          <a:bodyPr wrap="square" lIns="0" tIns="0" rIns="0" bIns="0" rtlCol="0" anchor="ctr"/>
+          <a:bodyPr rtlCol="0" anchor="ctr" wrap="square" lIns="0" rIns="0" tIns="0" bIns="0"/>
           <a:lstStyle/>
           <a:p>
             <a:pPr algn="ctr"/>
@@ -14753,28 +14071,7 @@
                 </a:solidFill>
                 <a:latin typeface="Arial"/>
               </a:rPr>
-              <a:t>🔒  Local </a:t>
-            </a:r>
-            <a:r>
-              <a:rPr sz="1100" b="1">
-                <a:solidFill>
-                  <a:srgbClr val="12A150"/>
-                </a:solidFill>
-                <a:highlight>
-                  <a:srgbClr val="FFFF00"/>
-                </a:highlight>
-                <a:latin typeface="Arial"/>
-              </a:rPr>
-              <a:t>Hermes</a:t>
-            </a:r>
-            <a:r>
-              <a:rPr sz="1100" b="1">
-                <a:solidFill>
-                  <a:srgbClr val="12A150"/>
-                </a:solidFill>
-                <a:latin typeface="Arial"/>
-              </a:rPr>
-              <a:t>, on your server: real data</a:t>
+              <a:t>🔒  Local Hermes, on your server: real data</a:t>
             </a:r>
           </a:p>
         </p:txBody>
@@ -14787,16 +14084,16 @@
         </p:nvSpPr>
         <p:spPr>
           <a:xfrm>
-            <a:off x="9175495" y="5142945"/>
-            <a:ext cx="2208785" cy="562911"/>
-          </a:xfrm>
-          <a:prstGeom prst="rect">
-            <a:avLst/>
-          </a:prstGeom>
-          <a:noFill/>
-        </p:spPr>
-        <p:txBody>
-          <a:bodyPr wrap="square" lIns="0" tIns="0" rIns="0" bIns="0" anchor="t">
+            <a:off x="9006840" y="5468112"/>
+            <a:ext cx="2407615" cy="548640"/>
+          </a:xfrm>
+          <a:prstGeom prst="rect">
+            <a:avLst/>
+          </a:prstGeom>
+          <a:noFill/>
+        </p:spPr>
+        <p:txBody>
+          <a:bodyPr wrap="square" anchor="t" lIns="0" rIns="0" tIns="0" bIns="0">
             <a:spAutoFit/>
           </a:bodyPr>
           <a:lstStyle/>
@@ -14827,7 +14124,7 @@
 </file>
 
 <file path=ppt/slides/slide4.xml><?xml version="1.0" encoding="utf-8"?>
-<p:sld xmlns:a="http://schemas.openxmlformats.org/drawingml/2006/main" xmlns:r="http://schemas.openxmlformats.org/officeDocument/2006/relationships" xmlns:p="http://schemas.openxmlformats.org/presentationml/2006/main">
+<p:sld xmlns:a="http://schemas.openxmlformats.org/drawingml/2006/main" xmlns:p="http://schemas.openxmlformats.org/presentationml/2006/main" xmlns:r="http://schemas.openxmlformats.org/officeDocument/2006/relationships">
   <p:cSld>
     <p:bg>
       <p:bgPr>
@@ -14843,14 +14140,7 @@
         <p:cNvGrpSpPr/>
         <p:nvPr/>
       </p:nvGrpSpPr>
-      <p:grpSpPr>
-        <a:xfrm>
-          <a:off x="0" y="0"/>
-          <a:ext cx="0" cy="0"/>
-          <a:chOff x="0" y="0"/>
-          <a:chExt cx="0" cy="0"/>
-        </a:xfrm>
-      </p:grpSpPr>
+      <p:grpSpPr/>
       <p:sp>
         <p:nvSpPr>
           <p:cNvPr id="2" name="TextBox 1"/>
@@ -14868,7 +14158,7 @@
           <a:noFill/>
         </p:spPr>
         <p:txBody>
-          <a:bodyPr wrap="square" lIns="0" tIns="0" rIns="0" bIns="0" anchor="t">
+          <a:bodyPr wrap="square" anchor="t" lIns="0" rIns="0" tIns="0" bIns="0">
             <a:spAutoFit/>
           </a:bodyPr>
           <a:lstStyle/>
@@ -14907,7 +14197,7 @@
           <a:noFill/>
         </p:spPr>
         <p:txBody>
-          <a:bodyPr wrap="square" lIns="0" tIns="0" rIns="0" bIns="0" anchor="t">
+          <a:bodyPr wrap="square" anchor="t" lIns="0" rIns="0" tIns="0" bIns="0">
             <a:spAutoFit/>
           </a:bodyPr>
           <a:lstStyle/>
@@ -14938,15 +14228,15 @@
         <p:spPr>
           <a:xfrm>
             <a:off x="777240" y="475488"/>
-            <a:ext cx="10607040" cy="268663"/>
-          </a:xfrm>
-          <a:prstGeom prst="rect">
-            <a:avLst/>
-          </a:prstGeom>
-          <a:noFill/>
-        </p:spPr>
-        <p:txBody>
-          <a:bodyPr wrap="square" lIns="0" tIns="0" rIns="0" bIns="0" anchor="t">
+            <a:ext cx="10607040" cy="320040"/>
+          </a:xfrm>
+          <a:prstGeom prst="rect">
+            <a:avLst/>
+          </a:prstGeom>
+          <a:noFill/>
+        </p:spPr>
+        <p:txBody>
+          <a:bodyPr wrap="square" anchor="t" lIns="0" rIns="0" tIns="0" bIns="0">
             <a:spAutoFit/>
           </a:bodyPr>
           <a:lstStyle/>
@@ -14957,13 +14247,10 @@
               </a:lnSpc>
             </a:pPr>
             <a:r>
-              <a:rPr b="1" i="0">
+              <a:rPr sz="1250" b="1" i="0">
                 <a:solidFill>
                   <a:srgbClr val="E14E12"/>
                 </a:solidFill>
-                <a:highlight>
-                  <a:srgbClr val="FFFF00"/>
-                </a:highlight>
                 <a:latin typeface="Arial"/>
               </a:rPr>
               <a:t>HOW I THINK</a:t>
@@ -14980,15 +14267,15 @@
         <p:spPr>
           <a:xfrm>
             <a:off x="777240" y="841248"/>
-            <a:ext cx="10637215" cy="958789"/>
-          </a:xfrm>
-          <a:prstGeom prst="rect">
-            <a:avLst/>
-          </a:prstGeom>
-          <a:noFill/>
-        </p:spPr>
-        <p:txBody>
-          <a:bodyPr wrap="square" lIns="0" tIns="0" rIns="0" bIns="0" anchor="t">
+            <a:ext cx="10637215" cy="1097280"/>
+          </a:xfrm>
+          <a:prstGeom prst="rect">
+            <a:avLst/>
+          </a:prstGeom>
+          <a:noFill/>
+        </p:spPr>
+        <p:txBody>
+          <a:bodyPr wrap="square" anchor="t" lIns="0" rIns="0" tIns="0" bIns="0">
             <a:spAutoFit/>
           </a:bodyPr>
           <a:lstStyle/>
@@ -15005,43 +14292,7 @@
                 </a:solidFill>
                 <a:latin typeface="Arial"/>
               </a:rPr>
-              <a:t>I don't jump to a solution</a:t>
-            </a:r>
-            <a:r>
-              <a:rPr lang="en-US" sz="3100" b="1" i="0">
-                <a:solidFill>
-                  <a:srgbClr val="15171C"/>
-                </a:solidFill>
-                <a:latin typeface="Arial"/>
-              </a:rPr>
-              <a:t>!</a:t>
-            </a:r>
-            <a:r>
-              <a:rPr sz="3100" b="1" i="0">
-                <a:solidFill>
-                  <a:srgbClr val="15171C"/>
-                </a:solidFill>
-                <a:latin typeface="Arial"/>
-              </a:rPr>
-              <a:t>. I find the </a:t>
-            </a:r>
-            <a:r>
-              <a:rPr sz="3100" b="1" i="0">
-                <a:solidFill>
-                  <a:srgbClr val="FF0000"/>
-                </a:solidFill>
-                <a:latin typeface="Arial"/>
-              </a:rPr>
-              <a:t>root</a:t>
-            </a:r>
-            <a:r>
-              <a:rPr sz="3100" b="1" i="0">
-                <a:solidFill>
-                  <a:srgbClr val="15171C"/>
-                </a:solidFill>
-                <a:latin typeface="Arial"/>
-              </a:rPr>
-              <a:t> of the problem first.</a:t>
+              <a:t>I don't jump to a solution. I find the root of the problem first.</a:t>
             </a:r>
           </a:p>
         </p:txBody>
@@ -15063,7 +14314,7 @@
           <a:noFill/>
         </p:spPr>
         <p:txBody>
-          <a:bodyPr wrap="square" lIns="0" tIns="0" rIns="0" bIns="0" anchor="t">
+          <a:bodyPr wrap="square" anchor="t" lIns="0" rIns="0" tIns="0" bIns="0">
             <a:spAutoFit/>
           </a:bodyPr>
           <a:lstStyle/>
@@ -15130,7 +14381,6 @@
           <a:lstStyle/>
           <a:p>
             <a:pPr algn="ctr"/>
-            <a:endParaRPr/>
           </a:p>
         </p:txBody>
       </p:sp>
@@ -15175,7 +14425,6 @@
           <a:lstStyle/>
           <a:p>
             <a:pPr algn="ctr"/>
-            <a:endParaRPr/>
           </a:p>
         </p:txBody>
       </p:sp>
@@ -15188,15 +14437,15 @@
         <p:spPr>
           <a:xfrm>
             <a:off x="1051560" y="3127248"/>
-            <a:ext cx="1996363" cy="231345"/>
-          </a:xfrm>
-          <a:prstGeom prst="rect">
-            <a:avLst/>
-          </a:prstGeom>
-          <a:noFill/>
-        </p:spPr>
-        <p:txBody>
-          <a:bodyPr wrap="square" lIns="0" tIns="0" rIns="0" bIns="0" anchor="t">
+            <a:ext cx="1996363" cy="365760"/>
+          </a:xfrm>
+          <a:prstGeom prst="rect">
+            <a:avLst/>
+          </a:prstGeom>
+          <a:noFill/>
+        </p:spPr>
+        <p:txBody>
+          <a:bodyPr wrap="square" anchor="t" lIns="0" rIns="0" tIns="0" bIns="0">
             <a:spAutoFit/>
           </a:bodyPr>
           <a:lstStyle/>
@@ -15211,9 +14460,6 @@
                 <a:solidFill>
                   <a:srgbClr val="15171C"/>
                 </a:solidFill>
-                <a:highlight>
-                  <a:srgbClr val="FFFF00"/>
-                </a:highlight>
                 <a:latin typeface="Arial"/>
               </a:rPr>
               <a:t>First principles</a:t>
@@ -15238,7 +14484,7 @@
           <a:noFill/>
         </p:spPr>
         <p:txBody>
-          <a:bodyPr wrap="square" lIns="0" tIns="0" rIns="0" bIns="0" anchor="t">
+          <a:bodyPr wrap="square" anchor="t" lIns="0" rIns="0" tIns="0" bIns="0">
             <a:spAutoFit/>
           </a:bodyPr>
           <a:lstStyle/>
@@ -15305,7 +14551,6 @@
           <a:lstStyle/>
           <a:p>
             <a:pPr algn="ctr"/>
-            <a:endParaRPr/>
           </a:p>
         </p:txBody>
       </p:sp>
@@ -15350,7 +14595,6 @@
           <a:lstStyle/>
           <a:p>
             <a:pPr algn="ctr"/>
-            <a:endParaRPr/>
           </a:p>
         </p:txBody>
       </p:sp>
@@ -15363,15 +14607,15 @@
         <p:spPr>
           <a:xfrm>
             <a:off x="3779443" y="3127248"/>
-            <a:ext cx="1996363" cy="231345"/>
-          </a:xfrm>
-          <a:prstGeom prst="rect">
-            <a:avLst/>
-          </a:prstGeom>
-          <a:noFill/>
-        </p:spPr>
-        <p:txBody>
-          <a:bodyPr wrap="square" lIns="0" tIns="0" rIns="0" bIns="0" anchor="t">
+            <a:ext cx="1996363" cy="365760"/>
+          </a:xfrm>
+          <a:prstGeom prst="rect">
+            <a:avLst/>
+          </a:prstGeom>
+          <a:noFill/>
+        </p:spPr>
+        <p:txBody>
+          <a:bodyPr wrap="square" anchor="t" lIns="0" rIns="0" tIns="0" bIns="0">
             <a:spAutoFit/>
           </a:bodyPr>
           <a:lstStyle/>
@@ -15386,9 +14630,6 @@
                 <a:solidFill>
                   <a:srgbClr val="15171C"/>
                 </a:solidFill>
-                <a:highlight>
-                  <a:srgbClr val="FFFF00"/>
-                </a:highlight>
                 <a:latin typeface="Arial"/>
               </a:rPr>
               <a:t>Five whys</a:t>
@@ -15413,7 +14654,7 @@
           <a:noFill/>
         </p:spPr>
         <p:txBody>
-          <a:bodyPr wrap="square" lIns="0" tIns="0" rIns="0" bIns="0" anchor="t">
+          <a:bodyPr wrap="square" anchor="t" lIns="0" rIns="0" tIns="0" bIns="0">
             <a:spAutoFit/>
           </a:bodyPr>
           <a:lstStyle/>
@@ -15480,7 +14721,6 @@
           <a:lstStyle/>
           <a:p>
             <a:pPr algn="ctr"/>
-            <a:endParaRPr/>
           </a:p>
         </p:txBody>
       </p:sp>
@@ -15525,7 +14765,6 @@
           <a:lstStyle/>
           <a:p>
             <a:pPr algn="ctr"/>
-            <a:endParaRPr/>
           </a:p>
         </p:txBody>
       </p:sp>
@@ -15538,15 +14777,15 @@
         <p:spPr>
           <a:xfrm>
             <a:off x="6507327" y="3127248"/>
-            <a:ext cx="1996363" cy="231345"/>
-          </a:xfrm>
-          <a:prstGeom prst="rect">
-            <a:avLst/>
-          </a:prstGeom>
-          <a:noFill/>
-        </p:spPr>
-        <p:txBody>
-          <a:bodyPr wrap="square" lIns="0" tIns="0" rIns="0" bIns="0" anchor="t">
+            <a:ext cx="1996363" cy="365760"/>
+          </a:xfrm>
+          <a:prstGeom prst="rect">
+            <a:avLst/>
+          </a:prstGeom>
+          <a:noFill/>
+        </p:spPr>
+        <p:txBody>
+          <a:bodyPr wrap="square" anchor="t" lIns="0" rIns="0" tIns="0" bIns="0">
             <a:spAutoFit/>
           </a:bodyPr>
           <a:lstStyle/>
@@ -15561,9 +14800,6 @@
                 <a:solidFill>
                   <a:srgbClr val="15171C"/>
                 </a:solidFill>
-                <a:highlight>
-                  <a:srgbClr val="FFFF00"/>
-                </a:highlight>
                 <a:latin typeface="Arial"/>
               </a:rPr>
               <a:t>Systems thinking</a:t>
@@ -15588,7 +14824,7 @@
           <a:noFill/>
         </p:spPr>
         <p:txBody>
-          <a:bodyPr wrap="square" lIns="0" tIns="0" rIns="0" bIns="0" anchor="t">
+          <a:bodyPr wrap="square" anchor="t" lIns="0" rIns="0" tIns="0" bIns="0">
             <a:spAutoFit/>
           </a:bodyPr>
           <a:lstStyle/>
@@ -15655,7 +14891,6 @@
           <a:lstStyle/>
           <a:p>
             <a:pPr algn="ctr"/>
-            <a:endParaRPr/>
           </a:p>
         </p:txBody>
       </p:sp>
@@ -15700,7 +14935,6 @@
           <a:lstStyle/>
           <a:p>
             <a:pPr algn="ctr"/>
-            <a:endParaRPr/>
           </a:p>
         </p:txBody>
       </p:sp>
@@ -15713,15 +14947,15 @@
         <p:spPr>
           <a:xfrm>
             <a:off x="9235211" y="3127248"/>
-            <a:ext cx="1996363" cy="231345"/>
-          </a:xfrm>
-          <a:prstGeom prst="rect">
-            <a:avLst/>
-          </a:prstGeom>
-          <a:noFill/>
-        </p:spPr>
-        <p:txBody>
-          <a:bodyPr wrap="square" lIns="0" tIns="0" rIns="0" bIns="0" anchor="t">
+            <a:ext cx="1996363" cy="365760"/>
+          </a:xfrm>
+          <a:prstGeom prst="rect">
+            <a:avLst/>
+          </a:prstGeom>
+          <a:noFill/>
+        </p:spPr>
+        <p:txBody>
+          <a:bodyPr wrap="square" anchor="t" lIns="0" rIns="0" tIns="0" bIns="0">
             <a:spAutoFit/>
           </a:bodyPr>
           <a:lstStyle/>
@@ -15736,9 +14970,6 @@
                 <a:solidFill>
                   <a:srgbClr val="15171C"/>
                 </a:solidFill>
-                <a:highlight>
-                  <a:srgbClr val="FFFF00"/>
-                </a:highlight>
                 <a:latin typeface="Arial"/>
               </a:rPr>
               <a:t>80 / 20</a:t>
@@ -15763,7 +14994,7 @@
           <a:noFill/>
         </p:spPr>
         <p:txBody>
-          <a:bodyPr wrap="square" lIns="0" tIns="0" rIns="0" bIns="0" anchor="t">
+          <a:bodyPr wrap="square" anchor="t" lIns="0" rIns="0" tIns="0" bIns="0">
             <a:spAutoFit/>
           </a:bodyPr>
           <a:lstStyle/>
@@ -15802,7 +15033,7 @@
           <a:noFill/>
         </p:spPr>
         <p:txBody>
-          <a:bodyPr wrap="square" lIns="0" tIns="0" rIns="0" bIns="0" anchor="t">
+          <a:bodyPr wrap="square" anchor="t" lIns="0" rIns="0" tIns="0" bIns="0">
             <a:spAutoFit/>
           </a:bodyPr>
           <a:lstStyle/>
@@ -15824,126 +15055,6 @@
           </a:p>
         </p:txBody>
       </p:sp>
-      <p:pic>
-        <p:nvPicPr>
-          <p:cNvPr id="24" name="Picture 23">
-            <a:extLst>
-              <a:ext uri="{FF2B5EF4-FFF2-40B4-BE49-F238E27FC236}">
-                <a16:creationId xmlns:a16="http://schemas.microsoft.com/office/drawing/2014/main" id="{F6CAC92A-62E8-2DAF-E7D7-A7430A4ACC72}"/>
-              </a:ext>
-            </a:extLst>
-          </p:cNvPr>
-          <p:cNvPicPr>
-            <a:picLocks noChangeAspect="1"/>
-          </p:cNvPicPr>
-          <p:nvPr/>
-        </p:nvPicPr>
-        <p:blipFill>
-          <a:blip r:embed="rId2"/>
-          <a:stretch>
-            <a:fillRect/>
-          </a:stretch>
-        </p:blipFill>
-        <p:spPr>
-          <a:xfrm>
-            <a:off x="761453" y="2360070"/>
-            <a:ext cx="820459" cy="625112"/>
-          </a:xfrm>
-          <a:prstGeom prst="rect">
-            <a:avLst/>
-          </a:prstGeom>
-        </p:spPr>
-      </p:pic>
-      <p:pic>
-        <p:nvPicPr>
-          <p:cNvPr id="26" name="Picture 25" descr="A red and orange gear with question marks&#10;&#10;AI-generated content may be incorrect.">
-            <a:extLst>
-              <a:ext uri="{FF2B5EF4-FFF2-40B4-BE49-F238E27FC236}">
-                <a16:creationId xmlns:a16="http://schemas.microsoft.com/office/drawing/2014/main" id="{87A017AC-BD8F-37FF-C262-20AF35700F0E}"/>
-              </a:ext>
-            </a:extLst>
-          </p:cNvPr>
-          <p:cNvPicPr>
-            <a:picLocks noChangeAspect="1"/>
-          </p:cNvPicPr>
-          <p:nvPr/>
-        </p:nvPicPr>
-        <p:blipFill>
-          <a:blip r:embed="rId3"/>
-          <a:stretch>
-            <a:fillRect/>
-          </a:stretch>
-        </p:blipFill>
-        <p:spPr>
-          <a:xfrm>
-            <a:off x="3505123" y="2377440"/>
-            <a:ext cx="768096" cy="585216"/>
-          </a:xfrm>
-          <a:prstGeom prst="rect">
-            <a:avLst/>
-          </a:prstGeom>
-        </p:spPr>
-      </p:pic>
-      <p:pic>
-        <p:nvPicPr>
-          <p:cNvPr id="28" name="Picture 27" descr="A colorful gears with lines and dots&#10;&#10;AI-generated content may be incorrect.">
-            <a:extLst>
-              <a:ext uri="{FF2B5EF4-FFF2-40B4-BE49-F238E27FC236}">
-                <a16:creationId xmlns:a16="http://schemas.microsoft.com/office/drawing/2014/main" id="{C3FFE758-D4E4-01E0-BFDC-77AB380A8661}"/>
-              </a:ext>
-            </a:extLst>
-          </p:cNvPr>
-          <p:cNvPicPr>
-            <a:picLocks noChangeAspect="1"/>
-          </p:cNvPicPr>
-          <p:nvPr/>
-        </p:nvPicPr>
-        <p:blipFill>
-          <a:blip r:embed="rId4"/>
-          <a:stretch>
-            <a:fillRect/>
-          </a:stretch>
-        </p:blipFill>
-        <p:spPr>
-          <a:xfrm>
-            <a:off x="6233005" y="2404871"/>
-            <a:ext cx="805103" cy="582221"/>
-          </a:xfrm>
-          <a:prstGeom prst="rect">
-            <a:avLst/>
-          </a:prstGeom>
-        </p:spPr>
-      </p:pic>
-      <p:pic>
-        <p:nvPicPr>
-          <p:cNvPr id="30" name="Picture 29" descr="A black scale with colorful crystals in it&#10;&#10;AI-generated content may be incorrect.">
-            <a:extLst>
-              <a:ext uri="{FF2B5EF4-FFF2-40B4-BE49-F238E27FC236}">
-                <a16:creationId xmlns:a16="http://schemas.microsoft.com/office/drawing/2014/main" id="{12AE7C3B-BB29-512A-AABA-09C1816FA571}"/>
-              </a:ext>
-            </a:extLst>
-          </p:cNvPr>
-          <p:cNvPicPr>
-            <a:picLocks noChangeAspect="1"/>
-          </p:cNvPicPr>
-          <p:nvPr/>
-        </p:nvPicPr>
-        <p:blipFill>
-          <a:blip r:embed="rId5"/>
-          <a:stretch>
-            <a:fillRect/>
-          </a:stretch>
-        </p:blipFill>
-        <p:spPr>
-          <a:xfrm>
-            <a:off x="8960891" y="2397575"/>
-            <a:ext cx="889692" cy="643393"/>
-          </a:xfrm>
-          <a:prstGeom prst="rect">
-            <a:avLst/>
-          </a:prstGeom>
-        </p:spPr>
-      </p:pic>
     </p:spTree>
   </p:cSld>
   <p:clrMapOvr>
@@ -15953,7 +15064,7 @@
 </file>
 
 <file path=ppt/slides/slide5.xml><?xml version="1.0" encoding="utf-8"?>
-<p:sld xmlns:a="http://schemas.openxmlformats.org/drawingml/2006/main" xmlns:r="http://schemas.openxmlformats.org/officeDocument/2006/relationships" xmlns:p="http://schemas.openxmlformats.org/presentationml/2006/main">
+<p:sld xmlns:a="http://schemas.openxmlformats.org/drawingml/2006/main" xmlns:p="http://schemas.openxmlformats.org/presentationml/2006/main" xmlns:r="http://schemas.openxmlformats.org/officeDocument/2006/relationships">
   <p:cSld>
     <p:bg>
       <p:bgPr>
@@ -15969,14 +15080,7 @@
         <p:cNvGrpSpPr/>
         <p:nvPr/>
       </p:nvGrpSpPr>
-      <p:grpSpPr>
-        <a:xfrm>
-          <a:off x="0" y="0"/>
-          <a:ext cx="0" cy="0"/>
-          <a:chOff x="0" y="0"/>
-          <a:chExt cx="0" cy="0"/>
-        </a:xfrm>
-      </p:grpSpPr>
+      <p:grpSpPr/>
       <p:sp>
         <p:nvSpPr>
           <p:cNvPr id="2" name="TextBox 1"/>
@@ -15994,7 +15098,7 @@
           <a:noFill/>
         </p:spPr>
         <p:txBody>
-          <a:bodyPr wrap="square" lIns="0" tIns="0" rIns="0" bIns="0" anchor="t">
+          <a:bodyPr wrap="square" anchor="t" lIns="0" rIns="0" tIns="0" bIns="0">
             <a:spAutoFit/>
           </a:bodyPr>
           <a:lstStyle/>
@@ -16033,7 +15137,7 @@
           <a:noFill/>
         </p:spPr>
         <p:txBody>
-          <a:bodyPr wrap="square" lIns="0" tIns="0" rIns="0" bIns="0" anchor="t">
+          <a:bodyPr wrap="square" anchor="t" lIns="0" rIns="0" tIns="0" bIns="0">
             <a:spAutoFit/>
           </a:bodyPr>
           <a:lstStyle/>
@@ -16072,7 +15176,7 @@
           <a:noFill/>
         </p:spPr>
         <p:txBody>
-          <a:bodyPr wrap="square" lIns="0" tIns="0" rIns="0" bIns="0" anchor="t">
+          <a:bodyPr wrap="square" anchor="t" lIns="0" rIns="0" tIns="0" bIns="0">
             <a:spAutoFit/>
           </a:bodyPr>
           <a:lstStyle/>
@@ -16111,7 +15215,7 @@
           <a:noFill/>
         </p:spPr>
         <p:txBody>
-          <a:bodyPr wrap="square" lIns="0" tIns="0" rIns="0" bIns="0" anchor="t">
+          <a:bodyPr wrap="square" anchor="t" lIns="0" rIns="0" tIns="0" bIns="0">
             <a:spAutoFit/>
           </a:bodyPr>
           <a:lstStyle/>
@@ -16178,7 +15282,6 @@
           <a:lstStyle/>
           <a:p>
             <a:pPr algn="ctr"/>
-            <a:endParaRPr/>
           </a:p>
         </p:txBody>
       </p:sp>
@@ -16199,7 +15302,7 @@
           <a:noFill/>
         </p:spPr>
         <p:txBody>
-          <a:bodyPr wrap="square" lIns="0" tIns="0" rIns="0" bIns="0" anchor="t">
+          <a:bodyPr wrap="square" anchor="t" lIns="0" rIns="0" tIns="0" bIns="0">
             <a:spAutoFit/>
           </a:bodyPr>
           <a:lstStyle/>
@@ -16238,7 +15341,7 @@
           <a:noFill/>
         </p:spPr>
         <p:txBody>
-          <a:bodyPr wrap="square" lIns="0" tIns="0" rIns="0" bIns="0" anchor="t">
+          <a:bodyPr wrap="square" anchor="t" lIns="0" rIns="0" tIns="0" bIns="0">
             <a:spAutoFit/>
           </a:bodyPr>
           <a:lstStyle/>
@@ -16305,7 +15408,6 @@
           <a:lstStyle/>
           <a:p>
             <a:pPr algn="ctr"/>
-            <a:endParaRPr/>
           </a:p>
         </p:txBody>
       </p:sp>
@@ -16326,7 +15428,7 @@
           <a:noFill/>
         </p:spPr>
         <p:txBody>
-          <a:bodyPr wrap="square" lIns="0" tIns="0" rIns="0" bIns="0" anchor="t">
+          <a:bodyPr wrap="square" anchor="t" lIns="0" rIns="0" tIns="0" bIns="0">
             <a:spAutoFit/>
           </a:bodyPr>
           <a:lstStyle/>
@@ -16365,7 +15467,7 @@
           <a:noFill/>
         </p:spPr>
         <p:txBody>
-          <a:bodyPr wrap="square" lIns="0" tIns="0" rIns="0" bIns="0" anchor="t">
+          <a:bodyPr wrap="square" anchor="t" lIns="0" rIns="0" tIns="0" bIns="0">
             <a:spAutoFit/>
           </a:bodyPr>
           <a:lstStyle/>
@@ -16432,7 +15534,6 @@
           <a:lstStyle/>
           <a:p>
             <a:pPr algn="ctr"/>
-            <a:endParaRPr/>
           </a:p>
         </p:txBody>
       </p:sp>
@@ -16453,7 +15554,7 @@
           <a:noFill/>
         </p:spPr>
         <p:txBody>
-          <a:bodyPr wrap="square" lIns="0" tIns="0" rIns="0" bIns="0" anchor="t">
+          <a:bodyPr wrap="square" anchor="t" lIns="0" rIns="0" tIns="0" bIns="0">
             <a:spAutoFit/>
           </a:bodyPr>
           <a:lstStyle/>
@@ -16492,7 +15593,7 @@
           <a:noFill/>
         </p:spPr>
         <p:txBody>
-          <a:bodyPr wrap="square" lIns="0" tIns="0" rIns="0" bIns="0" anchor="t">
+          <a:bodyPr wrap="square" anchor="t" lIns="0" rIns="0" tIns="0" bIns="0">
             <a:spAutoFit/>
           </a:bodyPr>
           <a:lstStyle/>
@@ -16559,7 +15660,6 @@
           <a:lstStyle/>
           <a:p>
             <a:pPr algn="ctr"/>
-            <a:endParaRPr/>
           </a:p>
         </p:txBody>
       </p:sp>
@@ -16580,7 +15680,7 @@
           <a:noFill/>
         </p:spPr>
         <p:txBody>
-          <a:bodyPr wrap="square" lIns="0" tIns="0" rIns="0" bIns="0" anchor="t">
+          <a:bodyPr wrap="square" anchor="t" lIns="0" rIns="0" tIns="0" bIns="0">
             <a:spAutoFit/>
           </a:bodyPr>
           <a:lstStyle/>
@@ -16619,7 +15719,7 @@
           <a:noFill/>
         </p:spPr>
         <p:txBody>
-          <a:bodyPr wrap="square" lIns="0" tIns="0" rIns="0" bIns="0" anchor="t">
+          <a:bodyPr wrap="square" anchor="t" lIns="0" rIns="0" tIns="0" bIns="0">
             <a:spAutoFit/>
           </a:bodyPr>
           <a:lstStyle/>
@@ -16650,15 +15750,15 @@
         <p:spPr>
           <a:xfrm>
             <a:off x="777240" y="5321808"/>
-            <a:ext cx="10058400" cy="201465"/>
-          </a:xfrm>
-          <a:prstGeom prst="rect">
-            <a:avLst/>
-          </a:prstGeom>
-          <a:noFill/>
-        </p:spPr>
-        <p:txBody>
-          <a:bodyPr wrap="square" lIns="0" tIns="0" rIns="0" bIns="0" anchor="t">
+            <a:ext cx="10058400" cy="365760"/>
+          </a:xfrm>
+          <a:prstGeom prst="rect">
+            <a:avLst/>
+          </a:prstGeom>
+          <a:noFill/>
+        </p:spPr>
+        <p:txBody>
+          <a:bodyPr wrap="square" anchor="t" lIns="0" rIns="0" tIns="0" bIns="0">
             <a:spAutoFit/>
           </a:bodyPr>
           <a:lstStyle/>
@@ -16675,19 +15775,7 @@
                 </a:solidFill>
                 <a:latin typeface="Arial"/>
               </a:rPr>
-              <a:t>The cost is not just time. </a:t>
-            </a:r>
-            <a:r>
-              <a:rPr sz="1350" b="0" i="1">
-                <a:solidFill>
-                  <a:srgbClr val="394150"/>
-                </a:solidFill>
-                <a:highlight>
-                  <a:srgbClr val="FFFF00"/>
-                </a:highlight>
-                <a:latin typeface="Arial"/>
-              </a:rPr>
-              <a:t>A slow queue slows every deal sitting behind it.</a:t>
+              <a:t>The cost is not just time. A slow queue slows every deal sitting behind it.</a:t>
             </a:r>
           </a:p>
         </p:txBody>
@@ -16701,7 +15789,7 @@
 </file>
 
 <file path=ppt/slides/slide6.xml><?xml version="1.0" encoding="utf-8"?>
-<p:sld xmlns:a="http://schemas.openxmlformats.org/drawingml/2006/main" xmlns:r="http://schemas.openxmlformats.org/officeDocument/2006/relationships" xmlns:p="http://schemas.openxmlformats.org/presentationml/2006/main">
+<p:sld xmlns:a="http://schemas.openxmlformats.org/drawingml/2006/main" xmlns:p="http://schemas.openxmlformats.org/presentationml/2006/main" xmlns:r="http://schemas.openxmlformats.org/officeDocument/2006/relationships">
   <p:cSld>
     <p:bg>
       <p:bgPr>
@@ -16717,14 +15805,7 @@
         <p:cNvGrpSpPr/>
         <p:nvPr/>
       </p:nvGrpSpPr>
-      <p:grpSpPr>
-        <a:xfrm>
-          <a:off x="0" y="0"/>
-          <a:ext cx="0" cy="0"/>
-          <a:chOff x="0" y="0"/>
-          <a:chExt cx="0" cy="0"/>
-        </a:xfrm>
-      </p:grpSpPr>
+      <p:grpSpPr/>
       <p:sp>
         <p:nvSpPr>
           <p:cNvPr id="2" name="TextBox 1"/>
@@ -16742,7 +15823,7 @@
           <a:noFill/>
         </p:spPr>
         <p:txBody>
-          <a:bodyPr wrap="square" lIns="0" tIns="0" rIns="0" bIns="0" anchor="t">
+          <a:bodyPr wrap="square" anchor="t" lIns="0" rIns="0" tIns="0" bIns="0">
             <a:spAutoFit/>
           </a:bodyPr>
           <a:lstStyle/>
@@ -16781,7 +15862,7 @@
           <a:noFill/>
         </p:spPr>
         <p:txBody>
-          <a:bodyPr wrap="square" lIns="0" tIns="0" rIns="0" bIns="0" anchor="t">
+          <a:bodyPr wrap="square" anchor="t" lIns="0" rIns="0" tIns="0" bIns="0">
             <a:spAutoFit/>
           </a:bodyPr>
           <a:lstStyle/>
@@ -16812,15 +15893,15 @@
         <p:spPr>
           <a:xfrm>
             <a:off x="777240" y="475488"/>
-            <a:ext cx="10607040" cy="298480"/>
-          </a:xfrm>
-          <a:prstGeom prst="rect">
-            <a:avLst/>
-          </a:prstGeom>
-          <a:noFill/>
-        </p:spPr>
-        <p:txBody>
-          <a:bodyPr wrap="square" lIns="0" tIns="0" rIns="0" bIns="0" anchor="t">
+            <a:ext cx="10607040" cy="320040"/>
+          </a:xfrm>
+          <a:prstGeom prst="rect">
+            <a:avLst/>
+          </a:prstGeom>
+          <a:noFill/>
+        </p:spPr>
+        <p:txBody>
+          <a:bodyPr wrap="square" anchor="t" lIns="0" rIns="0" tIns="0" bIns="0">
             <a:spAutoFit/>
           </a:bodyPr>
           <a:lstStyle/>
@@ -16831,13 +15912,10 @@
               </a:lnSpc>
             </a:pPr>
             <a:r>
-              <a:rPr sz="2000" b="1" i="0">
+              <a:rPr sz="1250" b="1" i="0">
                 <a:solidFill>
                   <a:srgbClr val="E14E12"/>
                 </a:solidFill>
-                <a:highlight>
-                  <a:srgbClr val="FFFF00"/>
-                </a:highlight>
                 <a:latin typeface="Arial"/>
               </a:rPr>
               <a:t>FIVE WHYS</a:t>
@@ -16862,7 +15940,7 @@
           <a:noFill/>
         </p:spPr>
         <p:txBody>
-          <a:bodyPr wrap="square" lIns="0" tIns="0" rIns="0" bIns="0" anchor="t">
+          <a:bodyPr wrap="square" anchor="t" lIns="0" rIns="0" tIns="0" bIns="0">
             <a:spAutoFit/>
           </a:bodyPr>
           <a:lstStyle/>
@@ -16921,7 +15999,7 @@
           </a:fontRef>
         </p:style>
         <p:txBody>
-          <a:bodyPr wrap="none" lIns="0" tIns="0" rIns="0" bIns="0" rtlCol="0" anchor="ctr"/>
+          <a:bodyPr rtlCol="0" anchor="ctr" wrap="none" lIns="0" rIns="0" tIns="0" bIns="0"/>
           <a:lstStyle/>
           <a:p>
             <a:pPr algn="ctr"/>
@@ -16954,7 +16032,7 @@
           <a:noFill/>
         </p:spPr>
         <p:txBody>
-          <a:bodyPr wrap="square" lIns="0" tIns="0" rIns="0" bIns="0" anchor="t">
+          <a:bodyPr wrap="square" anchor="t" lIns="0" rIns="0" tIns="0" bIns="0">
             <a:spAutoFit/>
           </a:bodyPr>
           <a:lstStyle/>
@@ -16993,7 +16071,7 @@
           <a:noFill/>
         </p:spPr>
         <p:txBody>
-          <a:bodyPr wrap="square" lIns="0" tIns="0" rIns="0" bIns="0" anchor="t">
+          <a:bodyPr wrap="square" anchor="t" lIns="0" rIns="0" tIns="0" bIns="0">
             <a:spAutoFit/>
           </a:bodyPr>
           <a:lstStyle/>
@@ -17032,7 +16110,7 @@
           <a:noFill/>
         </p:spPr>
         <p:txBody>
-          <a:bodyPr wrap="square" lIns="0" tIns="0" rIns="0" bIns="0" anchor="t">
+          <a:bodyPr wrap="square" anchor="t" lIns="0" rIns="0" tIns="0" bIns="0">
             <a:spAutoFit/>
           </a:bodyPr>
           <a:lstStyle/>
@@ -17091,7 +16169,7 @@
           </a:fontRef>
         </p:style>
         <p:txBody>
-          <a:bodyPr wrap="none" lIns="0" tIns="0" rIns="0" bIns="0" rtlCol="0" anchor="ctr"/>
+          <a:bodyPr rtlCol="0" anchor="ctr" wrap="none" lIns="0" rIns="0" tIns="0" bIns="0"/>
           <a:lstStyle/>
           <a:p>
             <a:pPr algn="ctr"/>
@@ -17124,7 +16202,7 @@
           <a:noFill/>
         </p:spPr>
         <p:txBody>
-          <a:bodyPr wrap="square" lIns="0" tIns="0" rIns="0" bIns="0" anchor="t">
+          <a:bodyPr wrap="square" anchor="t" lIns="0" rIns="0" tIns="0" bIns="0">
             <a:spAutoFit/>
           </a:bodyPr>
           <a:lstStyle/>
@@ -17163,7 +16241,7 @@
           <a:noFill/>
         </p:spPr>
         <p:txBody>
-          <a:bodyPr wrap="square" lIns="0" tIns="0" rIns="0" bIns="0" anchor="t">
+          <a:bodyPr wrap="square" anchor="t" lIns="0" rIns="0" tIns="0" bIns="0">
             <a:spAutoFit/>
           </a:bodyPr>
           <a:lstStyle/>
@@ -17202,7 +16280,7 @@
           <a:noFill/>
         </p:spPr>
         <p:txBody>
-          <a:bodyPr wrap="square" lIns="0" tIns="0" rIns="0" bIns="0" anchor="t">
+          <a:bodyPr wrap="square" anchor="t" lIns="0" rIns="0" tIns="0" bIns="0">
             <a:spAutoFit/>
           </a:bodyPr>
           <a:lstStyle/>
@@ -17261,7 +16339,7 @@
           </a:fontRef>
         </p:style>
         <p:txBody>
-          <a:bodyPr wrap="none" lIns="0" tIns="0" rIns="0" bIns="0" rtlCol="0" anchor="ctr"/>
+          <a:bodyPr rtlCol="0" anchor="ctr" wrap="none" lIns="0" rIns="0" tIns="0" bIns="0"/>
           <a:lstStyle/>
           <a:p>
             <a:pPr algn="ctr"/>
@@ -17294,7 +16372,7 @@
           <a:noFill/>
         </p:spPr>
         <p:txBody>
-          <a:bodyPr wrap="square" lIns="0" tIns="0" rIns="0" bIns="0" anchor="t">
+          <a:bodyPr wrap="square" anchor="t" lIns="0" rIns="0" tIns="0" bIns="0">
             <a:spAutoFit/>
           </a:bodyPr>
           <a:lstStyle/>
@@ -17333,7 +16411,7 @@
           <a:noFill/>
         </p:spPr>
         <p:txBody>
-          <a:bodyPr wrap="square" lIns="0" tIns="0" rIns="0" bIns="0" anchor="t">
+          <a:bodyPr wrap="square" anchor="t" lIns="0" rIns="0" tIns="0" bIns="0">
             <a:spAutoFit/>
           </a:bodyPr>
           <a:lstStyle/>
@@ -17372,7 +16450,7 @@
           <a:noFill/>
         </p:spPr>
         <p:txBody>
-          <a:bodyPr wrap="square" lIns="0" tIns="0" rIns="0" bIns="0" anchor="t">
+          <a:bodyPr wrap="square" anchor="t" lIns="0" rIns="0" tIns="0" bIns="0">
             <a:spAutoFit/>
           </a:bodyPr>
           <a:lstStyle/>
@@ -17431,7 +16509,7 @@
           </a:fontRef>
         </p:style>
         <p:txBody>
-          <a:bodyPr wrap="none" lIns="0" tIns="0" rIns="0" bIns="0" rtlCol="0" anchor="ctr"/>
+          <a:bodyPr rtlCol="0" anchor="ctr" wrap="none" lIns="0" rIns="0" tIns="0" bIns="0"/>
           <a:lstStyle/>
           <a:p>
             <a:pPr algn="ctr"/>
@@ -17464,7 +16542,7 @@
           <a:noFill/>
         </p:spPr>
         <p:txBody>
-          <a:bodyPr wrap="square" lIns="0" tIns="0" rIns="0" bIns="0" anchor="t">
+          <a:bodyPr wrap="square" anchor="t" lIns="0" rIns="0" tIns="0" bIns="0">
             <a:spAutoFit/>
           </a:bodyPr>
           <a:lstStyle/>
@@ -17503,7 +16581,7 @@
           <a:noFill/>
         </p:spPr>
         <p:txBody>
-          <a:bodyPr wrap="square" lIns="0" tIns="0" rIns="0" bIns="0" anchor="t">
+          <a:bodyPr wrap="square" anchor="t" lIns="0" rIns="0" tIns="0" bIns="0">
             <a:spAutoFit/>
           </a:bodyPr>
           <a:lstStyle/>
@@ -17542,7 +16620,7 @@
           <a:noFill/>
         </p:spPr>
         <p:txBody>
-          <a:bodyPr wrap="square" lIns="0" tIns="0" rIns="0" bIns="0" anchor="t">
+          <a:bodyPr wrap="square" anchor="t" lIns="0" rIns="0" tIns="0" bIns="0">
             <a:spAutoFit/>
           </a:bodyPr>
           <a:lstStyle/>
@@ -17601,7 +16679,7 @@
           </a:fontRef>
         </p:style>
         <p:txBody>
-          <a:bodyPr wrap="none" lIns="0" tIns="0" rIns="0" bIns="0" rtlCol="0" anchor="ctr"/>
+          <a:bodyPr rtlCol="0" anchor="ctr" wrap="none" lIns="0" rIns="0" tIns="0" bIns="0"/>
           <a:lstStyle/>
           <a:p>
             <a:pPr algn="ctr"/>
@@ -17634,7 +16712,7 @@
           <a:noFill/>
         </p:spPr>
         <p:txBody>
-          <a:bodyPr wrap="square" lIns="0" tIns="0" rIns="0" bIns="0" anchor="t">
+          <a:bodyPr wrap="square" anchor="t" lIns="0" rIns="0" tIns="0" bIns="0">
             <a:spAutoFit/>
           </a:bodyPr>
           <a:lstStyle/>
@@ -17673,7 +16751,7 @@
           <a:noFill/>
         </p:spPr>
         <p:txBody>
-          <a:bodyPr wrap="square" lIns="0" tIns="0" rIns="0" bIns="0" anchor="t">
+          <a:bodyPr wrap="square" anchor="t" lIns="0" rIns="0" tIns="0" bIns="0">
             <a:spAutoFit/>
           </a:bodyPr>
           <a:lstStyle/>
@@ -17712,7 +16790,7 @@
           <a:noFill/>
         </p:spPr>
         <p:txBody>
-          <a:bodyPr wrap="square" lIns="0" tIns="0" rIns="0" bIns="0" anchor="t">
+          <a:bodyPr wrap="square" anchor="t" lIns="0" rIns="0" tIns="0" bIns="0">
             <a:spAutoFit/>
           </a:bodyPr>
           <a:lstStyle/>
@@ -17777,7 +16855,6 @@
           <a:lstStyle/>
           <a:p>
             <a:pPr algn="ctr"/>
-            <a:endParaRPr/>
           </a:p>
         </p:txBody>
       </p:sp>
@@ -17798,7 +16875,7 @@
           <a:noFill/>
         </p:spPr>
         <p:txBody>
-          <a:bodyPr wrap="square" lIns="0" tIns="0" rIns="0" bIns="0" anchor="t">
+          <a:bodyPr wrap="square" anchor="t" lIns="0" rIns="0" tIns="0" bIns="0">
             <a:spAutoFit/>
           </a:bodyPr>
           <a:lstStyle/>
@@ -17837,7 +16914,7 @@
           <a:noFill/>
         </p:spPr>
         <p:txBody>
-          <a:bodyPr wrap="square" lIns="0" tIns="0" rIns="0" bIns="0" anchor="t">
+          <a:bodyPr wrap="square" anchor="t" lIns="0" rIns="0" tIns="0" bIns="0">
             <a:spAutoFit/>
           </a:bodyPr>
           <a:lstStyle/>
@@ -17868,7 +16945,7 @@
 </file>
 
 <file path=ppt/slides/slide7.xml><?xml version="1.0" encoding="utf-8"?>
-<p:sld xmlns:a="http://schemas.openxmlformats.org/drawingml/2006/main" xmlns:r="http://schemas.openxmlformats.org/officeDocument/2006/relationships" xmlns:p="http://schemas.openxmlformats.org/presentationml/2006/main">
+<p:sld xmlns:a="http://schemas.openxmlformats.org/drawingml/2006/main" xmlns:p="http://schemas.openxmlformats.org/presentationml/2006/main" xmlns:r="http://schemas.openxmlformats.org/officeDocument/2006/relationships">
   <p:cSld>
     <p:bg>
       <p:bgPr>
@@ -17884,14 +16961,7 @@
         <p:cNvGrpSpPr/>
         <p:nvPr/>
       </p:nvGrpSpPr>
-      <p:grpSpPr>
-        <a:xfrm>
-          <a:off x="0" y="0"/>
-          <a:ext cx="0" cy="0"/>
-          <a:chOff x="0" y="0"/>
-          <a:chExt cx="0" cy="0"/>
-        </a:xfrm>
-      </p:grpSpPr>
+      <p:grpSpPr/>
       <p:sp>
         <p:nvSpPr>
           <p:cNvPr id="2" name="TextBox 1"/>
@@ -17909,7 +16979,7 @@
           <a:noFill/>
         </p:spPr>
         <p:txBody>
-          <a:bodyPr wrap="square" lIns="0" tIns="0" rIns="0" bIns="0" anchor="t">
+          <a:bodyPr wrap="square" anchor="t" lIns="0" rIns="0" tIns="0" bIns="0">
             <a:spAutoFit/>
           </a:bodyPr>
           <a:lstStyle/>
@@ -17948,7 +17018,7 @@
           <a:noFill/>
         </p:spPr>
         <p:txBody>
-          <a:bodyPr wrap="square" lIns="0" tIns="0" rIns="0" bIns="0" anchor="t">
+          <a:bodyPr wrap="square" anchor="t" lIns="0" rIns="0" tIns="0" bIns="0">
             <a:spAutoFit/>
           </a:bodyPr>
           <a:lstStyle/>
@@ -17979,15 +17049,15 @@
         <p:spPr>
           <a:xfrm>
             <a:off x="777240" y="475488"/>
-            <a:ext cx="10607040" cy="298480"/>
-          </a:xfrm>
-          <a:prstGeom prst="rect">
-            <a:avLst/>
-          </a:prstGeom>
-          <a:noFill/>
-        </p:spPr>
-        <p:txBody>
-          <a:bodyPr wrap="square" lIns="0" tIns="0" rIns="0" bIns="0" anchor="t">
+            <a:ext cx="10607040" cy="320040"/>
+          </a:xfrm>
+          <a:prstGeom prst="rect">
+            <a:avLst/>
+          </a:prstGeom>
+          <a:noFill/>
+        </p:spPr>
+        <p:txBody>
+          <a:bodyPr wrap="square" anchor="t" lIns="0" rIns="0" tIns="0" bIns="0">
             <a:spAutoFit/>
           </a:bodyPr>
           <a:lstStyle/>
@@ -17998,13 +17068,10 @@
               </a:lnSpc>
             </a:pPr>
             <a:r>
-              <a:rPr sz="2000" b="1" i="0">
+              <a:rPr sz="1250" b="1" i="0">
                 <a:solidFill>
                   <a:srgbClr val="E14E12"/>
                 </a:solidFill>
-                <a:highlight>
-                  <a:srgbClr val="FFFF00"/>
-                </a:highlight>
                 <a:latin typeface="Arial"/>
               </a:rPr>
               <a:t>FIRST PRINCIPLES</a:t>
@@ -18021,15 +17088,15 @@
         <p:spPr>
           <a:xfrm>
             <a:off x="777240" y="841248"/>
-            <a:ext cx="10637215" cy="958789"/>
-          </a:xfrm>
-          <a:prstGeom prst="rect">
-            <a:avLst/>
-          </a:prstGeom>
-          <a:noFill/>
-        </p:spPr>
-        <p:txBody>
-          <a:bodyPr wrap="square" lIns="0" tIns="0" rIns="0" bIns="0" anchor="t">
+            <a:ext cx="10637215" cy="1097280"/>
+          </a:xfrm>
+          <a:prstGeom prst="rect">
+            <a:avLst/>
+          </a:prstGeom>
+          <a:noFill/>
+        </p:spPr>
+        <p:txBody>
+          <a:bodyPr wrap="square" anchor="t" lIns="0" rIns="0" tIns="0" bIns="0">
             <a:spAutoFit/>
           </a:bodyPr>
           <a:lstStyle/>
@@ -18046,28 +17113,7 @@
                 </a:solidFill>
                 <a:latin typeface="Arial"/>
               </a:rPr>
-              <a:t>Reframed: contract review is </a:t>
-            </a:r>
-            <a:r>
-              <a:rPr sz="3100" b="1" i="0">
-                <a:solidFill>
-                  <a:srgbClr val="15171C"/>
-                </a:solidFill>
-                <a:highlight>
-                  <a:srgbClr val="FFFF00"/>
-                </a:highlight>
-                <a:latin typeface="Arial"/>
-              </a:rPr>
-              <a:t>a risk gate</a:t>
-            </a:r>
-            <a:r>
-              <a:rPr sz="3100" b="1" i="0">
-                <a:solidFill>
-                  <a:srgbClr val="15171C"/>
-                </a:solidFill>
-                <a:latin typeface="Arial"/>
-              </a:rPr>
-              <a:t>, not a reading task.</a:t>
+              <a:t>Reframed: contract review is a risk gate, not a reading task.</a:t>
             </a:r>
           </a:p>
         </p:txBody>
@@ -18089,7 +17135,7 @@
           <a:noFill/>
         </p:spPr>
         <p:txBody>
-          <a:bodyPr wrap="square" lIns="0" tIns="0" rIns="0" bIns="0" anchor="t">
+          <a:bodyPr wrap="square" anchor="t" lIns="0" rIns="0" tIns="0" bIns="0">
             <a:spAutoFit/>
           </a:bodyPr>
           <a:lstStyle/>
@@ -18152,7 +17198,7 @@
           </a:fontRef>
         </p:style>
         <p:txBody>
-          <a:bodyPr wrap="square" lIns="9144" rIns="9144" rtlCol="0" anchor="ctr"/>
+          <a:bodyPr rtlCol="0" anchor="ctr" wrap="square" lIns="9144" rIns="9144"/>
           <a:lstStyle/>
           <a:p>
             <a:pPr algn="ctr"/>
@@ -18205,7 +17251,7 @@
           </a:fontRef>
         </p:style>
         <p:txBody>
-          <a:bodyPr wrap="none" lIns="0" tIns="0" rIns="0" bIns="0" rtlCol="0" anchor="ctr"/>
+          <a:bodyPr rtlCol="0" anchor="ctr" wrap="none" lIns="0" rIns="0" tIns="0" bIns="0"/>
           <a:lstStyle/>
           <a:p>
             <a:pPr algn="ctr"/>
@@ -18238,7 +17284,7 @@
           <a:noFill/>
         </p:spPr>
         <p:txBody>
-          <a:bodyPr wrap="square" lIns="0" tIns="0" rIns="0" bIns="0" anchor="t">
+          <a:bodyPr wrap="square" anchor="t" lIns="0" rIns="0" tIns="0" bIns="0">
             <a:spAutoFit/>
           </a:bodyPr>
           <a:lstStyle/>
@@ -18301,7 +17347,7 @@
           </a:fontRef>
         </p:style>
         <p:txBody>
-          <a:bodyPr wrap="square" lIns="9144" rIns="9144" rtlCol="0" anchor="ctr"/>
+          <a:bodyPr rtlCol="0" anchor="ctr" wrap="square" lIns="9144" rIns="9144"/>
           <a:lstStyle/>
           <a:p>
             <a:pPr algn="ctr"/>
@@ -18354,7 +17400,7 @@
           </a:fontRef>
         </p:style>
         <p:txBody>
-          <a:bodyPr wrap="none" lIns="0" tIns="0" rIns="0" bIns="0" rtlCol="0" anchor="ctr"/>
+          <a:bodyPr rtlCol="0" anchor="ctr" wrap="none" lIns="0" rIns="0" tIns="0" bIns="0"/>
           <a:lstStyle/>
           <a:p>
             <a:pPr algn="ctr"/>
@@ -18387,7 +17433,7 @@
           <a:noFill/>
         </p:spPr>
         <p:txBody>
-          <a:bodyPr wrap="square" lIns="0" tIns="0" rIns="0" bIns="0" anchor="t">
+          <a:bodyPr wrap="square" anchor="t" lIns="0" rIns="0" tIns="0" bIns="0">
             <a:spAutoFit/>
           </a:bodyPr>
           <a:lstStyle/>
@@ -18450,7 +17496,7 @@
           </a:fontRef>
         </p:style>
         <p:txBody>
-          <a:bodyPr wrap="square" lIns="9144" rIns="9144" rtlCol="0" anchor="ctr"/>
+          <a:bodyPr rtlCol="0" anchor="ctr" wrap="square" lIns="9144" rIns="9144"/>
           <a:lstStyle/>
           <a:p>
             <a:pPr algn="ctr"/>
@@ -18504,7 +17550,7 @@
           </a:fontRef>
         </p:style>
         <p:txBody>
-          <a:bodyPr wrap="none" lIns="0" tIns="0" rIns="0" bIns="0" rtlCol="0" anchor="ctr"/>
+          <a:bodyPr rtlCol="0" anchor="ctr" wrap="none" lIns="0" rIns="0" tIns="0" bIns="0"/>
           <a:lstStyle/>
           <a:p>
             <a:pPr algn="ctr"/>
@@ -18537,7 +17583,7 @@
           <a:noFill/>
         </p:spPr>
         <p:txBody>
-          <a:bodyPr wrap="square" lIns="0" tIns="0" rIns="0" bIns="0" anchor="t">
+          <a:bodyPr wrap="square" anchor="t" lIns="0" rIns="0" tIns="0" bIns="0">
             <a:spAutoFit/>
           </a:bodyPr>
           <a:lstStyle/>
@@ -18600,7 +17646,7 @@
           </a:fontRef>
         </p:style>
         <p:txBody>
-          <a:bodyPr wrap="square" lIns="9144" rIns="9144" rtlCol="0" anchor="ctr"/>
+          <a:bodyPr rtlCol="0" anchor="ctr" wrap="square" lIns="9144" rIns="9144"/>
           <a:lstStyle/>
           <a:p>
             <a:pPr algn="ctr"/>
@@ -18654,7 +17700,7 @@
           </a:fontRef>
         </p:style>
         <p:txBody>
-          <a:bodyPr wrap="none" lIns="0" tIns="0" rIns="0" bIns="0" rtlCol="0" anchor="ctr"/>
+          <a:bodyPr rtlCol="0" anchor="ctr" wrap="none" lIns="0" rIns="0" tIns="0" bIns="0"/>
           <a:lstStyle/>
           <a:p>
             <a:pPr algn="ctr"/>
@@ -18687,7 +17733,7 @@
           <a:noFill/>
         </p:spPr>
         <p:txBody>
-          <a:bodyPr wrap="square" lIns="0" tIns="0" rIns="0" bIns="0" anchor="t">
+          <a:bodyPr wrap="square" anchor="t" lIns="0" rIns="0" tIns="0" bIns="0">
             <a:spAutoFit/>
           </a:bodyPr>
           <a:lstStyle/>
@@ -18750,7 +17796,7 @@
           </a:fontRef>
         </p:style>
         <p:txBody>
-          <a:bodyPr wrap="square" lIns="9144" rIns="9144" rtlCol="0" anchor="ctr"/>
+          <a:bodyPr rtlCol="0" anchor="ctr" wrap="square" lIns="9144" rIns="9144"/>
           <a:lstStyle/>
           <a:p>
             <a:pPr algn="ctr"/>
@@ -18805,7 +17851,7 @@
           </a:fontRef>
         </p:style>
         <p:txBody>
-          <a:bodyPr wrap="none" lIns="0" tIns="0" rIns="0" bIns="0" rtlCol="0" anchor="ctr"/>
+          <a:bodyPr rtlCol="0" anchor="ctr" wrap="none" lIns="0" rIns="0" tIns="0" bIns="0"/>
           <a:lstStyle/>
           <a:p>
             <a:pPr algn="ctr"/>
@@ -18866,7 +17912,6 @@
           <a:lstStyle/>
           <a:p>
             <a:pPr algn="ctr"/>
-            <a:endParaRPr/>
           </a:p>
         </p:txBody>
       </p:sp>
@@ -18887,7 +17932,7 @@
           <a:noFill/>
         </p:spPr>
         <p:txBody>
-          <a:bodyPr wrap="square" lIns="0" tIns="0" rIns="0" bIns="0" anchor="t">
+          <a:bodyPr wrap="square" anchor="t" lIns="0" rIns="0" tIns="0" bIns="0">
             <a:spAutoFit/>
           </a:bodyPr>
           <a:lstStyle/>
@@ -18926,7 +17971,7 @@
           <a:noFill/>
         </p:spPr>
         <p:txBody>
-          <a:bodyPr wrap="square" lIns="0" tIns="0" rIns="0" bIns="0">
+          <a:bodyPr wrap="square" lIns="0" rIns="0" tIns="0" bIns="0">
             <a:spAutoFit/>
           </a:bodyPr>
           <a:lstStyle/>
@@ -18946,46 +17991,7 @@
                 </a:solidFill>
                 <a:latin typeface="Arial"/>
               </a:rPr>
-              <a:t>Only </a:t>
-            </a:r>
-            <a:r>
-              <a:rPr sz="1450" b="1">
-                <a:solidFill>
-                  <a:srgbClr val="15171C"/>
-                </a:solidFill>
-                <a:highlight>
-                  <a:srgbClr val="FFFF00"/>
-                </a:highlight>
-                <a:latin typeface="Arial"/>
-              </a:rPr>
-              <a:t>two</a:t>
-            </a:r>
-            <a:r>
-              <a:rPr sz="1450" b="1">
-                <a:solidFill>
-                  <a:srgbClr val="15171C"/>
-                </a:solidFill>
-                <a:latin typeface="Arial"/>
-              </a:rPr>
-              <a:t> of those five steps need legal judgement. The rest is </a:t>
-            </a:r>
-            <a:r>
-              <a:rPr sz="1450" b="1">
-                <a:solidFill>
-                  <a:srgbClr val="FF0000"/>
-                </a:solidFill>
-                <a:latin typeface="Arial"/>
-              </a:rPr>
-              <a:t>mechanical</a:t>
-            </a:r>
-            <a:r>
-              <a:rPr sz="1450" b="1">
-                <a:solidFill>
-                  <a:srgbClr val="15171C"/>
-                </a:solidFill>
-                <a:latin typeface="Arial"/>
-              </a:rPr>
-              <a:t>.</a:t>
+              <a:t>Only two of those five steps need legal judgement. The rest is mechanical.</a:t>
             </a:r>
           </a:p>
           <a:p>
@@ -19018,7 +18024,7 @@
 </file>
 
 <file path=ppt/slides/slide8.xml><?xml version="1.0" encoding="utf-8"?>
-<p:sld xmlns:a="http://schemas.openxmlformats.org/drawingml/2006/main" xmlns:r="http://schemas.openxmlformats.org/officeDocument/2006/relationships" xmlns:p="http://schemas.openxmlformats.org/presentationml/2006/main">
+<p:sld xmlns:a="http://schemas.openxmlformats.org/drawingml/2006/main" xmlns:p="http://schemas.openxmlformats.org/presentationml/2006/main" xmlns:r="http://schemas.openxmlformats.org/officeDocument/2006/relationships">
   <p:cSld>
     <p:bg>
       <p:bgPr>
@@ -19034,14 +18040,7 @@
         <p:cNvGrpSpPr/>
         <p:nvPr/>
       </p:nvGrpSpPr>
-      <p:grpSpPr>
-        <a:xfrm>
-          <a:off x="0" y="0"/>
-          <a:ext cx="0" cy="0"/>
-          <a:chOff x="0" y="0"/>
-          <a:chExt cx="0" cy="0"/>
-        </a:xfrm>
-      </p:grpSpPr>
+      <p:grpSpPr/>
       <p:sp>
         <p:nvSpPr>
           <p:cNvPr id="2" name="TextBox 1"/>
@@ -19059,7 +18058,7 @@
           <a:noFill/>
         </p:spPr>
         <p:txBody>
-          <a:bodyPr wrap="square" lIns="0" tIns="0" rIns="0" bIns="0" anchor="t">
+          <a:bodyPr wrap="square" anchor="t" lIns="0" rIns="0" tIns="0" bIns="0">
             <a:spAutoFit/>
           </a:bodyPr>
           <a:lstStyle/>
@@ -19098,7 +18097,7 @@
           <a:noFill/>
         </p:spPr>
         <p:txBody>
-          <a:bodyPr wrap="square" lIns="0" tIns="0" rIns="0" bIns="0" anchor="t">
+          <a:bodyPr wrap="square" anchor="t" lIns="0" rIns="0" tIns="0" bIns="0">
             <a:spAutoFit/>
           </a:bodyPr>
           <a:lstStyle/>
@@ -19129,15 +18128,15 @@
         <p:spPr>
           <a:xfrm>
             <a:off x="777240" y="475488"/>
-            <a:ext cx="10607040" cy="298480"/>
-          </a:xfrm>
-          <a:prstGeom prst="rect">
-            <a:avLst/>
-          </a:prstGeom>
-          <a:noFill/>
-        </p:spPr>
-        <p:txBody>
-          <a:bodyPr wrap="square" lIns="0" tIns="0" rIns="0" bIns="0" anchor="t">
+            <a:ext cx="10607040" cy="320040"/>
+          </a:xfrm>
+          <a:prstGeom prst="rect">
+            <a:avLst/>
+          </a:prstGeom>
+          <a:noFill/>
+        </p:spPr>
+        <p:txBody>
+          <a:bodyPr wrap="square" anchor="t" lIns="0" rIns="0" tIns="0" bIns="0">
             <a:spAutoFit/>
           </a:bodyPr>
           <a:lstStyle/>
@@ -19148,13 +18147,10 @@
               </a:lnSpc>
             </a:pPr>
             <a:r>
-              <a:rPr sz="2000" b="1" i="0">
+              <a:rPr sz="1250" b="1" i="0">
                 <a:solidFill>
                   <a:srgbClr val="E14E12"/>
                 </a:solidFill>
-                <a:highlight>
-                  <a:srgbClr val="FFFF00"/>
-                </a:highlight>
                 <a:latin typeface="Arial"/>
               </a:rPr>
               <a:t>SYSTEMS THINKING</a:t>
@@ -19179,7 +18175,7 @@
           <a:noFill/>
         </p:spPr>
         <p:txBody>
-          <a:bodyPr wrap="square" lIns="0" tIns="0" rIns="0" bIns="0" anchor="t">
+          <a:bodyPr wrap="square" anchor="t" lIns="0" rIns="0" tIns="0" bIns="0">
             <a:spAutoFit/>
           </a:bodyPr>
           <a:lstStyle/>
@@ -19218,7 +18214,7 @@
           <a:noFill/>
         </p:spPr>
         <p:txBody>
-          <a:bodyPr wrap="square" lIns="0" tIns="0" rIns="0" bIns="0" anchor="t">
+          <a:bodyPr wrap="square" anchor="t" lIns="0" rIns="0" tIns="0" bIns="0">
             <a:spAutoFit/>
           </a:bodyPr>
           <a:lstStyle/>
@@ -19281,7 +18277,7 @@
           </a:fontRef>
         </p:style>
         <p:txBody>
-          <a:bodyPr wrap="square" lIns="9144" rIns="9144" rtlCol="0" anchor="ctr"/>
+          <a:bodyPr rtlCol="0" anchor="ctr" wrap="square" lIns="9144" rIns="9144"/>
           <a:lstStyle/>
           <a:p>
             <a:pPr algn="ctr"/>
@@ -19338,7 +18334,7 @@
           </a:fontRef>
         </p:style>
         <p:txBody>
-          <a:bodyPr wrap="square" lIns="9144" rIns="9144" rtlCol="0" anchor="ctr"/>
+          <a:bodyPr rtlCol="0" anchor="ctr" wrap="square" lIns="9144" rIns="9144"/>
           <a:lstStyle/>
           <a:p>
             <a:pPr algn="ctr"/>
@@ -19395,7 +18391,7 @@
           </a:fontRef>
         </p:style>
         <p:txBody>
-          <a:bodyPr wrap="square" lIns="9144" rIns="9144" rtlCol="0" anchor="ctr"/>
+          <a:bodyPr rtlCol="0" anchor="ctr" wrap="square" lIns="9144" rIns="9144"/>
           <a:lstStyle/>
           <a:p>
             <a:pPr algn="ctr"/>
@@ -19452,7 +18448,7 @@
           </a:fontRef>
         </p:style>
         <p:txBody>
-          <a:bodyPr wrap="square" lIns="9144" rIns="9144" rtlCol="0" anchor="ctr"/>
+          <a:bodyPr rtlCol="0" anchor="ctr" wrap="square" lIns="9144" rIns="9144"/>
           <a:lstStyle/>
           <a:p>
             <a:pPr algn="ctr"/>
@@ -19485,7 +18481,7 @@
           <a:noFill/>
         </p:spPr>
         <p:txBody>
-          <a:bodyPr wrap="square" lIns="0" tIns="0" rIns="0" bIns="0" anchor="t">
+          <a:bodyPr wrap="square" anchor="t" lIns="0" rIns="0" tIns="0" bIns="0">
             <a:spAutoFit/>
           </a:bodyPr>
           <a:lstStyle/>
@@ -19546,7 +18542,7 @@
           </a:fontRef>
         </p:style>
         <p:txBody>
-          <a:bodyPr wrap="square" lIns="9144" rIns="9144" rtlCol="0" anchor="ctr"/>
+          <a:bodyPr rtlCol="0" anchor="ctr" wrap="square" lIns="9144" rIns="9144"/>
           <a:lstStyle/>
           <a:p>
             <a:pPr algn="ctr"/>
@@ -19579,7 +18575,7 @@
           <a:noFill/>
         </p:spPr>
         <p:txBody>
-          <a:bodyPr wrap="square" lIns="0" tIns="0" rIns="0" bIns="0" anchor="t">
+          <a:bodyPr wrap="square" anchor="t" lIns="0" rIns="0" tIns="0" bIns="0">
             <a:spAutoFit/>
           </a:bodyPr>
           <a:lstStyle/>
@@ -19618,7 +18614,7 @@
           <a:noFill/>
         </p:spPr>
         <p:txBody>
-          <a:bodyPr wrap="square" lIns="0" tIns="0" rIns="0" bIns="0" anchor="t">
+          <a:bodyPr wrap="square" anchor="t" lIns="0" rIns="0" tIns="0" bIns="0">
             <a:spAutoFit/>
           </a:bodyPr>
           <a:lstStyle/>
@@ -19681,7 +18677,7 @@
           </a:fontRef>
         </p:style>
         <p:txBody>
-          <a:bodyPr wrap="square" lIns="9144" rIns="9144" rtlCol="0" anchor="ctr"/>
+          <a:bodyPr rtlCol="0" anchor="ctr" wrap="square" lIns="9144" rIns="9144"/>
           <a:lstStyle/>
           <a:p>
             <a:pPr algn="ctr"/>
@@ -19714,7 +18710,7 @@
           <a:noFill/>
         </p:spPr>
         <p:txBody>
-          <a:bodyPr wrap="square" lIns="0" tIns="0" rIns="0" bIns="0" anchor="t">
+          <a:bodyPr wrap="square" anchor="t" lIns="0" rIns="0" tIns="0" bIns="0">
             <a:spAutoFit/>
           </a:bodyPr>
           <a:lstStyle/>
@@ -19775,7 +18771,7 @@
           </a:fontRef>
         </p:style>
         <p:txBody>
-          <a:bodyPr wrap="square" lIns="9144" rIns="9144" rtlCol="0" anchor="ctr"/>
+          <a:bodyPr rtlCol="0" anchor="ctr" wrap="square" lIns="9144" rIns="9144"/>
           <a:lstStyle/>
           <a:p>
             <a:pPr algn="ctr"/>
@@ -19830,7 +18826,7 @@
           </a:fontRef>
         </p:style>
         <p:txBody>
-          <a:bodyPr wrap="square" lIns="0" tIns="0" rIns="0" bIns="0" rtlCol="0" anchor="ctr"/>
+          <a:bodyPr rtlCol="0" anchor="ctr" wrap="square" lIns="0" rIns="0" tIns="0" bIns="0"/>
           <a:lstStyle/>
           <a:p>
             <a:pPr algn="ctr"/>
@@ -19885,7 +18881,7 @@
           </a:fontRef>
         </p:style>
         <p:txBody>
-          <a:bodyPr wrap="square" lIns="0" tIns="0" rIns="0" bIns="0" rtlCol="0" anchor="ctr"/>
+          <a:bodyPr rtlCol="0" anchor="ctr" wrap="square" lIns="0" rIns="0" tIns="0" bIns="0"/>
           <a:lstStyle/>
           <a:p>
             <a:pPr algn="ctr"/>
@@ -19940,7 +18936,7 @@
           </a:fontRef>
         </p:style>
         <p:txBody>
-          <a:bodyPr wrap="square" lIns="0" tIns="0" rIns="0" bIns="0" rtlCol="0" anchor="ctr"/>
+          <a:bodyPr rtlCol="0" anchor="ctr" wrap="square" lIns="0" rIns="0" tIns="0" bIns="0"/>
           <a:lstStyle/>
           <a:p>
             <a:pPr algn="ctr"/>
@@ -20001,7 +18997,6 @@
           <a:lstStyle/>
           <a:p>
             <a:pPr algn="ctr"/>
-            <a:endParaRPr/>
           </a:p>
         </p:txBody>
       </p:sp>
@@ -20022,7 +19017,7 @@
           <a:noFill/>
         </p:spPr>
         <p:txBody>
-          <a:bodyPr wrap="square" lIns="0" tIns="0" rIns="0" bIns="0" anchor="t">
+          <a:bodyPr wrap="square" anchor="t" lIns="0" rIns="0" tIns="0" bIns="0">
             <a:spAutoFit/>
           </a:bodyPr>
           <a:lstStyle/>
@@ -20061,7 +19056,7 @@
           <a:noFill/>
         </p:spPr>
         <p:txBody>
-          <a:bodyPr wrap="square" lIns="0" tIns="0" rIns="0" bIns="0" anchor="t">
+          <a:bodyPr wrap="square" anchor="t" lIns="0" rIns="0" tIns="0" bIns="0">
             <a:spAutoFit/>
           </a:bodyPr>
           <a:lstStyle/>
@@ -20100,7 +19095,7 @@
           <a:noFill/>
         </p:spPr>
         <p:txBody>
-          <a:bodyPr wrap="square" lIns="0" tIns="0" rIns="0" bIns="0" anchor="t">
+          <a:bodyPr wrap="square" anchor="t" lIns="0" rIns="0" tIns="0" bIns="0">
             <a:spAutoFit/>
           </a:bodyPr>
           <a:lstStyle/>
@@ -20131,7 +19126,7 @@
 </file>
 
 <file path=ppt/slides/slide9.xml><?xml version="1.0" encoding="utf-8"?>
-<p:sld xmlns:a="http://schemas.openxmlformats.org/drawingml/2006/main" xmlns:r="http://schemas.openxmlformats.org/officeDocument/2006/relationships" xmlns:p="http://schemas.openxmlformats.org/presentationml/2006/main">
+<p:sld xmlns:a="http://schemas.openxmlformats.org/drawingml/2006/main" xmlns:p="http://schemas.openxmlformats.org/presentationml/2006/main" xmlns:r="http://schemas.openxmlformats.org/officeDocument/2006/relationships">
   <p:cSld>
     <p:bg>
       <p:bgPr>
@@ -20147,14 +19142,7 @@
         <p:cNvGrpSpPr/>
         <p:nvPr/>
       </p:nvGrpSpPr>
-      <p:grpSpPr>
-        <a:xfrm>
-          <a:off x="0" y="0"/>
-          <a:ext cx="0" cy="0"/>
-          <a:chOff x="0" y="0"/>
-          <a:chExt cx="0" cy="0"/>
-        </a:xfrm>
-      </p:grpSpPr>
+      <p:grpSpPr/>
       <p:sp>
         <p:nvSpPr>
           <p:cNvPr id="2" name="TextBox 1"/>
@@ -20172,7 +19160,7 @@
           <a:noFill/>
         </p:spPr>
         <p:txBody>
-          <a:bodyPr wrap="square" lIns="0" tIns="0" rIns="0" bIns="0" anchor="t">
+          <a:bodyPr wrap="square" anchor="t" lIns="0" rIns="0" tIns="0" bIns="0">
             <a:spAutoFit/>
           </a:bodyPr>
           <a:lstStyle/>
@@ -20211,7 +19199,7 @@
           <a:noFill/>
         </p:spPr>
         <p:txBody>
-          <a:bodyPr wrap="square" lIns="0" tIns="0" rIns="0" bIns="0" anchor="t">
+          <a:bodyPr wrap="square" anchor="t" lIns="0" rIns="0" tIns="0" bIns="0">
             <a:spAutoFit/>
           </a:bodyPr>
           <a:lstStyle/>
@@ -20250,7 +19238,7 @@
           <a:noFill/>
         </p:spPr>
         <p:txBody>
-          <a:bodyPr wrap="square" lIns="0" tIns="0" rIns="0" bIns="0" anchor="t">
+          <a:bodyPr wrap="square" anchor="t" lIns="0" rIns="0" tIns="0" bIns="0">
             <a:spAutoFit/>
           </a:bodyPr>
           <a:lstStyle/>
@@ -20289,7 +19277,7 @@
           <a:noFill/>
         </p:spPr>
         <p:txBody>
-          <a:bodyPr wrap="square" lIns="0" tIns="0" rIns="0" bIns="0" anchor="t">
+          <a:bodyPr wrap="square" anchor="t" lIns="0" rIns="0" tIns="0" bIns="0">
             <a:spAutoFit/>
           </a:bodyPr>
           <a:lstStyle/>
@@ -20328,7 +19316,7 @@
           <a:noFill/>
         </p:spPr>
         <p:txBody>
-          <a:bodyPr wrap="square" lIns="0" tIns="0" rIns="0" bIns="0" anchor="t">
+          <a:bodyPr wrap="square" anchor="t" lIns="0" rIns="0" tIns="0" bIns="0">
             <a:spAutoFit/>
           </a:bodyPr>
           <a:lstStyle/>
@@ -20367,7 +19355,7 @@
           <a:noFill/>
         </p:spPr>
         <p:txBody>
-          <a:bodyPr wrap="square" lIns="0" tIns="0" rIns="0" bIns="0" anchor="ctr">
+          <a:bodyPr wrap="square" anchor="ctr" lIns="0" rIns="0" tIns="0" bIns="0">
             <a:spAutoFit/>
           </a:bodyPr>
           <a:lstStyle/>
@@ -20398,15 +19386,15 @@
         <p:spPr>
           <a:xfrm>
             <a:off x="3319272" y="2286000"/>
-            <a:ext cx="4892040" cy="406073"/>
-          </a:xfrm>
-          <a:prstGeom prst="rect">
-            <a:avLst/>
-          </a:prstGeom>
-          <a:noFill/>
-        </p:spPr>
-        <p:txBody>
-          <a:bodyPr wrap="square" lIns="0" tIns="0" rIns="0" bIns="0">
+            <a:ext cx="4892040" cy="603504"/>
+          </a:xfrm>
+          <a:prstGeom prst="rect">
+            <a:avLst/>
+          </a:prstGeom>
+          <a:noFill/>
+        </p:spPr>
+        <p:txBody>
+          <a:bodyPr wrap="square" lIns="0" rIns="0" tIns="0" bIns="0">
             <a:spAutoFit/>
           </a:bodyPr>
           <a:lstStyle/>
@@ -20445,28 +19433,7 @@
                 </a:solidFill>
                 <a:latin typeface="Arial"/>
               </a:rPr>
-              <a:t>Auto-ingest and extract. This is </a:t>
-            </a:r>
-            <a:r>
-              <a:rPr sz="1150" b="1">
-                <a:solidFill>
-                  <a:srgbClr val="394150"/>
-                </a:solidFill>
-                <a:highlight>
-                  <a:srgbClr val="FFFF00"/>
-                </a:highlight>
-                <a:latin typeface="Arial"/>
-              </a:rPr>
-              <a:t>n8n / RPA territory</a:t>
-            </a:r>
-            <a:r>
-              <a:rPr sz="1150" b="1">
-                <a:solidFill>
-                  <a:srgbClr val="394150"/>
-                </a:solidFill>
-                <a:latin typeface="Arial"/>
-              </a:rPr>
-              <a:t>.</a:t>
+              <a:t>Auto-ingest and extract. This is n8n / RPA territory.</a:t>
             </a:r>
           </a:p>
         </p:txBody>
@@ -20510,7 +19477,7 @@
           </a:fontRef>
         </p:style>
         <p:txBody>
-          <a:bodyPr wrap="square" lIns="0" tIns="0" rIns="0" bIns="0" rtlCol="0" anchor="ctr"/>
+          <a:bodyPr rtlCol="0" anchor="ctr" wrap="square" lIns="0" rIns="0" tIns="0" bIns="0"/>
           <a:lstStyle/>
           <a:p>
             <a:pPr algn="ctr"/>
@@ -20543,7 +19510,7 @@
           <a:noFill/>
         </p:spPr>
         <p:txBody>
-          <a:bodyPr wrap="square" lIns="0" tIns="0" rIns="0" bIns="0" anchor="ctr">
+          <a:bodyPr wrap="square" anchor="ctr" lIns="0" rIns="0" tIns="0" bIns="0">
             <a:spAutoFit/>
           </a:bodyPr>
           <a:lstStyle/>
@@ -20574,15 +19541,15 @@
         <p:spPr>
           <a:xfrm>
             <a:off x="3319272" y="2926080"/>
-            <a:ext cx="4892040" cy="406073"/>
-          </a:xfrm>
-          <a:prstGeom prst="rect">
-            <a:avLst/>
-          </a:prstGeom>
-          <a:noFill/>
-        </p:spPr>
-        <p:txBody>
-          <a:bodyPr wrap="square" lIns="0" tIns="0" rIns="0" bIns="0">
+            <a:ext cx="4892040" cy="603504"/>
+          </a:xfrm>
+          <a:prstGeom prst="rect">
+            <a:avLst/>
+          </a:prstGeom>
+          <a:noFill/>
+        </p:spPr>
+        <p:txBody>
+          <a:bodyPr wrap="square" lIns="0" rIns="0" tIns="0" bIns="0">
             <a:spAutoFit/>
           </a:bodyPr>
           <a:lstStyle/>
@@ -20621,28 +19588,7 @@
                 </a:solidFill>
                 <a:latin typeface="Arial"/>
               </a:rPr>
-              <a:t>The </a:t>
-            </a:r>
-            <a:r>
-              <a:rPr sz="1150" b="1">
-                <a:solidFill>
-                  <a:srgbClr val="394150"/>
-                </a:solidFill>
-                <a:highlight>
-                  <a:srgbClr val="FFFF00"/>
-                </a:highlight>
-                <a:latin typeface="Arial"/>
-              </a:rPr>
-              <a:t>model</a:t>
-            </a:r>
-            <a:r>
-              <a:rPr sz="1150" b="1">
-                <a:solidFill>
-                  <a:srgbClr val="394150"/>
-                </a:solidFill>
-                <a:latin typeface="Arial"/>
-              </a:rPr>
-              <a:t> reads and understands the document.</a:t>
+              <a:t>The model reads and understands the document.</a:t>
             </a:r>
           </a:p>
         </p:txBody>
@@ -20686,7 +19632,7 @@
           </a:fontRef>
         </p:style>
         <p:txBody>
-          <a:bodyPr wrap="square" lIns="0" tIns="0" rIns="0" bIns="0" rtlCol="0" anchor="ctr"/>
+          <a:bodyPr rtlCol="0" anchor="ctr" wrap="square" lIns="0" rIns="0" tIns="0" bIns="0"/>
           <a:lstStyle/>
           <a:p>
             <a:pPr algn="ctr"/>
@@ -20719,7 +19665,7 @@
           <a:noFill/>
         </p:spPr>
         <p:txBody>
-          <a:bodyPr wrap="square" lIns="0" tIns="0" rIns="0" bIns="0" anchor="ctr">
+          <a:bodyPr wrap="square" anchor="ctr" lIns="0" rIns="0" tIns="0" bIns="0">
             <a:spAutoFit/>
           </a:bodyPr>
           <a:lstStyle/>
@@ -20750,15 +19696,15 @@
         <p:spPr>
           <a:xfrm>
             <a:off x="3319272" y="3566160"/>
-            <a:ext cx="4892040" cy="406073"/>
-          </a:xfrm>
-          <a:prstGeom prst="rect">
-            <a:avLst/>
-          </a:prstGeom>
-          <a:noFill/>
-        </p:spPr>
-        <p:txBody>
-          <a:bodyPr wrap="square" lIns="0" tIns="0" rIns="0" bIns="0">
+            <a:ext cx="4892040" cy="603504"/>
+          </a:xfrm>
+          <a:prstGeom prst="rect">
+            <a:avLst/>
+          </a:prstGeom>
+          <a:noFill/>
+        </p:spPr>
+        <p:txBody>
+          <a:bodyPr wrap="square" lIns="0" rIns="0" tIns="0" bIns="0">
             <a:spAutoFit/>
           </a:bodyPr>
           <a:lstStyle/>
@@ -20795,21 +19741,9 @@
                 <a:solidFill>
                   <a:srgbClr val="394150"/>
                 </a:solidFill>
-                <a:highlight>
-                  <a:srgbClr val="FFFF00"/>
-                </a:highlight>
-                <a:latin typeface="Arial"/>
-              </a:rPr>
-              <a:t>Retrieve</a:t>
-            </a:r>
-            <a:r>
-              <a:rPr sz="1150" b="1">
-                <a:solidFill>
-                  <a:srgbClr val="394150"/>
-                </a:solidFill>
-                <a:latin typeface="Arial"/>
-              </a:rPr>
-              <a:t> the position, match the clause by meaning.</a:t>
+                <a:latin typeface="Arial"/>
+              </a:rPr>
+              <a:t>Retrieve the position, match the clause by meaning.</a:t>
             </a:r>
           </a:p>
         </p:txBody>
@@ -20853,7 +19787,7 @@
           </a:fontRef>
         </p:style>
         <p:txBody>
-          <a:bodyPr wrap="square" lIns="0" tIns="0" rIns="0" bIns="0" rtlCol="0" anchor="ctr"/>
+          <a:bodyPr rtlCol="0" anchor="ctr" wrap="square" lIns="0" rIns="0" tIns="0" bIns="0"/>
           <a:lstStyle/>
           <a:p>
             <a:pPr algn="ctr"/>
@@ -20886,7 +19820,7 @@
           <a:noFill/>
         </p:spPr>
         <p:txBody>
-          <a:bodyPr wrap="square" lIns="0" tIns="0" rIns="0" bIns="0" anchor="ctr">
+          <a:bodyPr wrap="square" anchor="ctr" lIns="0" rIns="0" tIns="0" bIns="0">
             <a:spAutoFit/>
           </a:bodyPr>
           <a:lstStyle/>
@@ -20917,15 +19851,15 @@
         <p:spPr>
           <a:xfrm>
             <a:off x="3319272" y="4206240"/>
-            <a:ext cx="4892040" cy="406073"/>
-          </a:xfrm>
-          <a:prstGeom prst="rect">
-            <a:avLst/>
-          </a:prstGeom>
-          <a:noFill/>
-        </p:spPr>
-        <p:txBody>
-          <a:bodyPr wrap="square" lIns="0" tIns="0" rIns="0" bIns="0">
+            <a:ext cx="4892040" cy="603504"/>
+          </a:xfrm>
+          <a:prstGeom prst="rect">
+            <a:avLst/>
+          </a:prstGeom>
+          <a:noFill/>
+        </p:spPr>
+        <p:txBody>
+          <a:bodyPr wrap="square" lIns="0" rIns="0" tIns="0" bIns="0">
             <a:spAutoFit/>
           </a:bodyPr>
           <a:lstStyle/>
@@ -20964,28 +19898,7 @@
                 </a:solidFill>
                 <a:latin typeface="Arial"/>
               </a:rPr>
-              <a:t>Rules for hard flags, the </a:t>
-            </a:r>
-            <a:r>
-              <a:rPr sz="1150" b="1">
-                <a:solidFill>
-                  <a:srgbClr val="394150"/>
-                </a:solidFill>
-                <a:highlight>
-                  <a:srgbClr val="FFFF00"/>
-                </a:highlight>
-                <a:latin typeface="Arial"/>
-              </a:rPr>
-              <a:t>agent</a:t>
-            </a:r>
-            <a:r>
-              <a:rPr sz="1150" b="1">
-                <a:solidFill>
-                  <a:srgbClr val="394150"/>
-                </a:solidFill>
-                <a:latin typeface="Arial"/>
-              </a:rPr>
-              <a:t> for paraphrase and novelty.</a:t>
+              <a:t>Rules for hard flags, the agent for paraphrase and novelty.</a:t>
             </a:r>
           </a:p>
         </p:txBody>
@@ -21029,7 +19942,7 @@
           </a:fontRef>
         </p:style>
         <p:txBody>
-          <a:bodyPr wrap="square" lIns="0" tIns="0" rIns="0" bIns="0" rtlCol="0" anchor="ctr"/>
+          <a:bodyPr rtlCol="0" anchor="ctr" wrap="square" lIns="0" rIns="0" tIns="0" bIns="0"/>
           <a:lstStyle/>
           <a:p>
             <a:pPr algn="ctr"/>
@@ -21062,7 +19975,7 @@
           <a:noFill/>
         </p:spPr>
         <p:txBody>
-          <a:bodyPr wrap="square" lIns="0" tIns="0" rIns="0" bIns="0" anchor="ctr">
+          <a:bodyPr wrap="square" anchor="ctr" lIns="0" rIns="0" tIns="0" bIns="0">
             <a:spAutoFit/>
           </a:bodyPr>
           <a:lstStyle/>
@@ -21093,15 +20006,15 @@
         <p:spPr>
           <a:xfrm>
             <a:off x="3319272" y="4846320"/>
-            <a:ext cx="4892040" cy="406073"/>
-          </a:xfrm>
-          <a:prstGeom prst="rect">
-            <a:avLst/>
-          </a:prstGeom>
-          <a:noFill/>
-        </p:spPr>
-        <p:txBody>
-          <a:bodyPr wrap="square" lIns="0" tIns="0" rIns="0" bIns="0">
+            <a:ext cx="4892040" cy="603504"/>
+          </a:xfrm>
+          <a:prstGeom prst="rect">
+            <a:avLst/>
+          </a:prstGeom>
+          <a:noFill/>
+        </p:spPr>
+        <p:txBody>
+          <a:bodyPr wrap="square" lIns="0" rIns="0" tIns="0" bIns="0">
             <a:spAutoFit/>
           </a:bodyPr>
           <a:lstStyle/>
@@ -21140,28 +20053,7 @@
                 </a:solidFill>
                 <a:latin typeface="Arial"/>
               </a:rPr>
-              <a:t>Draft from the </a:t>
-            </a:r>
-            <a:r>
-              <a:rPr sz="1150" b="1">
-                <a:solidFill>
-                  <a:srgbClr val="394150"/>
-                </a:solidFill>
-                <a:highlight>
-                  <a:srgbClr val="FFFF00"/>
-                </a:highlight>
-                <a:latin typeface="Arial"/>
-              </a:rPr>
-              <a:t>playbook</a:t>
-            </a:r>
-            <a:r>
-              <a:rPr sz="1150" b="1">
-                <a:solidFill>
-                  <a:srgbClr val="394150"/>
-                </a:solidFill>
-                <a:latin typeface="Arial"/>
-              </a:rPr>
-              <a:t>, score GREEN / AMBER / RED.</a:t>
+              <a:t>Draft from the playbook, score GREEN / AMBER / RED.</a:t>
             </a:r>
           </a:p>
         </p:txBody>
@@ -21205,7 +20097,7 @@
           </a:fontRef>
         </p:style>
         <p:txBody>
-          <a:bodyPr wrap="square" lIns="0" tIns="0" rIns="0" bIns="0" rtlCol="0" anchor="ctr"/>
+          <a:bodyPr rtlCol="0" anchor="ctr" wrap="square" lIns="0" rIns="0" tIns="0" bIns="0"/>
           <a:lstStyle/>
           <a:p>
             <a:pPr algn="ctr"/>
@@ -21238,7 +20130,7 @@
           <a:noFill/>
         </p:spPr>
         <p:txBody>
-          <a:bodyPr wrap="square" lIns="0" tIns="0" rIns="0" bIns="0" anchor="ctr">
+          <a:bodyPr wrap="square" anchor="ctr" lIns="0" rIns="0" tIns="0" bIns="0">
             <a:spAutoFit/>
           </a:bodyPr>
           <a:lstStyle/>
@@ -21269,15 +20161,15 @@
         <p:spPr>
           <a:xfrm>
             <a:off x="3319272" y="5486400"/>
-            <a:ext cx="4892040" cy="406073"/>
-          </a:xfrm>
-          <a:prstGeom prst="rect">
-            <a:avLst/>
-          </a:prstGeom>
-          <a:noFill/>
-        </p:spPr>
-        <p:txBody>
-          <a:bodyPr wrap="square" lIns="0" tIns="0" rIns="0" bIns="0">
+            <a:ext cx="4892040" cy="603504"/>
+          </a:xfrm>
+          <a:prstGeom prst="rect">
+            <a:avLst/>
+          </a:prstGeom>
+          <a:noFill/>
+        </p:spPr>
+        <p:txBody>
+          <a:bodyPr wrap="square" lIns="0" rIns="0" tIns="0" bIns="0">
             <a:spAutoFit/>
           </a:bodyPr>
           <a:lstStyle/>
@@ -21316,28 +20208,7 @@
                 </a:solidFill>
                 <a:latin typeface="Arial"/>
               </a:rPr>
-              <a:t>The lawyer decides RED; the decision feeds the </a:t>
-            </a:r>
-            <a:r>
-              <a:rPr sz="1150" b="1">
-                <a:solidFill>
-                  <a:srgbClr val="394150"/>
-                </a:solidFill>
-                <a:highlight>
-                  <a:srgbClr val="FFFF00"/>
-                </a:highlight>
-                <a:latin typeface="Arial"/>
-              </a:rPr>
-              <a:t>knowledge base</a:t>
-            </a:r>
-            <a:r>
-              <a:rPr sz="1150" b="1">
-                <a:solidFill>
-                  <a:srgbClr val="394150"/>
-                </a:solidFill>
-                <a:latin typeface="Arial"/>
-              </a:rPr>
-              <a:t>.</a:t>
+              <a:t>The lawyer decides RED; the decision feeds the knowledge base.</a:t>
             </a:r>
           </a:p>
         </p:txBody>
@@ -21381,7 +20252,7 @@
           </a:fontRef>
         </p:style>
         <p:txBody>
-          <a:bodyPr wrap="square" lIns="0" tIns="0" rIns="0" bIns="0" rtlCol="0" anchor="ctr"/>
+          <a:bodyPr rtlCol="0" anchor="ctr" wrap="square" lIns="0" rIns="0" tIns="0" bIns="0"/>
           <a:lstStyle/>
           <a:p>
             <a:pPr algn="ctr"/>
@@ -21723,319 +20594,4 @@
   </a:objectDefaults>
   <a:extraClrSchemeLst/>
 </a:theme>
-</file>
-
-<file path=ppt/theme/theme2.xml><?xml version="1.0" encoding="utf-8"?>
-<a:theme xmlns:a="http://schemas.openxmlformats.org/drawingml/2006/main" name="Office Theme">
-  <a:themeElements>
-    <a:clrScheme name="Office">
-      <a:dk1>
-        <a:sysClr val="windowText" lastClr="000000"/>
-      </a:dk1>
-      <a:lt1>
-        <a:sysClr val="window" lastClr="FFFFFF"/>
-      </a:lt1>
-      <a:dk2>
-        <a:srgbClr val="0E2841"/>
-      </a:dk2>
-      <a:lt2>
-        <a:srgbClr val="E8E8E8"/>
-      </a:lt2>
-      <a:accent1>
-        <a:srgbClr val="156082"/>
-      </a:accent1>
-      <a:accent2>
-        <a:srgbClr val="E97132"/>
-      </a:accent2>
-      <a:accent3>
-        <a:srgbClr val="196B24"/>
-      </a:accent3>
-      <a:accent4>
-        <a:srgbClr val="0F9ED5"/>
-      </a:accent4>
-      <a:accent5>
-        <a:srgbClr val="A02B93"/>
-      </a:accent5>
-      <a:accent6>
-        <a:srgbClr val="4EA72E"/>
-      </a:accent6>
-      <a:hlink>
-        <a:srgbClr val="467886"/>
-      </a:hlink>
-      <a:folHlink>
-        <a:srgbClr val="96607D"/>
-      </a:folHlink>
-    </a:clrScheme>
-    <a:fontScheme name="Office">
-      <a:majorFont>
-        <a:latin typeface="Aptos Display" panose="02110004020202020204"/>
-        <a:ea typeface=""/>
-        <a:cs typeface=""/>
-        <a:font script="Jpan" typeface="游ゴシック Light"/>
-        <a:font script="Hang" typeface="맑은 고딕"/>
-        <a:font script="Hans" typeface="等线 Light"/>
-        <a:font script="Hant" typeface="新細明體"/>
-        <a:font script="Arab" typeface="Times New Roman"/>
-        <a:font script="Hebr" typeface="Times New Roman"/>
-        <a:font script="Thai" typeface="Angsana New"/>
-        <a:font script="Ethi" typeface="Nyala"/>
-        <a:font script="Beng" typeface="Vrinda"/>
-        <a:font script="Gujr" typeface="Shruti"/>
-        <a:font script="Khmr" typeface="MoolBoran"/>
-        <a:font script="Knda" typeface="Tunga"/>
-        <a:font script="Guru" typeface="Raavi"/>
-        <a:font script="Cans" typeface="Euphemia"/>
-        <a:font script="Cher" typeface="Plantagenet Cherokee"/>
-        <a:font script="Yiii" typeface="Microsoft Yi Baiti"/>
-        <a:font script="Tibt" typeface="Microsoft Himalaya"/>
-        <a:font script="Thaa" typeface="MV Boli"/>
-        <a:font script="Deva" typeface="Mangal"/>
-        <a:font script="Telu" typeface="Gautami"/>
-        <a:font script="Taml" typeface="Latha"/>
-        <a:font script="Syrc" typeface="Estrangelo Edessa"/>
-        <a:font script="Orya" typeface="Kalinga"/>
-        <a:font script="Mlym" typeface="Kartika"/>
-        <a:font script="Laoo" typeface="DokChampa"/>
-        <a:font script="Sinh" typeface="Iskoola Pota"/>
-        <a:font script="Mong" typeface="Mongolian Baiti"/>
-        <a:font script="Viet" typeface="Times New Roman"/>
-        <a:font script="Uigh" typeface="Microsoft Uighur"/>
-        <a:font script="Geor" typeface="Sylfaen"/>
-        <a:font script="Armn" typeface="Arial"/>
-        <a:font script="Bugi" typeface="Leelawadee UI"/>
-        <a:font script="Bopo" typeface="Microsoft JhengHei"/>
-        <a:font script="Java" typeface="Javanese Text"/>
-        <a:font script="Lisu" typeface="Segoe UI"/>
-        <a:font script="Mymr" typeface="Myanmar Text"/>
-        <a:font script="Nkoo" typeface="Ebrima"/>
-        <a:font script="Olck" typeface="Nirmala UI"/>
-        <a:font script="Osma" typeface="Ebrima"/>
-        <a:font script="Phag" typeface="Phagspa"/>
-        <a:font script="Syrn" typeface="Estrangelo Edessa"/>
-        <a:font script="Syrj" typeface="Estrangelo Edessa"/>
-        <a:font script="Syre" typeface="Estrangelo Edessa"/>
-        <a:font script="Sora" typeface="Nirmala UI"/>
-        <a:font script="Tale" typeface="Microsoft Tai Le"/>
-        <a:font script="Talu" typeface="Microsoft New Tai Lue"/>
-        <a:font script="Tfng" typeface="Ebrima"/>
-      </a:majorFont>
-      <a:minorFont>
-        <a:latin typeface="Aptos" panose="02110004020202020204"/>
-        <a:ea typeface=""/>
-        <a:cs typeface=""/>
-        <a:font script="Jpan" typeface="游ゴシック"/>
-        <a:font script="Hang" typeface="맑은 고딕"/>
-        <a:font script="Hans" typeface="等线"/>
-        <a:font script="Hant" typeface="新細明體"/>
-        <a:font script="Arab" typeface="Arial"/>
-        <a:font script="Hebr" typeface="Arial"/>
-        <a:font script="Thai" typeface="Cordia New"/>
-        <a:font script="Ethi" typeface="Nyala"/>
-        <a:font script="Beng" typeface="Vrinda"/>
-        <a:font script="Gujr" typeface="Shruti"/>
-        <a:font script="Khmr" typeface="DaunPenh"/>
-        <a:font script="Knda" typeface="Tunga"/>
-        <a:font script="Guru" typeface="Raavi"/>
-        <a:font script="Cans" typeface="Euphemia"/>
-        <a:font script="Cher" typeface="Plantagenet Cherokee"/>
-        <a:font script="Yiii" typeface="Microsoft Yi Baiti"/>
-        <a:font script="Tibt" typeface="Microsoft Himalaya"/>
-        <a:font script="Thaa" typeface="MV Boli"/>
-        <a:font script="Deva" typeface="Mangal"/>
-        <a:font script="Telu" typeface="Gautami"/>
-        <a:font script="Taml" typeface="Latha"/>
-        <a:font script="Syrc" typeface="Estrangelo Edessa"/>
-        <a:font script="Orya" typeface="Kalinga"/>
-        <a:font script="Mlym" typeface="Kartika"/>
-        <a:font script="Laoo" typeface="DokChampa"/>
-        <a:font script="Sinh" typeface="Iskoola Pota"/>
-        <a:font script="Mong" typeface="Mongolian Baiti"/>
-        <a:font script="Viet" typeface="Arial"/>
-        <a:font script="Uigh" typeface="Microsoft Uighur"/>
-        <a:font script="Geor" typeface="Sylfaen"/>
-        <a:font script="Armn" typeface="Arial"/>
-        <a:font script="Bugi" typeface="Leelawadee UI"/>
-        <a:font script="Bopo" typeface="Microsoft JhengHei"/>
-        <a:font script="Java" typeface="Javanese Text"/>
-        <a:font script="Lisu" typeface="Segoe UI"/>
-        <a:font script="Mymr" typeface="Myanmar Text"/>
-        <a:font script="Nkoo" typeface="Ebrima"/>
-        <a:font script="Olck" typeface="Nirmala UI"/>
-        <a:font script="Osma" typeface="Ebrima"/>
-        <a:font script="Phag" typeface="Phagspa"/>
-        <a:font script="Syrn" typeface="Estrangelo Edessa"/>
-        <a:font script="Syrj" typeface="Estrangelo Edessa"/>
-        <a:font script="Syre" typeface="Estrangelo Edessa"/>
-        <a:font script="Sora" typeface="Nirmala UI"/>
-        <a:font script="Tale" typeface="Microsoft Tai Le"/>
-        <a:font script="Talu" typeface="Microsoft New Tai Lue"/>
-        <a:font script="Tfng" typeface="Ebrima"/>
-      </a:minorFont>
-    </a:fontScheme>
-    <a:fmtScheme name="Office">
-      <a:fillStyleLst>
-        <a:solidFill>
-          <a:schemeClr val="phClr"/>
-        </a:solidFill>
-        <a:gradFill rotWithShape="1">
-          <a:gsLst>
-            <a:gs pos="0">
-              <a:schemeClr val="phClr">
-                <a:lumMod val="110000"/>
-                <a:satMod val="105000"/>
-                <a:tint val="67000"/>
-              </a:schemeClr>
-            </a:gs>
-            <a:gs pos="50000">
-              <a:schemeClr val="phClr">
-                <a:lumMod val="105000"/>
-                <a:satMod val="103000"/>
-                <a:tint val="73000"/>
-              </a:schemeClr>
-            </a:gs>
-            <a:gs pos="100000">
-              <a:schemeClr val="phClr">
-                <a:lumMod val="105000"/>
-                <a:satMod val="109000"/>
-                <a:tint val="81000"/>
-              </a:schemeClr>
-            </a:gs>
-          </a:gsLst>
-          <a:lin ang="5400000" scaled="0"/>
-        </a:gradFill>
-        <a:gradFill rotWithShape="1">
-          <a:gsLst>
-            <a:gs pos="0">
-              <a:schemeClr val="phClr">
-                <a:satMod val="103000"/>
-                <a:lumMod val="102000"/>
-                <a:tint val="94000"/>
-              </a:schemeClr>
-            </a:gs>
-            <a:gs pos="50000">
-              <a:schemeClr val="phClr">
-                <a:satMod val="110000"/>
-                <a:lumMod val="100000"/>
-                <a:shade val="100000"/>
-              </a:schemeClr>
-            </a:gs>
-            <a:gs pos="100000">
-              <a:schemeClr val="phClr">
-                <a:lumMod val="99000"/>
-                <a:satMod val="120000"/>
-                <a:shade val="78000"/>
-              </a:schemeClr>
-            </a:gs>
-          </a:gsLst>
-          <a:lin ang="5400000" scaled="0"/>
-        </a:gradFill>
-      </a:fillStyleLst>
-      <a:lnStyleLst>
-        <a:ln w="12700" cap="flat" cmpd="sng" algn="ctr">
-          <a:solidFill>
-            <a:schemeClr val="phClr"/>
-          </a:solidFill>
-          <a:prstDash val="solid"/>
-          <a:miter lim="800000"/>
-        </a:ln>
-        <a:ln w="19050" cap="flat" cmpd="sng" algn="ctr">
-          <a:solidFill>
-            <a:schemeClr val="phClr"/>
-          </a:solidFill>
-          <a:prstDash val="solid"/>
-          <a:miter lim="800000"/>
-        </a:ln>
-        <a:ln w="25400" cap="flat" cmpd="sng" algn="ctr">
-          <a:solidFill>
-            <a:schemeClr val="phClr"/>
-          </a:solidFill>
-          <a:prstDash val="solid"/>
-          <a:miter lim="800000"/>
-        </a:ln>
-      </a:lnStyleLst>
-      <a:effectStyleLst>
-        <a:effectStyle>
-          <a:effectLst/>
-        </a:effectStyle>
-        <a:effectStyle>
-          <a:effectLst/>
-        </a:effectStyle>
-        <a:effectStyle>
-          <a:effectLst>
-            <a:outerShdw blurRad="57150" dist="19050" dir="5400000" algn="ctr" rotWithShape="0">
-              <a:srgbClr val="000000">
-                <a:alpha val="63000"/>
-              </a:srgbClr>
-            </a:outerShdw>
-          </a:effectLst>
-        </a:effectStyle>
-      </a:effectStyleLst>
-      <a:bgFillStyleLst>
-        <a:solidFill>
-          <a:schemeClr val="phClr"/>
-        </a:solidFill>
-        <a:solidFill>
-          <a:schemeClr val="phClr">
-            <a:tint val="95000"/>
-            <a:satMod val="170000"/>
-          </a:schemeClr>
-        </a:solidFill>
-        <a:gradFill rotWithShape="1">
-          <a:gsLst>
-            <a:gs pos="0">
-              <a:schemeClr val="phClr">
-                <a:tint val="93000"/>
-                <a:satMod val="150000"/>
-                <a:shade val="98000"/>
-                <a:lumMod val="102000"/>
-              </a:schemeClr>
-            </a:gs>
-            <a:gs pos="50000">
-              <a:schemeClr val="phClr">
-                <a:tint val="98000"/>
-                <a:satMod val="130000"/>
-                <a:shade val="90000"/>
-                <a:lumMod val="103000"/>
-              </a:schemeClr>
-            </a:gs>
-            <a:gs pos="100000">
-              <a:schemeClr val="phClr">
-                <a:shade val="63000"/>
-                <a:satMod val="120000"/>
-              </a:schemeClr>
-            </a:gs>
-          </a:gsLst>
-          <a:lin ang="5400000" scaled="0"/>
-        </a:gradFill>
-      </a:bgFillStyleLst>
-    </a:fmtScheme>
-  </a:themeElements>
-  <a:objectDefaults>
-    <a:lnDef>
-      <a:spPr/>
-      <a:bodyPr/>
-      <a:lstStyle/>
-      <a:style>
-        <a:lnRef idx="2">
-          <a:schemeClr val="accent1"/>
-        </a:lnRef>
-        <a:fillRef idx="0">
-          <a:schemeClr val="accent1"/>
-        </a:fillRef>
-        <a:effectRef idx="1">
-          <a:schemeClr val="accent1"/>
-        </a:effectRef>
-        <a:fontRef idx="minor">
-          <a:schemeClr val="tx1"/>
-        </a:fontRef>
-      </a:style>
-    </a:lnDef>
-  </a:objectDefaults>
-  <a:extraClrSchemeLst/>
-  <a:extLst>
-    <a:ext uri="{05A4C25C-085E-4340-85A3-A5531E510DB2}">
-      <thm15:themeFamily xmlns:thm15="http://schemas.microsoft.com/office/thememl/2012/main" name="Office Theme" id="{2E142A2C-CD16-42D6-873A-C26D2A0506FA}" vid="{1BDDFF52-6CD6-40A5-AB3C-68EB2F1E4D0A}"/>
-    </a:ext>
-  </a:extLst>
-</a:theme>
 </file>
--- a/deck/FirstPass_PortSwigger.pptx
+++ b/deck/FirstPass_PortSwigger.pptx
@@ -3487,6 +3487,46 @@
         </p:nvSpPr>
         <p:spPr>
           <a:xfrm>
+            <a:off x="777240" y="5943600"/>
+            <a:ext cx="7315200" cy="365760"/>
+          </a:xfrm>
+          <a:prstGeom prst="rect">
+            <a:avLst/>
+          </a:prstGeom>
+          <a:noFill/>
+        </p:spPr>
+        <p:txBody>
+          <a:bodyPr wrap="square" anchor="t" lIns="0" rIns="0" tIns="0" bIns="0">
+            <a:spAutoFit/>
+          </a:bodyPr>
+          <a:lstStyle/>
+          <a:p>
+            <a:pPr algn="l">
+              <a:lnSpc>
+                <a:spcPct val="104000"/>
+              </a:lnSpc>
+            </a:pPr>
+            <a:r>
+              <a:rPr sz="1250" b="1" i="0">
+                <a:solidFill>
+                  <a:srgbClr val="E14E12"/>
+                </a:solidFill>
+                <a:latin typeface="Arial"/>
+                <a:hlinkClick r:id="rId2"/>
+              </a:rPr>
+              <a:t>github.com/Abdelrhman-Rayis/FirstPass</a:t>
+            </a:r>
+          </a:p>
+        </p:txBody>
+      </p:sp>
+      <p:sp>
+        <p:nvSpPr>
+          <p:cNvPr id="12" name="TextBox 11"/>
+          <p:cNvSpPr txBox="1"/>
+          <p:nvPr/>
+        </p:nvSpPr>
+        <p:spPr>
+          <a:xfrm>
             <a:off x="8945575" y="1828800"/>
             <a:ext cx="2560320" cy="365760"/>
           </a:xfrm>
@@ -3520,7 +3560,7 @@
       </p:sp>
       <p:sp>
         <p:nvSpPr>
-          <p:cNvPr id="12" name="Rounded Rectangle 11"/>
+          <p:cNvPr id="13" name="Rounded Rectangle 12"/>
           <p:cNvSpPr/>
           <p:nvPr/>
         </p:nvSpPr>
@@ -3575,7 +3615,7 @@
       </p:sp>
       <p:sp>
         <p:nvSpPr>
-          <p:cNvPr id="13" name="Rounded Rectangle 12"/>
+          <p:cNvPr id="14" name="Rounded Rectangle 13"/>
           <p:cNvSpPr/>
           <p:nvPr/>
         </p:nvSpPr>
@@ -3630,7 +3670,7 @@
       </p:sp>
       <p:sp>
         <p:nvSpPr>
-          <p:cNvPr id="14" name="Rounded Rectangle 13"/>
+          <p:cNvPr id="15" name="Rounded Rectangle 14"/>
           <p:cNvSpPr/>
           <p:nvPr/>
         </p:nvSpPr>
@@ -3685,7 +3725,7 @@
       </p:sp>
       <p:sp>
         <p:nvSpPr>
-          <p:cNvPr id="15" name="TextBox 14"/>
+          <p:cNvPr id="16" name="TextBox 15"/>
           <p:cNvSpPr txBox="1"/>
           <p:nvPr/>
         </p:nvSpPr>
